--- a/docs/Concrete Crack Detection - Presentation.pptx
+++ b/docs/Concrete Crack Detection - Presentation.pptx
@@ -4,9 +4,6 @@
   <p:sldMasterIdLst>
     <p:sldMasterId id="2147483648" r:id="rId1"/>
   </p:sldMasterIdLst>
-  <p:notesMasterIdLst>
-    <p:notesMasterId r:id="rId14"/>
-  </p:notesMasterIdLst>
   <p:sldIdLst>
     <p:sldId id="256" r:id="rId2"/>
     <p:sldId id="257" r:id="rId3"/>
@@ -21,6 +18,9 @@
     <p:sldId id="266" r:id="rId12"/>
     <p:sldId id="267" r:id="rId13"/>
   </p:sldIdLst>
+  <p:notesMasterIdLst>
+    <p:notesMasterId r:id="rId14"/>
+  </p:notesMasterIdLst>
   <p:sldSz cx="12192000" cy="6858000"/>
   <p:notesSz cx="6858000" cy="12192000"/>
   <p:defaultTextStyle>
@@ -115,11 +115,6 @@
       </a:defRPr>
     </a:lvl9pPr>
   </p:defaultTextStyle>
-  <p:extLst>
-    <p:ext uri="{EFAFB233-063F-42B5-8137-9DF3F51BA10A}">
-      <p15:sldGuideLst xmlns:p15="http://schemas.microsoft.com/office/powerpoint/2012/main"/>
-    </p:ext>
-  </p:extLst>
 </p:presentation>
 </file>
 
@@ -145,10 +140,234 @@
           <a:chExt cx="0" cy="0"/>
         </a:xfrm>
       </p:grpSpPr>
+      <p:sp>
+        <p:nvSpPr>
+          <p:cNvPr id="2" name="Header Placeholder 1"/>
+          <p:cNvSpPr>
+            <a:spLocks noGrp="1"/>
+          </p:cNvSpPr>
+          <p:nvPr>
+            <p:ph type="hdr" sz="quarter"/>
+          </p:nvPr>
+        </p:nvSpPr>
+        <p:spPr>
+          <a:xfrm>
+            <a:off x="0" y="0"/>
+            <a:ext cx="2971800" cy="458788"/>
+          </a:xfrm>
+          <a:prstGeom prst="rect">
+            <a:avLst/>
+          </a:prstGeom>
+        </p:spPr>
+        <p:txBody>
+          <a:bodyPr vert="horz" lIns="91440" tIns="45720" rIns="91440" bIns="45720" rtlCol="0"/>
+          <a:lstStyle>
+            <a:lvl1pPr algn="l">
+              <a:defRPr sz="1200"/>
+            </a:lvl1pPr>
+          </a:lstStyle>
+          <a:p>
+            <a:endParaRPr lang="en-US"/>
+          </a:p>
+        </p:txBody>
+      </p:sp>
+      <p:sp>
+        <p:nvSpPr>
+          <p:cNvPr id="3" name="Date Placeholder 2"/>
+          <p:cNvSpPr>
+            <a:spLocks noGrp="1"/>
+          </p:cNvSpPr>
+          <p:nvPr>
+            <p:ph type="dt" idx="1"/>
+          </p:nvPr>
+        </p:nvSpPr>
+        <p:spPr>
+          <a:xfrm>
+            <a:off x="3884613" y="0"/>
+            <a:ext cx="2971800" cy="458788"/>
+          </a:xfrm>
+          <a:prstGeom prst="rect">
+            <a:avLst/>
+          </a:prstGeom>
+        </p:spPr>
+        <p:txBody>
+          <a:bodyPr vert="horz" lIns="91440" tIns="45720" rIns="91440" bIns="45720" rtlCol="0"/>
+          <a:lstStyle>
+            <a:lvl1pPr algn="r">
+              <a:defRPr sz="1200"/>
+            </a:lvl1pPr>
+          </a:lstStyle>
+          <a:p>
+            <a:fld id="{5282F153-3F37-0F45-9E97-73ACFA13230C}" type="datetimeFigureOut">
+              <a:rPr lang="en-US"/>
+              <a:t>7/23/19</a:t>
+            </a:fld>
+            <a:endParaRPr lang="en-US"/>
+          </a:p>
+        </p:txBody>
+      </p:sp>
+      <p:sp>
+        <p:nvSpPr>
+          <p:cNvPr id="4" name="Slide Image Placeholder 3"/>
+          <p:cNvSpPr>
+            <a:spLocks noGrp="1" noRot="1" noChangeAspect="1"/>
+          </p:cNvSpPr>
+          <p:nvPr>
+            <p:ph type="sldImg" idx="2"/>
+          </p:nvPr>
+        </p:nvSpPr>
+        <p:spPr>
+          <a:xfrm>
+            <a:off x="685800" y="1143000"/>
+            <a:ext cx="5486400" cy="3086100"/>
+          </a:xfrm>
+          <a:prstGeom prst="rect">
+            <a:avLst/>
+          </a:prstGeom>
+          <a:noFill/>
+          <a:ln w="12700">
+            <a:solidFill>
+              <a:prstClr val="black"/>
+            </a:solidFill>
+          </a:ln>
+        </p:spPr>
+        <p:txBody>
+          <a:bodyPr vert="horz" lIns="91440" tIns="45720" rIns="91440" bIns="45720" rtlCol="0" anchor="ctr"/>
+          <a:lstStyle/>
+          <a:p>
+            <a:endParaRPr lang="en-US"/>
+          </a:p>
+        </p:txBody>
+      </p:sp>
+      <p:sp>
+        <p:nvSpPr>
+          <p:cNvPr id="5" name="Notes Placeholder 4"/>
+          <p:cNvSpPr>
+            <a:spLocks noGrp="1"/>
+          </p:cNvSpPr>
+          <p:nvPr>
+            <p:ph type="body" sz="quarter" idx="3"/>
+          </p:nvPr>
+        </p:nvSpPr>
+        <p:spPr>
+          <a:xfrm>
+            <a:off x="685800" y="4400550"/>
+            <a:ext cx="5486400" cy="3600450"/>
+          </a:xfrm>
+          <a:prstGeom prst="rect">
+            <a:avLst/>
+          </a:prstGeom>
+        </p:spPr>
+        <p:txBody>
+          <a:bodyPr vert="horz" lIns="91440" tIns="45720" rIns="91440" bIns="45720" rtlCol="0"/>
+          <a:lstStyle/>
+          <a:p>
+            <a:pPr lvl="0"/>
+            <a:r>
+              <a:rPr lang="en-US"/>
+              <a:t>Click to edit Master text styles</a:t>
+            </a:r>
+          </a:p>
+          <a:p>
+            <a:pPr lvl="1"/>
+            <a:r>
+              <a:rPr lang="en-US"/>
+              <a:t>Second level</a:t>
+            </a:r>
+          </a:p>
+          <a:p>
+            <a:pPr lvl="2"/>
+            <a:r>
+              <a:rPr lang="en-US"/>
+              <a:t>Third level</a:t>
+            </a:r>
+          </a:p>
+          <a:p>
+            <a:pPr lvl="3"/>
+            <a:r>
+              <a:rPr lang="en-US"/>
+              <a:t>Fourth level</a:t>
+            </a:r>
+          </a:p>
+          <a:p>
+            <a:pPr lvl="4"/>
+            <a:r>
+              <a:rPr lang="en-US"/>
+              <a:t>Fifth level</a:t>
+            </a:r>
+          </a:p>
+        </p:txBody>
+      </p:sp>
+      <p:sp>
+        <p:nvSpPr>
+          <p:cNvPr id="6" name="Footer Placeholder 5"/>
+          <p:cNvSpPr>
+            <a:spLocks noGrp="1"/>
+          </p:cNvSpPr>
+          <p:nvPr>
+            <p:ph type="ftr" sz="quarter" idx="4"/>
+          </p:nvPr>
+        </p:nvSpPr>
+        <p:spPr>
+          <a:xfrm>
+            <a:off x="0" y="8685213"/>
+            <a:ext cx="2971800" cy="458787"/>
+          </a:xfrm>
+          <a:prstGeom prst="rect">
+            <a:avLst/>
+          </a:prstGeom>
+        </p:spPr>
+        <p:txBody>
+          <a:bodyPr vert="horz" lIns="91440" tIns="45720" rIns="91440" bIns="45720" rtlCol="0" anchor="b"/>
+          <a:lstStyle>
+            <a:lvl1pPr algn="l">
+              <a:defRPr sz="1200"/>
+            </a:lvl1pPr>
+          </a:lstStyle>
+          <a:p>
+            <a:endParaRPr lang="en-US"/>
+          </a:p>
+        </p:txBody>
+      </p:sp>
+      <p:sp>
+        <p:nvSpPr>
+          <p:cNvPr id="7" name="Slide Number Placeholder 6"/>
+          <p:cNvSpPr>
+            <a:spLocks noGrp="1"/>
+          </p:cNvSpPr>
+          <p:nvPr>
+            <p:ph type="sldNum" sz="quarter" idx="5"/>
+          </p:nvPr>
+        </p:nvSpPr>
+        <p:spPr>
+          <a:xfrm>
+            <a:off x="3884613" y="8685213"/>
+            <a:ext cx="2971800" cy="458787"/>
+          </a:xfrm>
+          <a:prstGeom prst="rect">
+            <a:avLst/>
+          </a:prstGeom>
+        </p:spPr>
+        <p:txBody>
+          <a:bodyPr vert="horz" lIns="91440" tIns="45720" rIns="91440" bIns="45720" rtlCol="0" anchor="b"/>
+          <a:lstStyle>
+            <a:lvl1pPr algn="r">
+              <a:defRPr sz="1200"/>
+            </a:lvl1pPr>
+          </a:lstStyle>
+          <a:p>
+            <a:fld id="{CE5E9CC1-C706-0F49-92D6-E571CC5EEA8F}" type="slidenum">
+              <a:rPr lang="en-US"/>
+              <a:t>‹#›</a:t>
+            </a:fld>
+            <a:endParaRPr lang="en-US"/>
+          </a:p>
+        </p:txBody>
+      </p:sp>
     </p:spTree>
     <p:extLst>
       <p:ext uri="{BB962C8B-B14F-4D97-AF65-F5344CB8AC3E}">
-        <p14:creationId xmlns:p14="http://schemas.microsoft.com/office/powerpoint/2010/main" val="4014308123"/>
+        <p14:creationId xmlns:p14="http://schemas.microsoft.com/office/powerpoint/2010/main" val="1024086991"/>
       </p:ext>
     </p:extLst>
   </p:cSld>
@@ -296,6 +515,7 @@
               <a:rPr lang="en-US" dirty="0"/>
               <a:t>[สมาชิก 1] สวัสดีครับ/ค่ะ วันนี้นำเสนอโปรเจกต์ระบบตรวจจับรอยร้าวบนพื้นผิวคอนกรีต ด้วยการประมวลผลภาพแบบดั้งเดิม</a:t>
             </a:r>
+            <a:endParaRPr lang="en-US" dirty="0"/>
           </a:p>
         </p:txBody>
       </p:sp>
@@ -381,8 +601,9 @@
           <a:p>
             <a:r>
               <a:rPr lang="en-US" dirty="0"/>
-              <a:t>[สมาชิก 2] บทเรียน: เกณฑ์ aspect ratio เดิมตัดรอยร้าวโค้งทิ้ง เปลี่ยนเป็น circularity ดีขึ้นชัด</a:t>
-            </a:r>
+              <a:t>[สมาชิก 3] อธิบายรอบการจูน: baseline เดาค่า precision ต่ำ / รอบ 1 grid search แรกดัน precision / รอบ 2 ขยาย grid + ข้าม morphology ได้ recall ฟื้น / รอบ 3 นับ area จริง เปลี่ยนเป็น circularity และแบ่ง train-held out</a:t>
+            </a:r>
+            <a:endParaRPr lang="en-US" dirty="0"/>
           </a:p>
         </p:txBody>
       </p:sp>
@@ -470,6 +691,7 @@
               <a:rPr lang="en-US" dirty="0"/>
               <a:t>[สมาชิก 3] ตัวอย่างผลดีและล้มเหลว บางกรณีเป็นปัญหาของภาพเฉลยเอง ไม่ใช่ของระบบ</a:t>
             </a:r>
+            <a:endParaRPr lang="en-US" dirty="0"/>
           </a:p>
         </p:txBody>
       </p:sp>
@@ -557,6 +779,7 @@
               <a:rPr lang="en-US" dirty="0"/>
               <a:t>[สมาชิก 1] ต่อยอดสู่ Edge AI/โดรน ไปป์ไลน์เร็วพอ และสรุปผลงาน ขอบคุณครับ/ค่ะ</a:t>
             </a:r>
+            <a:endParaRPr lang="en-US" dirty="0"/>
           </a:p>
         </p:txBody>
       </p:sp>
@@ -644,6 +867,7 @@
               <a:rPr lang="en-US" dirty="0"/>
               <a:t>[สมาชิก 1] ที่มาจากแผ่นดินไหว รอยร้าวเป็นสัญญาณเตือนแรก แต่ตรวจด้วยคนช้าและขึ้นกับประสบการณ์</a:t>
             </a:r>
+            <a:endParaRPr lang="en-US" dirty="0"/>
           </a:p>
         </p:txBody>
       </p:sp>
@@ -731,6 +955,7 @@
               <a:rPr lang="en-US" dirty="0"/>
               <a:t>[สมาชิก 1] จุดประสงค์คือแยกรอยร้าวจริงจากพื้นผิวปกติ ใช้ traditional IP ล้วน ทดสอบบน CrackForest 118 ภาพ</a:t>
             </a:r>
+            <a:endParaRPr lang="en-US" dirty="0"/>
           </a:p>
         </p:txBody>
       </p:sp>
@@ -818,6 +1043,7 @@
               <a:rPr lang="en-US" dirty="0"/>
               <a:t>[สมาชิก 2] ไปป์ไลน์ 4 ขั้น จะเห็นว่าขั้น 3-4 ทำหน้าที่กำจัด noise ที่ขั้น 2 ติดมา</a:t>
             </a:r>
+            <a:endParaRPr lang="en-US" dirty="0"/>
           </a:p>
         </p:txBody>
       </p:sp>
@@ -905,6 +1131,7 @@
               <a:rPr lang="en-US" dirty="0"/>
               <a:t>[สมาชิก 2] อธิบายแต่ละขั้น: pre-processing, adaptive threshold, morphology, shape analysis พารามิเตอร์มาจาก grid search</a:t>
             </a:r>
+            <a:endParaRPr lang="en-US" dirty="0"/>
           </a:p>
         </p:txBody>
       </p:sp>
@@ -992,6 +1219,7 @@
               <a:rPr lang="en-US" dirty="0"/>
               <a:t>[สมาชิก 3] วัดผลระดับพิกเซล แยกภาพฝึกกับภาพทดสอบ และไม่ใช้ accuracy เพราะข้อมูลไม่สมดุล</a:t>
             </a:r>
+            <a:endParaRPr lang="en-US" dirty="0"/>
           </a:p>
         </p:txBody>
       </p:sp>
@@ -1079,6 +1307,7 @@
               <a:rPr lang="en-US" dirty="0"/>
               <a:t>[สมาชิก 3] อธิบายตัวชี้วัด: นับ TP/FP/FN ทีละพิกเซล  Precision = ถูกจริงกี่ % ของที่ทาย, Recall = จับได้กี่ % ของจริง, IoU = ความซ้อนทับ, Dice = เลขหลักที่รายงาน สองตัวแรกบอกมั่ว/พลาดแยกกัน สองตัวหลังรวมเป็นตัวเดียว</a:t>
             </a:r>
+            <a:endParaRPr lang="en-US" dirty="0"/>
           </a:p>
         </p:txBody>
       </p:sp>
@@ -1166,6 +1395,7 @@
               <a:rPr lang="en-US" dirty="0"/>
               <a:t>[สมาชิก 3] ผลหลัก Dice 0.5024 จาก 0.3201 จุดที่เปลี่ยนมากคือ precision ที่เพิ่มเท่าตัว</a:t>
             </a:r>
+            <a:endParaRPr lang="en-US" dirty="0"/>
           </a:p>
         </p:txBody>
       </p:sp>
@@ -1253,6 +1483,7 @@
               <a:rPr lang="en-US" dirty="0"/>
               <a:t>[สมาชิก 3] Adaptive ชนะวิธีอื่น 102/118 ภาพ เพราะ edge และ otsu ไวต่อ texture และเงา</a:t>
             </a:r>
+            <a:endParaRPr lang="en-US" dirty="0"/>
           </a:p>
         </p:txBody>
       </p:sp>
@@ -1325,11 +1556,6 @@
 <file path=ppt/slideMasters/slideMaster1.xml><?xml version="1.0" encoding="utf-8"?>
 <p:sldMaster xmlns:a="http://schemas.openxmlformats.org/drawingml/2006/main" xmlns:r="http://schemas.openxmlformats.org/officeDocument/2006/relationships" xmlns:p="http://schemas.openxmlformats.org/presentationml/2006/main">
   <p:cSld>
-    <p:bg>
-      <p:bgRef idx="1001">
-        <a:schemeClr val="bg1"/>
-      </p:bgRef>
-    </p:bg>
     <p:spTree>
       <p:nvGrpSpPr>
         <p:cNvPr id="1" name=""/>
@@ -1612,7 +1838,6 @@
         <a:solidFill>
           <a:srgbClr val="2E3338"/>
         </a:solidFill>
-        <a:effectLst/>
       </p:bgPr>
     </p:bg>
     <p:spTree>
@@ -1651,13 +1876,6 @@
             <a:prstDash val="solid"/>
           </a:ln>
         </p:spPr>
-        <p:txBody>
-          <a:bodyPr/>
-          <a:lstStyle/>
-          <a:p>
-            <a:endParaRPr lang="en-US"/>
-          </a:p>
-        </p:txBody>
       </p:sp>
       <p:sp>
         <p:nvSpPr>
@@ -1681,13 +1899,6 @@
             <a:prstDash val="solid"/>
           </a:ln>
         </p:spPr>
-        <p:txBody>
-          <a:bodyPr/>
-          <a:lstStyle/>
-          <a:p>
-            <a:endParaRPr lang="en-US"/>
-          </a:p>
-        </p:txBody>
       </p:sp>
       <p:sp>
         <p:nvSpPr>
@@ -1711,13 +1922,6 @@
             <a:prstDash val="solid"/>
           </a:ln>
         </p:spPr>
-        <p:txBody>
-          <a:bodyPr/>
-          <a:lstStyle/>
-          <a:p>
-            <a:endParaRPr lang="en-US"/>
-          </a:p>
-        </p:txBody>
       </p:sp>
       <p:sp>
         <p:nvSpPr>
@@ -1741,13 +1945,6 @@
             <a:prstDash val="solid"/>
           </a:ln>
         </p:spPr>
-        <p:txBody>
-          <a:bodyPr/>
-          <a:lstStyle/>
-          <a:p>
-            <a:endParaRPr lang="en-US"/>
-          </a:p>
-        </p:txBody>
       </p:sp>
       <p:sp>
         <p:nvSpPr>
@@ -1771,13 +1968,6 @@
             <a:prstDash val="solid"/>
           </a:ln>
         </p:spPr>
-        <p:txBody>
-          <a:bodyPr/>
-          <a:lstStyle/>
-          <a:p>
-            <a:endParaRPr lang="en-US"/>
-          </a:p>
-        </p:txBody>
       </p:sp>
       <p:sp>
         <p:nvSpPr>
@@ -1801,13 +1991,6 @@
             <a:prstDash val="solid"/>
           </a:ln>
         </p:spPr>
-        <p:txBody>
-          <a:bodyPr/>
-          <a:lstStyle/>
-          <a:p>
-            <a:endParaRPr lang="en-US"/>
-          </a:p>
-        </p:txBody>
       </p:sp>
       <p:sp>
         <p:nvSpPr>
@@ -1831,13 +2014,6 @@
             <a:prstDash val="solid"/>
           </a:ln>
         </p:spPr>
-        <p:txBody>
-          <a:bodyPr/>
-          <a:lstStyle/>
-          <a:p>
-            <a:endParaRPr lang="en-US"/>
-          </a:p>
-        </p:txBody>
       </p:sp>
       <p:sp>
         <p:nvSpPr>
@@ -1861,13 +2037,6 @@
             <a:prstDash val="solid"/>
           </a:ln>
         </p:spPr>
-        <p:txBody>
-          <a:bodyPr/>
-          <a:lstStyle/>
-          <a:p>
-            <a:endParaRPr lang="en-US"/>
-          </a:p>
-        </p:txBody>
       </p:sp>
       <p:sp>
         <p:nvSpPr>
@@ -1890,11 +2059,11 @@
           <a:bodyPr wrap="square" rtlCol="0" anchor="ctr"/>
           <a:lstStyle/>
           <a:p>
-            <a:pPr marL="0" indent="0">
+            <a:pPr indent="0" marL="0">
               <a:buNone/>
             </a:pPr>
             <a:r>
-              <a:rPr lang="en-US" sz="1400" b="1" kern="0" spc="300" dirty="0">
+              <a:rPr lang="en-US" sz="1400" b="1" spc="300" kern="0" dirty="0">
                 <a:solidFill>
                   <a:srgbClr val="E8871E"/>
                 </a:solidFill>
@@ -1929,7 +2098,7 @@
           <a:bodyPr wrap="square" rtlCol="0" anchor="ctr"/>
           <a:lstStyle/>
           <a:p>
-            <a:pPr marL="0" indent="0">
+            <a:pPr indent="0" marL="0">
               <a:buNone/>
             </a:pPr>
             <a:r>
@@ -1968,7 +2137,7 @@
           <a:bodyPr wrap="square" rtlCol="0" anchor="ctr"/>
           <a:lstStyle/>
           <a:p>
-            <a:pPr marL="0" indent="0">
+            <a:pPr indent="0" marL="0">
               <a:buNone/>
             </a:pPr>
             <a:r>
@@ -2007,7 +2176,7 @@
           <a:bodyPr wrap="square" rtlCol="0" anchor="ctr"/>
           <a:lstStyle/>
           <a:p>
-            <a:pPr marL="0" indent="0">
+            <a:pPr indent="0" marL="0">
               <a:buNone/>
             </a:pPr>
             <a:r>
@@ -2021,6 +2190,9 @@
               </a:rPr>
               <a:t>นำเสนอโดย  </a:t>
             </a:r>
+            <a:pPr indent="0" marL="0">
+              <a:buNone/>
+            </a:pPr>
             <a:r>
               <a:rPr lang="en-US" sz="1600" b="1" dirty="0">
                 <a:solidFill>
@@ -2050,9 +2222,8 @@
     <p:bg>
       <p:bgPr>
         <a:solidFill>
-          <a:srgbClr val="2E3338"/>
+          <a:srgbClr val="F4F4F2"/>
         </a:solidFill>
-        <a:effectLst/>
       </p:bgPr>
     </p:bg>
     <p:spTree>
@@ -2077,8 +2248,8 @@
         </p:nvSpPr>
         <p:spPr>
           <a:xfrm>
-            <a:off x="731520" y="548640"/>
-            <a:ext cx="10972800" cy="640080"/>
+            <a:off x="640080" y="457200"/>
+            <a:ext cx="10881360" cy="731520"/>
           </a:xfrm>
           <a:prstGeom prst="rect">
             <a:avLst/>
@@ -2090,21 +2261,21 @@
           <a:bodyPr wrap="square" rtlCol="0" anchor="ctr"/>
           <a:lstStyle/>
           <a:p>
-            <a:pPr marL="0" indent="0">
+            <a:pPr indent="0" marL="0">
               <a:buNone/>
             </a:pPr>
             <a:r>
-              <a:rPr lang="en-US" sz="3400" b="1" dirty="0">
+              <a:rPr lang="en-US" sz="3200" b="1" dirty="0">
                 <a:solidFill>
-                  <a:srgbClr val="FFFFFF"/>
+                  <a:srgbClr val="222629"/>
                 </a:solidFill>
                 <a:latin typeface="Leelawadee UI" pitchFamily="34" charset="0"/>
                 <a:ea typeface="Leelawadee UI" pitchFamily="34" charset="-122"/>
                 <a:cs typeface="Leelawadee UI" pitchFamily="34" charset="-120"/>
               </a:rPr>
-              <a:t>บทเรียนสำคัญ</a:t>
-            </a:r>
-            <a:endParaRPr lang="en-US" sz="3400" dirty="0"/>
+              <a:t>รอบการจูน — เปลี่ยนอะไรบ้าง</a:t>
+            </a:r>
+            <a:endParaRPr lang="en-US" sz="3200" dirty="0"/>
           </a:p>
         </p:txBody>
       </p:sp>
@@ -2116,8 +2287,8 @@
         </p:nvSpPr>
         <p:spPr>
           <a:xfrm>
-            <a:off x="749808" y="1325880"/>
-            <a:ext cx="10972800" cy="457200"/>
+            <a:off x="658368" y="1170432"/>
+            <a:ext cx="10881360" cy="457200"/>
           </a:xfrm>
           <a:prstGeom prst="rect">
             <a:avLst/>
@@ -2129,34 +2300,1086 @@
           <a:bodyPr wrap="square" rtlCol="0" anchor="ctr"/>
           <a:lstStyle/>
           <a:p>
-            <a:pPr marL="0" indent="0">
+            <a:pPr indent="0" marL="0">
               <a:buNone/>
             </a:pPr>
             <a:r>
-              <a:rPr lang="en-US" sz="1800" i="1" dirty="0">
+              <a:rPr lang="en-US" sz="1500" i="1" dirty="0">
                 <a:solidFill>
-                  <a:srgbClr val="E8871E"/>
+                  <a:srgbClr val="5B6770"/>
                 </a:solidFill>
                 <a:latin typeface="Leelawadee UI" pitchFamily="34" charset="0"/>
                 <a:ea typeface="Leelawadee UI" pitchFamily="34" charset="-122"/>
                 <a:cs typeface="Leelawadee UI" pitchFamily="34" charset="-120"/>
               </a:rPr>
-              <a:t>เกณฑ์กรองรูปทรงเดิม (aspect ratio) ทำให้ผลแย่ลง</a:t>
-            </a:r>
-            <a:endParaRPr lang="en-US" sz="1800" dirty="0"/>
-          </a:p>
-        </p:txBody>
-      </p:sp>
-      <p:sp>
-        <p:nvSpPr>
-          <p:cNvPr id="4" name="Text 2"/>
-          <p:cNvSpPr/>
-          <p:nvPr/>
-        </p:nvSpPr>
-        <p:spPr>
-          <a:xfrm>
-            <a:off x="731520" y="1965960"/>
-            <a:ext cx="5486400" cy="1828800"/>
+              <a:t>จาก baseline ที่ตั้งค่าด้วยการเดา สู่ค่าที่ค้นด้วย grid search</a:t>
+            </a:r>
+            <a:endParaRPr lang="en-US" sz="1500" dirty="0"/>
+          </a:p>
+        </p:txBody>
+      </p:sp>
+      <p:graphicFrame>
+        <p:nvGraphicFramePr>
+          <p:cNvPr id="11" name="Table 0"/>
+          <p:cNvGraphicFramePr>
+            <a:graphicFrameLocks noGrp="1"/>
+          </p:cNvGraphicFramePr>
+          <p:nvPr>
+            <p:extLst>
+              <p:ext uri="{D42A27DB-BD31-4B8C-83A1-F6EECF244321}">
+                <p14:modId xmlns:p14="http://schemas.microsoft.com/office/powerpoint/2010/main" val="1579011935"/>
+              </p:ext>
+            </p:extLst>
+          </p:nvPr>
+        </p:nvGraphicFramePr>
+        <p:xfrm>
+          <a:off x="640080" y="1920240"/>
+          <a:ext cx="10881360" cy="914400"/>
+        </p:xfrm>
+        <a:graphic>
+          <a:graphicData uri="http://schemas.openxmlformats.org/drawingml/2006/table">
+            <a:tbl>
+              <a:tblPr/>
+              <a:tblGrid>
+                <a:gridCol w="1371600"/>
+                <a:gridCol w="1097280"/>
+                <a:gridCol w="8412480"/>
+              </a:tblGrid>
+              <a:tr h="868680">
+                <a:tc>
+                  <a:txBody>
+                    <a:bodyPr/>
+                    <a:lstStyle/>
+                    <a:p>
+                      <a:pPr algn="ctr" indent="0" marL="0">
+                        <a:buNone/>
+                      </a:pPr>
+                      <a:r>
+                        <a:rPr lang="en-US" sz="1300" b="1" dirty="0">
+                          <a:solidFill>
+                            <a:srgbClr val="FFFFFF"/>
+                          </a:solidFill>
+                          <a:latin typeface="Leelawadee UI" pitchFamily="34" charset="0"/>
+                          <a:ea typeface="Leelawadee UI" pitchFamily="34" charset="-122"/>
+                          <a:cs typeface="Leelawadee UI" pitchFamily="34" charset="-120"/>
+                        </a:rPr>
+                        <a:t>รอบ</a:t>
+                      </a:r>
+                      <a:endParaRPr lang="en-US" sz="1300" dirty="0">
+                        <a:latin typeface="Leelawadee UI" charset="0"/>
+                        <a:ea typeface="Leelawadee UI" charset="0"/>
+                        <a:cs typeface="Leelawadee UI" charset="0"/>
+                      </a:endParaRPr>
+                    </a:p>
+                  </a:txBody>
+                  <a:tcPr marL="91440" marR="91440" marT="45720" marB="45720">
+                    <a:lnL w="12700" cap="flat" cmpd="sng" algn="ctr">
+                      <a:solidFill>
+                        <a:srgbClr val="DDDDDD"/>
+                      </a:solidFill>
+                      <a:prstDash val="solid"/>
+                      <a:round/>
+                      <a:headEnd type="none" w="med" len="med"/>
+                      <a:tailEnd type="none" w="med" len="med"/>
+                    </a:lnL>
+                    <a:lnR w="12700" cap="flat" cmpd="sng" algn="ctr">
+                      <a:solidFill>
+                        <a:srgbClr val="DDDDDD"/>
+                      </a:solidFill>
+                      <a:prstDash val="solid"/>
+                      <a:round/>
+                      <a:headEnd type="none" w="med" len="med"/>
+                      <a:tailEnd type="none" w="med" len="med"/>
+                    </a:lnR>
+                    <a:lnT w="12700" cap="flat" cmpd="sng" algn="ctr">
+                      <a:solidFill>
+                        <a:srgbClr val="DDDDDD"/>
+                      </a:solidFill>
+                      <a:prstDash val="solid"/>
+                      <a:round/>
+                      <a:headEnd type="none" w="med" len="med"/>
+                      <a:tailEnd type="none" w="med" len="med"/>
+                    </a:lnT>
+                    <a:lnB w="12700" cap="flat" cmpd="sng" algn="ctr">
+                      <a:solidFill>
+                        <a:srgbClr val="DDDDDD"/>
+                      </a:solidFill>
+                      <a:prstDash val="solid"/>
+                      <a:round/>
+                      <a:headEnd type="none" w="med" len="med"/>
+                      <a:tailEnd type="none" w="med" len="med"/>
+                    </a:lnB>
+                    <a:solidFill>
+                      <a:srgbClr val="2E3338"/>
+                    </a:solidFill>
+                  </a:tcPr>
+                </a:tc>
+                <a:tc>
+                  <a:txBody>
+                    <a:bodyPr/>
+                    <a:lstStyle/>
+                    <a:p>
+                      <a:pPr algn="ctr" indent="0" marL="0">
+                        <a:buNone/>
+                      </a:pPr>
+                      <a:r>
+                        <a:rPr lang="en-US" sz="1300" b="1" dirty="0">
+                          <a:solidFill>
+                            <a:srgbClr val="FFFFFF"/>
+                          </a:solidFill>
+                          <a:latin typeface="Leelawadee UI" pitchFamily="34" charset="0"/>
+                          <a:ea typeface="Leelawadee UI" pitchFamily="34" charset="-122"/>
+                          <a:cs typeface="Leelawadee UI" pitchFamily="34" charset="-120"/>
+                        </a:rPr>
+                        <a:t>Dice</a:t>
+                      </a:r>
+                      <a:endParaRPr lang="en-US" sz="1300" dirty="0">
+                        <a:latin typeface="Leelawadee UI" charset="0"/>
+                        <a:ea typeface="Leelawadee UI" charset="0"/>
+                        <a:cs typeface="Leelawadee UI" charset="0"/>
+                      </a:endParaRPr>
+                    </a:p>
+                  </a:txBody>
+                  <a:tcPr marL="91440" marR="91440" marT="45720" marB="45720">
+                    <a:lnL w="12700" cap="flat" cmpd="sng" algn="ctr">
+                      <a:solidFill>
+                        <a:srgbClr val="DDDDDD"/>
+                      </a:solidFill>
+                      <a:prstDash val="solid"/>
+                      <a:round/>
+                      <a:headEnd type="none" w="med" len="med"/>
+                      <a:tailEnd type="none" w="med" len="med"/>
+                    </a:lnL>
+                    <a:lnR w="12700" cap="flat" cmpd="sng" algn="ctr">
+                      <a:solidFill>
+                        <a:srgbClr val="DDDDDD"/>
+                      </a:solidFill>
+                      <a:prstDash val="solid"/>
+                      <a:round/>
+                      <a:headEnd type="none" w="med" len="med"/>
+                      <a:tailEnd type="none" w="med" len="med"/>
+                    </a:lnR>
+                    <a:lnT w="12700" cap="flat" cmpd="sng" algn="ctr">
+                      <a:solidFill>
+                        <a:srgbClr val="DDDDDD"/>
+                      </a:solidFill>
+                      <a:prstDash val="solid"/>
+                      <a:round/>
+                      <a:headEnd type="none" w="med" len="med"/>
+                      <a:tailEnd type="none" w="med" len="med"/>
+                    </a:lnT>
+                    <a:lnB w="12700" cap="flat" cmpd="sng" algn="ctr">
+                      <a:solidFill>
+                        <a:srgbClr val="DDDDDD"/>
+                      </a:solidFill>
+                      <a:prstDash val="solid"/>
+                      <a:round/>
+                      <a:headEnd type="none" w="med" len="med"/>
+                      <a:tailEnd type="none" w="med" len="med"/>
+                    </a:lnB>
+                    <a:solidFill>
+                      <a:srgbClr val="2E3338"/>
+                    </a:solidFill>
+                  </a:tcPr>
+                </a:tc>
+                <a:tc>
+                  <a:txBody>
+                    <a:bodyPr/>
+                    <a:lstStyle/>
+                    <a:p>
+                      <a:pPr algn="ctr" indent="0" marL="0">
+                        <a:buNone/>
+                      </a:pPr>
+                      <a:r>
+                        <a:rPr lang="en-US" sz="1300" b="1" dirty="0">
+                          <a:solidFill>
+                            <a:srgbClr val="FFFFFF"/>
+                          </a:solidFill>
+                          <a:latin typeface="Leelawadee UI" pitchFamily="34" charset="0"/>
+                          <a:ea typeface="Leelawadee UI" pitchFamily="34" charset="-122"/>
+                          <a:cs typeface="Leelawadee UI" pitchFamily="34" charset="-120"/>
+                        </a:rPr>
+                        <a:t>สิ่งที่ปรับ / พารามิเตอร์ที่เปลี่ยน</a:t>
+                      </a:r>
+                      <a:endParaRPr lang="en-US" sz="1300" dirty="0">
+                        <a:latin typeface="Leelawadee UI" charset="0"/>
+                        <a:ea typeface="Leelawadee UI" charset="0"/>
+                        <a:cs typeface="Leelawadee UI" charset="0"/>
+                      </a:endParaRPr>
+                    </a:p>
+                  </a:txBody>
+                  <a:tcPr marL="91440" marR="91440" marT="45720" marB="45720">
+                    <a:lnL w="12700" cap="flat" cmpd="sng" algn="ctr">
+                      <a:solidFill>
+                        <a:srgbClr val="DDDDDD"/>
+                      </a:solidFill>
+                      <a:prstDash val="solid"/>
+                      <a:round/>
+                      <a:headEnd type="none" w="med" len="med"/>
+                      <a:tailEnd type="none" w="med" len="med"/>
+                    </a:lnL>
+                    <a:lnR w="12700" cap="flat" cmpd="sng" algn="ctr">
+                      <a:solidFill>
+                        <a:srgbClr val="DDDDDD"/>
+                      </a:solidFill>
+                      <a:prstDash val="solid"/>
+                      <a:round/>
+                      <a:headEnd type="none" w="med" len="med"/>
+                      <a:tailEnd type="none" w="med" len="med"/>
+                    </a:lnR>
+                    <a:lnT w="12700" cap="flat" cmpd="sng" algn="ctr">
+                      <a:solidFill>
+                        <a:srgbClr val="DDDDDD"/>
+                      </a:solidFill>
+                      <a:prstDash val="solid"/>
+                      <a:round/>
+                      <a:headEnd type="none" w="med" len="med"/>
+                      <a:tailEnd type="none" w="med" len="med"/>
+                    </a:lnT>
+                    <a:lnB w="12700" cap="flat" cmpd="sng" algn="ctr">
+                      <a:solidFill>
+                        <a:srgbClr val="DDDDDD"/>
+                      </a:solidFill>
+                      <a:prstDash val="solid"/>
+                      <a:round/>
+                      <a:headEnd type="none" w="med" len="med"/>
+                      <a:tailEnd type="none" w="med" len="med"/>
+                    </a:lnB>
+                    <a:solidFill>
+                      <a:srgbClr val="2E3338"/>
+                    </a:solidFill>
+                  </a:tcPr>
+                </a:tc>
+              </a:tr>
+              <a:tr h="868680">
+                <a:tc>
+                  <a:txBody>
+                    <a:bodyPr/>
+                    <a:lstStyle/>
+                    <a:p>
+                      <a:pPr algn="l" indent="0" marL="0">
+                        <a:buNone/>
+                      </a:pPr>
+                      <a:r>
+                        <a:rPr lang="en-US" sz="1300" b="1" dirty="0">
+                          <a:solidFill>
+                            <a:srgbClr val="222629"/>
+                          </a:solidFill>
+                          <a:latin typeface="Leelawadee UI" pitchFamily="34" charset="0"/>
+                          <a:ea typeface="Leelawadee UI" pitchFamily="34" charset="-122"/>
+                          <a:cs typeface="Leelawadee UI" pitchFamily="34" charset="-120"/>
+                        </a:rPr>
+                        <a:t>Baseline</a:t>
+                      </a:r>
+                      <a:endParaRPr lang="en-US" sz="1300" dirty="0">
+                        <a:latin typeface="Leelawadee UI" charset="0"/>
+                        <a:ea typeface="Leelawadee UI" charset="0"/>
+                        <a:cs typeface="Leelawadee UI" charset="0"/>
+                      </a:endParaRPr>
+                    </a:p>
+                  </a:txBody>
+                  <a:tcPr marL="91440" marR="91440" marT="45720" marB="45720" anchor="ctr">
+                    <a:lnL w="12700" cap="flat" cmpd="sng" algn="ctr">
+                      <a:solidFill>
+                        <a:srgbClr val="DDDDDD"/>
+                      </a:solidFill>
+                      <a:prstDash val="solid"/>
+                      <a:round/>
+                      <a:headEnd type="none" w="med" len="med"/>
+                      <a:tailEnd type="none" w="med" len="med"/>
+                    </a:lnL>
+                    <a:lnR w="12700" cap="flat" cmpd="sng" algn="ctr">
+                      <a:solidFill>
+                        <a:srgbClr val="DDDDDD"/>
+                      </a:solidFill>
+                      <a:prstDash val="solid"/>
+                      <a:round/>
+                      <a:headEnd type="none" w="med" len="med"/>
+                      <a:tailEnd type="none" w="med" len="med"/>
+                    </a:lnR>
+                    <a:lnT w="12700" cap="flat" cmpd="sng" algn="ctr">
+                      <a:solidFill>
+                        <a:srgbClr val="DDDDDD"/>
+                      </a:solidFill>
+                      <a:prstDash val="solid"/>
+                      <a:round/>
+                      <a:headEnd type="none" w="med" len="med"/>
+                      <a:tailEnd type="none" w="med" len="med"/>
+                    </a:lnT>
+                    <a:lnB w="12700" cap="flat" cmpd="sng" algn="ctr">
+                      <a:solidFill>
+                        <a:srgbClr val="DDDDDD"/>
+                      </a:solidFill>
+                      <a:prstDash val="solid"/>
+                      <a:round/>
+                      <a:headEnd type="none" w="med" len="med"/>
+                      <a:tailEnd type="none" w="med" len="med"/>
+                    </a:lnB>
+                    <a:solidFill>
+                      <a:srgbClr val="F0F2F4"/>
+                    </a:solidFill>
+                  </a:tcPr>
+                </a:tc>
+                <a:tc>
+                  <a:txBody>
+                    <a:bodyPr/>
+                    <a:lstStyle/>
+                    <a:p>
+                      <a:pPr algn="ctr" indent="0" marL="0">
+                        <a:buNone/>
+                      </a:pPr>
+                      <a:r>
+                        <a:rPr lang="en-US" sz="1300" dirty="0">
+                          <a:solidFill>
+                            <a:srgbClr val="222629"/>
+                          </a:solidFill>
+                          <a:latin typeface="Leelawadee UI" pitchFamily="34" charset="0"/>
+                          <a:ea typeface="Leelawadee UI" pitchFamily="34" charset="-122"/>
+                          <a:cs typeface="Leelawadee UI" pitchFamily="34" charset="-120"/>
+                        </a:rPr>
+                        <a:t>0.3201</a:t>
+                      </a:r>
+                      <a:endParaRPr lang="en-US" sz="1300" dirty="0">
+                        <a:latin typeface="Leelawadee UI" charset="0"/>
+                        <a:ea typeface="Leelawadee UI" charset="0"/>
+                        <a:cs typeface="Leelawadee UI" charset="0"/>
+                      </a:endParaRPr>
+                    </a:p>
+                  </a:txBody>
+                  <a:tcPr marL="91440" marR="91440" marT="45720" marB="45720" anchor="ctr">
+                    <a:lnL w="12700" cap="flat" cmpd="sng" algn="ctr">
+                      <a:solidFill>
+                        <a:srgbClr val="DDDDDD"/>
+                      </a:solidFill>
+                      <a:prstDash val="solid"/>
+                      <a:round/>
+                      <a:headEnd type="none" w="med" len="med"/>
+                      <a:tailEnd type="none" w="med" len="med"/>
+                    </a:lnL>
+                    <a:lnR w="12700" cap="flat" cmpd="sng" algn="ctr">
+                      <a:solidFill>
+                        <a:srgbClr val="DDDDDD"/>
+                      </a:solidFill>
+                      <a:prstDash val="solid"/>
+                      <a:round/>
+                      <a:headEnd type="none" w="med" len="med"/>
+                      <a:tailEnd type="none" w="med" len="med"/>
+                    </a:lnR>
+                    <a:lnT w="12700" cap="flat" cmpd="sng" algn="ctr">
+                      <a:solidFill>
+                        <a:srgbClr val="DDDDDD"/>
+                      </a:solidFill>
+                      <a:prstDash val="solid"/>
+                      <a:round/>
+                      <a:headEnd type="none" w="med" len="med"/>
+                      <a:tailEnd type="none" w="med" len="med"/>
+                    </a:lnT>
+                    <a:lnB w="12700" cap="flat" cmpd="sng" algn="ctr">
+                      <a:solidFill>
+                        <a:srgbClr val="DDDDDD"/>
+                      </a:solidFill>
+                      <a:prstDash val="solid"/>
+                      <a:round/>
+                      <a:headEnd type="none" w="med" len="med"/>
+                      <a:tailEnd type="none" w="med" len="med"/>
+                    </a:lnB>
+                    <a:solidFill>
+                      <a:srgbClr val="F0F2F4"/>
+                    </a:solidFill>
+                  </a:tcPr>
+                </a:tc>
+                <a:tc>
+                  <a:txBody>
+                    <a:bodyPr/>
+                    <a:lstStyle/>
+                    <a:p>
+                      <a:pPr algn="l" indent="0" marL="0">
+                        <a:buNone/>
+                      </a:pPr>
+                      <a:r>
+                        <a:rPr lang="en-US" sz="1300" dirty="0">
+                          <a:solidFill>
+                            <a:srgbClr val="222629"/>
+                          </a:solidFill>
+                          <a:latin typeface="Leelawadee UI" pitchFamily="34" charset="0"/>
+                          <a:ea typeface="Leelawadee UI" pitchFamily="34" charset="-122"/>
+                          <a:cs typeface="Leelawadee UI" pitchFamily="34" charset="-120"/>
+                        </a:rPr>
+                        <a:t>ตั้งค่าพารามิเตอร์ด้วยการเดา ยังไม่ได้ search — precision ต่ำ (0.25) เพราะ noise หลุดผ่านเยอะ</a:t>
+                      </a:r>
+                      <a:endParaRPr lang="en-US" sz="1300" dirty="0">
+                        <a:latin typeface="Leelawadee UI" charset="0"/>
+                        <a:ea typeface="Leelawadee UI" charset="0"/>
+                        <a:cs typeface="Leelawadee UI" charset="0"/>
+                      </a:endParaRPr>
+                    </a:p>
+                  </a:txBody>
+                  <a:tcPr marL="91440" marR="91440" marT="45720" marB="45720" anchor="ctr">
+                    <a:lnL w="12700" cap="flat" cmpd="sng" algn="ctr">
+                      <a:solidFill>
+                        <a:srgbClr val="DDDDDD"/>
+                      </a:solidFill>
+                      <a:prstDash val="solid"/>
+                      <a:round/>
+                      <a:headEnd type="none" w="med" len="med"/>
+                      <a:tailEnd type="none" w="med" len="med"/>
+                    </a:lnL>
+                    <a:lnR w="12700" cap="flat" cmpd="sng" algn="ctr">
+                      <a:solidFill>
+                        <a:srgbClr val="DDDDDD"/>
+                      </a:solidFill>
+                      <a:prstDash val="solid"/>
+                      <a:round/>
+                      <a:headEnd type="none" w="med" len="med"/>
+                      <a:tailEnd type="none" w="med" len="med"/>
+                    </a:lnR>
+                    <a:lnT w="12700" cap="flat" cmpd="sng" algn="ctr">
+                      <a:solidFill>
+                        <a:srgbClr val="DDDDDD"/>
+                      </a:solidFill>
+                      <a:prstDash val="solid"/>
+                      <a:round/>
+                      <a:headEnd type="none" w="med" len="med"/>
+                      <a:tailEnd type="none" w="med" len="med"/>
+                    </a:lnT>
+                    <a:lnB w="12700" cap="flat" cmpd="sng" algn="ctr">
+                      <a:solidFill>
+                        <a:srgbClr val="DDDDDD"/>
+                      </a:solidFill>
+                      <a:prstDash val="solid"/>
+                      <a:round/>
+                      <a:headEnd type="none" w="med" len="med"/>
+                      <a:tailEnd type="none" w="med" len="med"/>
+                    </a:lnB>
+                  </a:tcPr>
+                </a:tc>
+              </a:tr>
+              <a:tr h="868680">
+                <a:tc>
+                  <a:txBody>
+                    <a:bodyPr/>
+                    <a:lstStyle/>
+                    <a:p>
+                      <a:pPr algn="l" indent="0" marL="0">
+                        <a:buNone/>
+                      </a:pPr>
+                      <a:r>
+                        <a:rPr lang="en-US" sz="1300" b="1" dirty="0">
+                          <a:solidFill>
+                            <a:srgbClr val="222629"/>
+                          </a:solidFill>
+                          <a:latin typeface="Leelawadee UI" pitchFamily="34" charset="0"/>
+                          <a:ea typeface="Leelawadee UI" pitchFamily="34" charset="-122"/>
+                          <a:cs typeface="Leelawadee UI" pitchFamily="34" charset="-120"/>
+                        </a:rPr>
+                        <a:t>รอบ 1</a:t>
+                      </a:r>
+                      <a:endParaRPr lang="en-US" sz="1300" dirty="0">
+                        <a:latin typeface="Leelawadee UI" charset="0"/>
+                        <a:ea typeface="Leelawadee UI" charset="0"/>
+                        <a:cs typeface="Leelawadee UI" charset="0"/>
+                      </a:endParaRPr>
+                    </a:p>
+                  </a:txBody>
+                  <a:tcPr marL="91440" marR="91440" marT="45720" marB="45720" anchor="ctr">
+                    <a:lnL w="12700" cap="flat" cmpd="sng" algn="ctr">
+                      <a:solidFill>
+                        <a:srgbClr val="DDDDDD"/>
+                      </a:solidFill>
+                      <a:prstDash val="solid"/>
+                      <a:round/>
+                      <a:headEnd type="none" w="med" len="med"/>
+                      <a:tailEnd type="none" w="med" len="med"/>
+                    </a:lnL>
+                    <a:lnR w="12700" cap="flat" cmpd="sng" algn="ctr">
+                      <a:solidFill>
+                        <a:srgbClr val="DDDDDD"/>
+                      </a:solidFill>
+                      <a:prstDash val="solid"/>
+                      <a:round/>
+                      <a:headEnd type="none" w="med" len="med"/>
+                      <a:tailEnd type="none" w="med" len="med"/>
+                    </a:lnR>
+                    <a:lnT w="12700" cap="flat" cmpd="sng" algn="ctr">
+                      <a:solidFill>
+                        <a:srgbClr val="DDDDDD"/>
+                      </a:solidFill>
+                      <a:prstDash val="solid"/>
+                      <a:round/>
+                      <a:headEnd type="none" w="med" len="med"/>
+                      <a:tailEnd type="none" w="med" len="med"/>
+                    </a:lnT>
+                    <a:lnB w="12700" cap="flat" cmpd="sng" algn="ctr">
+                      <a:solidFill>
+                        <a:srgbClr val="DDDDDD"/>
+                      </a:solidFill>
+                      <a:prstDash val="solid"/>
+                      <a:round/>
+                      <a:headEnd type="none" w="med" len="med"/>
+                      <a:tailEnd type="none" w="med" len="med"/>
+                    </a:lnB>
+                    <a:solidFill>
+                      <a:srgbClr val="F0F2F4"/>
+                    </a:solidFill>
+                  </a:tcPr>
+                </a:tc>
+                <a:tc>
+                  <a:txBody>
+                    <a:bodyPr/>
+                    <a:lstStyle/>
+                    <a:p>
+                      <a:pPr algn="ctr" indent="0" marL="0">
+                        <a:buNone/>
+                      </a:pPr>
+                      <a:r>
+                        <a:rPr lang="en-US" sz="1300" dirty="0">
+                          <a:solidFill>
+                            <a:srgbClr val="222629"/>
+                          </a:solidFill>
+                          <a:latin typeface="Leelawadee UI" pitchFamily="34" charset="0"/>
+                          <a:ea typeface="Leelawadee UI" pitchFamily="34" charset="-122"/>
+                          <a:cs typeface="Leelawadee UI" pitchFamily="34" charset="-120"/>
+                        </a:rPr>
+                        <a:t>0.4872</a:t>
+                      </a:r>
+                      <a:endParaRPr lang="en-US" sz="1300" dirty="0">
+                        <a:latin typeface="Leelawadee UI" charset="0"/>
+                        <a:ea typeface="Leelawadee UI" charset="0"/>
+                        <a:cs typeface="Leelawadee UI" charset="0"/>
+                      </a:endParaRPr>
+                    </a:p>
+                  </a:txBody>
+                  <a:tcPr marL="91440" marR="91440" marT="45720" marB="45720" anchor="ctr">
+                    <a:lnL w="12700" cap="flat" cmpd="sng" algn="ctr">
+                      <a:solidFill>
+                        <a:srgbClr val="DDDDDD"/>
+                      </a:solidFill>
+                      <a:prstDash val="solid"/>
+                      <a:round/>
+                      <a:headEnd type="none" w="med" len="med"/>
+                      <a:tailEnd type="none" w="med" len="med"/>
+                    </a:lnL>
+                    <a:lnR w="12700" cap="flat" cmpd="sng" algn="ctr">
+                      <a:solidFill>
+                        <a:srgbClr val="DDDDDD"/>
+                      </a:solidFill>
+                      <a:prstDash val="solid"/>
+                      <a:round/>
+                      <a:headEnd type="none" w="med" len="med"/>
+                      <a:tailEnd type="none" w="med" len="med"/>
+                    </a:lnR>
+                    <a:lnT w="12700" cap="flat" cmpd="sng" algn="ctr">
+                      <a:solidFill>
+                        <a:srgbClr val="DDDDDD"/>
+                      </a:solidFill>
+                      <a:prstDash val="solid"/>
+                      <a:round/>
+                      <a:headEnd type="none" w="med" len="med"/>
+                      <a:tailEnd type="none" w="med" len="med"/>
+                    </a:lnT>
+                    <a:lnB w="12700" cap="flat" cmpd="sng" algn="ctr">
+                      <a:solidFill>
+                        <a:srgbClr val="DDDDDD"/>
+                      </a:solidFill>
+                      <a:prstDash val="solid"/>
+                      <a:round/>
+                      <a:headEnd type="none" w="med" len="med"/>
+                      <a:tailEnd type="none" w="med" len="med"/>
+                    </a:lnB>
+                    <a:solidFill>
+                      <a:srgbClr val="F0F2F4"/>
+                    </a:solidFill>
+                  </a:tcPr>
+                </a:tc>
+                <a:tc>
+                  <a:txBody>
+                    <a:bodyPr/>
+                    <a:lstStyle/>
+                    <a:p>
+                      <a:pPr algn="l" indent="0" marL="0">
+                        <a:buNone/>
+                      </a:pPr>
+                      <a:r>
+                        <a:rPr lang="en-US" sz="1300" dirty="0">
+                          <a:solidFill>
+                            <a:srgbClr val="222629"/>
+                          </a:solidFill>
+                          <a:latin typeface="Leelawadee UI" pitchFamily="34" charset="0"/>
+                          <a:ea typeface="Leelawadee UI" pitchFamily="34" charset="-122"/>
+                          <a:cs typeface="Leelawadee UI" pitchFamily="34" charset="-120"/>
+                        </a:rPr>
+                        <a:t>grid search แรกบน block_size, C, kernel ของ morphology และ min_area — จูนให้ precision พุ่งจาก 0.25 เป็น 0.53 (ค่าที่ดีสุดไปติดขอบ grid)</a:t>
+                      </a:r>
+                      <a:endParaRPr lang="en-US" sz="1300" dirty="0">
+                        <a:latin typeface="Leelawadee UI" charset="0"/>
+                        <a:ea typeface="Leelawadee UI" charset="0"/>
+                        <a:cs typeface="Leelawadee UI" charset="0"/>
+                      </a:endParaRPr>
+                    </a:p>
+                  </a:txBody>
+                  <a:tcPr marL="91440" marR="91440" marT="45720" marB="45720" anchor="ctr">
+                    <a:lnL w="12700" cap="flat" cmpd="sng" algn="ctr">
+                      <a:solidFill>
+                        <a:srgbClr val="DDDDDD"/>
+                      </a:solidFill>
+                      <a:prstDash val="solid"/>
+                      <a:round/>
+                      <a:headEnd type="none" w="med" len="med"/>
+                      <a:tailEnd type="none" w="med" len="med"/>
+                    </a:lnL>
+                    <a:lnR w="12700" cap="flat" cmpd="sng" algn="ctr">
+                      <a:solidFill>
+                        <a:srgbClr val="DDDDDD"/>
+                      </a:solidFill>
+                      <a:prstDash val="solid"/>
+                      <a:round/>
+                      <a:headEnd type="none" w="med" len="med"/>
+                      <a:tailEnd type="none" w="med" len="med"/>
+                    </a:lnR>
+                    <a:lnT w="12700" cap="flat" cmpd="sng" algn="ctr">
+                      <a:solidFill>
+                        <a:srgbClr val="DDDDDD"/>
+                      </a:solidFill>
+                      <a:prstDash val="solid"/>
+                      <a:round/>
+                      <a:headEnd type="none" w="med" len="med"/>
+                      <a:tailEnd type="none" w="med" len="med"/>
+                    </a:lnT>
+                    <a:lnB w="12700" cap="flat" cmpd="sng" algn="ctr">
+                      <a:solidFill>
+                        <a:srgbClr val="DDDDDD"/>
+                      </a:solidFill>
+                      <a:prstDash val="solid"/>
+                      <a:round/>
+                      <a:headEnd type="none" w="med" len="med"/>
+                      <a:tailEnd type="none" w="med" len="med"/>
+                    </a:lnB>
+                  </a:tcPr>
+                </a:tc>
+              </a:tr>
+              <a:tr h="868680">
+                <a:tc>
+                  <a:txBody>
+                    <a:bodyPr/>
+                    <a:lstStyle/>
+                    <a:p>
+                      <a:pPr algn="l" indent="0" marL="0">
+                        <a:buNone/>
+                      </a:pPr>
+                      <a:r>
+                        <a:rPr lang="en-US" sz="1300" b="1" dirty="0">
+                          <a:solidFill>
+                            <a:srgbClr val="222629"/>
+                          </a:solidFill>
+                          <a:latin typeface="Leelawadee UI" pitchFamily="34" charset="0"/>
+                          <a:ea typeface="Leelawadee UI" pitchFamily="34" charset="-122"/>
+                          <a:cs typeface="Leelawadee UI" pitchFamily="34" charset="-120"/>
+                        </a:rPr>
+                        <a:t>รอบ 2</a:t>
+                      </a:r>
+                      <a:endParaRPr lang="en-US" sz="1300" dirty="0">
+                        <a:latin typeface="Leelawadee UI" charset="0"/>
+                        <a:ea typeface="Leelawadee UI" charset="0"/>
+                        <a:cs typeface="Leelawadee UI" charset="0"/>
+                      </a:endParaRPr>
+                    </a:p>
+                  </a:txBody>
+                  <a:tcPr marL="91440" marR="91440" marT="45720" marB="45720" anchor="ctr">
+                    <a:lnL w="12700" cap="flat" cmpd="sng" algn="ctr">
+                      <a:solidFill>
+                        <a:srgbClr val="DDDDDD"/>
+                      </a:solidFill>
+                      <a:prstDash val="solid"/>
+                      <a:round/>
+                      <a:headEnd type="none" w="med" len="med"/>
+                      <a:tailEnd type="none" w="med" len="med"/>
+                    </a:lnL>
+                    <a:lnR w="12700" cap="flat" cmpd="sng" algn="ctr">
+                      <a:solidFill>
+                        <a:srgbClr val="DDDDDD"/>
+                      </a:solidFill>
+                      <a:prstDash val="solid"/>
+                      <a:round/>
+                      <a:headEnd type="none" w="med" len="med"/>
+                      <a:tailEnd type="none" w="med" len="med"/>
+                    </a:lnR>
+                    <a:lnT w="12700" cap="flat" cmpd="sng" algn="ctr">
+                      <a:solidFill>
+                        <a:srgbClr val="DDDDDD"/>
+                      </a:solidFill>
+                      <a:prstDash val="solid"/>
+                      <a:round/>
+                      <a:headEnd type="none" w="med" len="med"/>
+                      <a:tailEnd type="none" w="med" len="med"/>
+                    </a:lnT>
+                    <a:lnB w="12700" cap="flat" cmpd="sng" algn="ctr">
+                      <a:solidFill>
+                        <a:srgbClr val="DDDDDD"/>
+                      </a:solidFill>
+                      <a:prstDash val="solid"/>
+                      <a:round/>
+                      <a:headEnd type="none" w="med" len="med"/>
+                      <a:tailEnd type="none" w="med" len="med"/>
+                    </a:lnB>
+                    <a:solidFill>
+                      <a:srgbClr val="F0F2F4"/>
+                    </a:solidFill>
+                  </a:tcPr>
+                </a:tc>
+                <a:tc>
+                  <a:txBody>
+                    <a:bodyPr/>
+                    <a:lstStyle/>
+                    <a:p>
+                      <a:pPr algn="ctr" indent="0" marL="0">
+                        <a:buNone/>
+                      </a:pPr>
+                      <a:r>
+                        <a:rPr lang="en-US" sz="1300" dirty="0">
+                          <a:solidFill>
+                            <a:srgbClr val="222629"/>
+                          </a:solidFill>
+                          <a:latin typeface="Leelawadee UI" pitchFamily="34" charset="0"/>
+                          <a:ea typeface="Leelawadee UI" pitchFamily="34" charset="-122"/>
+                          <a:cs typeface="Leelawadee UI" pitchFamily="34" charset="-120"/>
+                        </a:rPr>
+                        <a:t>0.4991</a:t>
+                      </a:r>
+                      <a:endParaRPr lang="en-US" sz="1300" dirty="0">
+                        <a:latin typeface="Leelawadee UI" charset="0"/>
+                        <a:ea typeface="Leelawadee UI" charset="0"/>
+                        <a:cs typeface="Leelawadee UI" charset="0"/>
+                      </a:endParaRPr>
+                    </a:p>
+                  </a:txBody>
+                  <a:tcPr marL="91440" marR="91440" marT="45720" marB="45720" anchor="ctr">
+                    <a:lnL w="12700" cap="flat" cmpd="sng" algn="ctr">
+                      <a:solidFill>
+                        <a:srgbClr val="DDDDDD"/>
+                      </a:solidFill>
+                      <a:prstDash val="solid"/>
+                      <a:round/>
+                      <a:headEnd type="none" w="med" len="med"/>
+                      <a:tailEnd type="none" w="med" len="med"/>
+                    </a:lnL>
+                    <a:lnR w="12700" cap="flat" cmpd="sng" algn="ctr">
+                      <a:solidFill>
+                        <a:srgbClr val="DDDDDD"/>
+                      </a:solidFill>
+                      <a:prstDash val="solid"/>
+                      <a:round/>
+                      <a:headEnd type="none" w="med" len="med"/>
+                      <a:tailEnd type="none" w="med" len="med"/>
+                    </a:lnR>
+                    <a:lnT w="12700" cap="flat" cmpd="sng" algn="ctr">
+                      <a:solidFill>
+                        <a:srgbClr val="DDDDDD"/>
+                      </a:solidFill>
+                      <a:prstDash val="solid"/>
+                      <a:round/>
+                      <a:headEnd type="none" w="med" len="med"/>
+                      <a:tailEnd type="none" w="med" len="med"/>
+                    </a:lnT>
+                    <a:lnB w="12700" cap="flat" cmpd="sng" algn="ctr">
+                      <a:solidFill>
+                        <a:srgbClr val="DDDDDD"/>
+                      </a:solidFill>
+                      <a:prstDash val="solid"/>
+                      <a:round/>
+                      <a:headEnd type="none" w="med" len="med"/>
+                      <a:tailEnd type="none" w="med" len="med"/>
+                    </a:lnB>
+                    <a:solidFill>
+                      <a:srgbClr val="F0F2F4"/>
+                    </a:solidFill>
+                  </a:tcPr>
+                </a:tc>
+                <a:tc>
+                  <a:txBody>
+                    <a:bodyPr/>
+                    <a:lstStyle/>
+                    <a:p>
+                      <a:pPr algn="l" indent="0" marL="0">
+                        <a:buNone/>
+                      </a:pPr>
+                      <a:r>
+                        <a:rPr lang="en-US" sz="1300" dirty="0">
+                          <a:solidFill>
+                            <a:srgbClr val="222629"/>
+                          </a:solidFill>
+                          <a:latin typeface="Leelawadee UI" pitchFamily="34" charset="0"/>
+                          <a:ea typeface="Leelawadee UI" pitchFamily="34" charset="-122"/>
+                          <a:cs typeface="Leelawadee UI" pitchFamily="34" charset="-120"/>
+                        </a:rPr>
+                        <a:t>ขยายขอบเขต grid ออก (เพราะรอบ 1 ไปติดขอบ) และอนุญาตให้ข้าม morphological step ได้ — recall ฟื้นขึ้นโดย precision ไม่ตก</a:t>
+                      </a:r>
+                      <a:endParaRPr lang="en-US" sz="1300" dirty="0">
+                        <a:latin typeface="Leelawadee UI" charset="0"/>
+                        <a:ea typeface="Leelawadee UI" charset="0"/>
+                        <a:cs typeface="Leelawadee UI" charset="0"/>
+                      </a:endParaRPr>
+                    </a:p>
+                  </a:txBody>
+                  <a:tcPr marL="91440" marR="91440" marT="45720" marB="45720" anchor="ctr">
+                    <a:lnL w="12700" cap="flat" cmpd="sng" algn="ctr">
+                      <a:solidFill>
+                        <a:srgbClr val="DDDDDD"/>
+                      </a:solidFill>
+                      <a:prstDash val="solid"/>
+                      <a:round/>
+                      <a:headEnd type="none" w="med" len="med"/>
+                      <a:tailEnd type="none" w="med" len="med"/>
+                    </a:lnL>
+                    <a:lnR w="12700" cap="flat" cmpd="sng" algn="ctr">
+                      <a:solidFill>
+                        <a:srgbClr val="DDDDDD"/>
+                      </a:solidFill>
+                      <a:prstDash val="solid"/>
+                      <a:round/>
+                      <a:headEnd type="none" w="med" len="med"/>
+                      <a:tailEnd type="none" w="med" len="med"/>
+                    </a:lnR>
+                    <a:lnT w="12700" cap="flat" cmpd="sng" algn="ctr">
+                      <a:solidFill>
+                        <a:srgbClr val="DDDDDD"/>
+                      </a:solidFill>
+                      <a:prstDash val="solid"/>
+                      <a:round/>
+                      <a:headEnd type="none" w="med" len="med"/>
+                      <a:tailEnd type="none" w="med" len="med"/>
+                    </a:lnT>
+                    <a:lnB w="12700" cap="flat" cmpd="sng" algn="ctr">
+                      <a:solidFill>
+                        <a:srgbClr val="DDDDDD"/>
+                      </a:solidFill>
+                      <a:prstDash val="solid"/>
+                      <a:round/>
+                      <a:headEnd type="none" w="med" len="med"/>
+                      <a:tailEnd type="none" w="med" len="med"/>
+                    </a:lnB>
+                  </a:tcPr>
+                </a:tc>
+              </a:tr>
+              <a:tr h="868680">
+                <a:tc>
+                  <a:txBody>
+                    <a:bodyPr/>
+                    <a:lstStyle/>
+                    <a:p>
+                      <a:pPr algn="l" indent="0" marL="0">
+                        <a:buNone/>
+                      </a:pPr>
+                      <a:r>
+                        <a:rPr lang="en-US" sz="1300" b="1" dirty="0">
+                          <a:solidFill>
+                            <a:srgbClr val="B5670F"/>
+                          </a:solidFill>
+                          <a:latin typeface="Leelawadee UI" pitchFamily="34" charset="0"/>
+                          <a:ea typeface="Leelawadee UI" pitchFamily="34" charset="-122"/>
+                          <a:cs typeface="Leelawadee UI" pitchFamily="34" charset="-120"/>
+                        </a:rPr>
+                        <a:t>รอบ 3</a:t>
+                      </a:r>
+                      <a:endParaRPr lang="en-US" sz="1300" dirty="0">
+                        <a:latin typeface="Leelawadee UI" charset="0"/>
+                        <a:ea typeface="Leelawadee UI" charset="0"/>
+                        <a:cs typeface="Leelawadee UI" charset="0"/>
+                      </a:endParaRPr>
+                    </a:p>
+                  </a:txBody>
+                  <a:tcPr marL="91440" marR="91440" marT="45720" marB="45720" anchor="ctr">
+                    <a:lnL w="12700" cap="flat" cmpd="sng" algn="ctr">
+                      <a:solidFill>
+                        <a:srgbClr val="DDDDDD"/>
+                      </a:solidFill>
+                      <a:prstDash val="solid"/>
+                      <a:round/>
+                      <a:headEnd type="none" w="med" len="med"/>
+                      <a:tailEnd type="none" w="med" len="med"/>
+                    </a:lnL>
+                    <a:lnR w="12700" cap="flat" cmpd="sng" algn="ctr">
+                      <a:solidFill>
+                        <a:srgbClr val="DDDDDD"/>
+                      </a:solidFill>
+                      <a:prstDash val="solid"/>
+                      <a:round/>
+                      <a:headEnd type="none" w="med" len="med"/>
+                      <a:tailEnd type="none" w="med" len="med"/>
+                    </a:lnR>
+                    <a:lnT w="12700" cap="flat" cmpd="sng" algn="ctr">
+                      <a:solidFill>
+                        <a:srgbClr val="DDDDDD"/>
+                      </a:solidFill>
+                      <a:prstDash val="solid"/>
+                      <a:round/>
+                      <a:headEnd type="none" w="med" len="med"/>
+                      <a:tailEnd type="none" w="med" len="med"/>
+                    </a:lnT>
+                    <a:lnB w="12700" cap="flat" cmpd="sng" algn="ctr">
+                      <a:solidFill>
+                        <a:srgbClr val="DDDDDD"/>
+                      </a:solidFill>
+                      <a:prstDash val="solid"/>
+                      <a:round/>
+                      <a:headEnd type="none" w="med" len="med"/>
+                      <a:tailEnd type="none" w="med" len="med"/>
+                    </a:lnB>
+                    <a:solidFill>
+                      <a:srgbClr val="FBEEDD"/>
+                    </a:solidFill>
+                  </a:tcPr>
+                </a:tc>
+                <a:tc>
+                  <a:txBody>
+                    <a:bodyPr/>
+                    <a:lstStyle/>
+                    <a:p>
+                      <a:pPr algn="ctr" indent="0" marL="0">
+                        <a:buNone/>
+                      </a:pPr>
+                      <a:r>
+                        <a:rPr lang="en-US" sz="1300" b="1" dirty="0">
+                          <a:solidFill>
+                            <a:srgbClr val="B5670F"/>
+                          </a:solidFill>
+                          <a:latin typeface="Leelawadee UI" pitchFamily="34" charset="0"/>
+                          <a:ea typeface="Leelawadee UI" pitchFamily="34" charset="-122"/>
+                          <a:cs typeface="Leelawadee UI" pitchFamily="34" charset="-120"/>
+                        </a:rPr>
+                        <a:t>0.5024</a:t>
+                      </a:r>
+                      <a:endParaRPr lang="en-US" sz="1300" dirty="0">
+                        <a:latin typeface="Leelawadee UI" charset="0"/>
+                        <a:ea typeface="Leelawadee UI" charset="0"/>
+                        <a:cs typeface="Leelawadee UI" charset="0"/>
+                      </a:endParaRPr>
+                    </a:p>
+                  </a:txBody>
+                  <a:tcPr marL="91440" marR="91440" marT="45720" marB="45720" anchor="ctr">
+                    <a:lnL w="12700" cap="flat" cmpd="sng" algn="ctr">
+                      <a:solidFill>
+                        <a:srgbClr val="DDDDDD"/>
+                      </a:solidFill>
+                      <a:prstDash val="solid"/>
+                      <a:round/>
+                      <a:headEnd type="none" w="med" len="med"/>
+                      <a:tailEnd type="none" w="med" len="med"/>
+                    </a:lnL>
+                    <a:lnR w="12700" cap="flat" cmpd="sng" algn="ctr">
+                      <a:solidFill>
+                        <a:srgbClr val="DDDDDD"/>
+                      </a:solidFill>
+                      <a:prstDash val="solid"/>
+                      <a:round/>
+                      <a:headEnd type="none" w="med" len="med"/>
+                      <a:tailEnd type="none" w="med" len="med"/>
+                    </a:lnR>
+                    <a:lnT w="12700" cap="flat" cmpd="sng" algn="ctr">
+                      <a:solidFill>
+                        <a:srgbClr val="DDDDDD"/>
+                      </a:solidFill>
+                      <a:prstDash val="solid"/>
+                      <a:round/>
+                      <a:headEnd type="none" w="med" len="med"/>
+                      <a:tailEnd type="none" w="med" len="med"/>
+                    </a:lnT>
+                    <a:lnB w="12700" cap="flat" cmpd="sng" algn="ctr">
+                      <a:solidFill>
+                        <a:srgbClr val="DDDDDD"/>
+                      </a:solidFill>
+                      <a:prstDash val="solid"/>
+                      <a:round/>
+                      <a:headEnd type="none" w="med" len="med"/>
+                      <a:tailEnd type="none" w="med" len="med"/>
+                    </a:lnB>
+                    <a:solidFill>
+                      <a:srgbClr val="FBEEDD"/>
+                    </a:solidFill>
+                  </a:tcPr>
+                </a:tc>
+                <a:tc>
+                  <a:txBody>
+                    <a:bodyPr/>
+                    <a:lstStyle/>
+                    <a:p>
+                      <a:pPr algn="l" indent="0" marL="0">
+                        <a:buNone/>
+                      </a:pPr>
+                      <a:r>
+                        <a:rPr lang="en-US" sz="1300" dirty="0">
+                          <a:solidFill>
+                            <a:srgbClr val="222629"/>
+                          </a:solidFill>
+                          <a:latin typeface="Leelawadee UI" pitchFamily="34" charset="0"/>
+                          <a:ea typeface="Leelawadee UI" pitchFamily="34" charset="-122"/>
+                          <a:cs typeface="Leelawadee UI" pitchFamily="34" charset="-120"/>
+                        </a:rPr>
+                        <a:t>นับพื้นที่เป็นจำนวน pixel จริง, เปลี่ยนเกณฑ์รูปทรงจาก aspect ratio เป็น circularity, และแบ่ง train/held-out เลือกชุดที่ "ดีและนิ่ง" (gap เหลือ 0.001)</a:t>
+                      </a:r>
+                      <a:endParaRPr lang="en-US" sz="1300" dirty="0">
+                        <a:latin typeface="Leelawadee UI" charset="0"/>
+                        <a:ea typeface="Leelawadee UI" charset="0"/>
+                        <a:cs typeface="Leelawadee UI" charset="0"/>
+                      </a:endParaRPr>
+                    </a:p>
+                  </a:txBody>
+                  <a:tcPr marL="91440" marR="91440" marT="45720" marB="45720" anchor="ctr">
+                    <a:lnL w="12700" cap="flat" cmpd="sng" algn="ctr">
+                      <a:solidFill>
+                        <a:srgbClr val="DDDDDD"/>
+                      </a:solidFill>
+                      <a:prstDash val="solid"/>
+                      <a:round/>
+                      <a:headEnd type="none" w="med" len="med"/>
+                      <a:tailEnd type="none" w="med" len="med"/>
+                    </a:lnL>
+                    <a:lnR w="12700" cap="flat" cmpd="sng" algn="ctr">
+                      <a:solidFill>
+                        <a:srgbClr val="DDDDDD"/>
+                      </a:solidFill>
+                      <a:prstDash val="solid"/>
+                      <a:round/>
+                      <a:headEnd type="none" w="med" len="med"/>
+                      <a:tailEnd type="none" w="med" len="med"/>
+                    </a:lnR>
+                    <a:lnT w="12700" cap="flat" cmpd="sng" algn="ctr">
+                      <a:solidFill>
+                        <a:srgbClr val="DDDDDD"/>
+                      </a:solidFill>
+                      <a:prstDash val="solid"/>
+                      <a:round/>
+                      <a:headEnd type="none" w="med" len="med"/>
+                      <a:tailEnd type="none" w="med" len="med"/>
+                    </a:lnT>
+                    <a:lnB w="12700" cap="flat" cmpd="sng" algn="ctr">
+                      <a:solidFill>
+                        <a:srgbClr val="DDDDDD"/>
+                      </a:solidFill>
+                      <a:prstDash val="solid"/>
+                      <a:round/>
+                      <a:headEnd type="none" w="med" len="med"/>
+                      <a:tailEnd type="none" w="med" len="med"/>
+                    </a:lnB>
+                    <a:solidFill>
+                      <a:srgbClr val="FBEEDD"/>
+                    </a:solidFill>
+                  </a:tcPr>
+                </a:tc>
+              </a:tr>
+            </a:tbl>
+          </a:graphicData>
+        </a:graphic>
+      </p:graphicFrame>
+      <p:sp>
+        <p:nvSpPr>
+          <p:cNvPr id="5" name="Text 2"/>
+          <p:cNvSpPr/>
+          <p:nvPr/>
+        </p:nvSpPr>
+        <p:spPr>
+          <a:xfrm>
+            <a:off x="640080" y="6309360"/>
+            <a:ext cx="10881360" cy="365760"/>
           </a:xfrm>
           <a:prstGeom prst="rect">
             <a:avLst/>
@@ -2165,659 +3388,22 @@
           <a:ln/>
         </p:spPr>
         <p:txBody>
-          <a:bodyPr wrap="square" rtlCol="0" anchor="t"/>
-          <a:lstStyle/>
-          <a:p>
-            <a:pPr marL="0" indent="0">
-              <a:lnSpc>
-                <a:spcPct val="130000"/>
-              </a:lnSpc>
+          <a:bodyPr wrap="square" rtlCol="0" anchor="ctr"/>
+          <a:lstStyle/>
+          <a:p>
+            <a:pPr indent="0" marL="0">
               <a:buNone/>
             </a:pPr>
             <a:r>
-              <a:rPr lang="en-US" sz="1600" b="1" dirty="0">
+              <a:rPr lang="en-US" sz="1300" i="1" dirty="0">
                 <a:solidFill>
-                  <a:srgbClr val="FFFFFF"/>
+                  <a:srgbClr val="B5670F"/>
                 </a:solidFill>
                 <a:latin typeface="Leelawadee UI" pitchFamily="34" charset="0"/>
                 <a:ea typeface="Leelawadee UI" pitchFamily="34" charset="-122"/>
                 <a:cs typeface="Leelawadee UI" pitchFamily="34" charset="-120"/>
               </a:rPr>
-              <a:t>aspect ratio </a:t>
-            </a:r>
-            <a:r>
-              <a:rPr lang="en-US" sz="1600" dirty="0">
-                <a:solidFill>
-                  <a:srgbClr val="CBD1D6"/>
-                </a:solidFill>
-                <a:latin typeface="Leelawadee UI" pitchFamily="34" charset="0"/>
-                <a:ea typeface="Leelawadee UI" pitchFamily="34" charset="-122"/>
-                <a:cs typeface="Leelawadee UI" pitchFamily="34" charset="-120"/>
-              </a:rPr>
-              <a:t>ของกรอบสี่เหลี่ยม สมมติว่ารอยร้าวเป็นเส้นตรง — รอยร้าวรูปตัว T หรือแตกแขนงจะมีกรอบเกือบจัตุรัส แล้วถูกตัดทิ้งทั้งเส้น</a:t>
-            </a:r>
-            <a:endParaRPr lang="en-US" sz="1600" dirty="0"/>
-          </a:p>
-        </p:txBody>
-      </p:sp>
-      <p:sp>
-        <p:nvSpPr>
-          <p:cNvPr id="5" name="Text 3"/>
-          <p:cNvSpPr/>
-          <p:nvPr/>
-        </p:nvSpPr>
-        <p:spPr>
-          <a:xfrm>
-            <a:off x="731520" y="3886200"/>
-            <a:ext cx="5486400" cy="1828800"/>
-          </a:xfrm>
-          <a:prstGeom prst="rect">
-            <a:avLst/>
-          </a:prstGeom>
-          <a:noFill/>
-          <a:ln/>
-        </p:spPr>
-        <p:txBody>
-          <a:bodyPr wrap="square" rtlCol="0" anchor="t"/>
-          <a:lstStyle/>
-          <a:p>
-            <a:pPr marL="0" indent="0">
-              <a:lnSpc>
-                <a:spcPct val="130000"/>
-              </a:lnSpc>
-              <a:buNone/>
-            </a:pPr>
-            <a:r>
-              <a:rPr lang="en-US" sz="1600" b="1" dirty="0">
-                <a:solidFill>
-                  <a:srgbClr val="FFFFFF"/>
-                </a:solidFill>
-                <a:latin typeface="Leelawadee UI" pitchFamily="34" charset="0"/>
-                <a:ea typeface="Leelawadee UI" pitchFamily="34" charset="-122"/>
-                <a:cs typeface="Leelawadee UI" pitchFamily="34" charset="-120"/>
-              </a:rPr>
-              <a:t>circularity </a:t>
-            </a:r>
-            <a:r>
-              <a:rPr lang="en-US" sz="1600" dirty="0">
-                <a:solidFill>
-                  <a:srgbClr val="CBD1D6"/>
-                </a:solidFill>
-                <a:latin typeface="Leelawadee UI" pitchFamily="34" charset="0"/>
-                <a:ea typeface="Leelawadee UI" pitchFamily="34" charset="-122"/>
-                <a:cs typeface="Leelawadee UI" pitchFamily="34" charset="-120"/>
-              </a:rPr>
-              <a:t>= 4·π·area / perimeter² ไม่ขึ้นกับความโค้ง เก็บเส้นเรียวได้ทุกแบบ ทำให้ภาพที่เคยได้ 0.0000 กลับมาได้ 0.58</a:t>
-            </a:r>
-            <a:endParaRPr lang="en-US" sz="1600" dirty="0"/>
-          </a:p>
-        </p:txBody>
-      </p:sp>
-      <p:sp>
-        <p:nvSpPr>
-          <p:cNvPr id="6" name="Text 4"/>
-          <p:cNvSpPr/>
-          <p:nvPr/>
-        </p:nvSpPr>
-        <p:spPr>
-          <a:xfrm>
-            <a:off x="6400800" y="2103120"/>
-            <a:ext cx="2743200" cy="365760"/>
-          </a:xfrm>
-          <a:prstGeom prst="rect">
-            <a:avLst/>
-          </a:prstGeom>
-          <a:noFill/>
-          <a:ln/>
-        </p:spPr>
-        <p:txBody>
-          <a:bodyPr wrap="square" rtlCol="0" anchor="ctr"/>
-          <a:lstStyle/>
-          <a:p>
-            <a:pPr marL="0" indent="0">
-              <a:buNone/>
-            </a:pPr>
-            <a:r>
-              <a:rPr lang="en-US" sz="1300" b="1" dirty="0">
-                <a:solidFill>
-                  <a:srgbClr val="FFFFFF"/>
-                </a:solidFill>
-                <a:latin typeface="Leelawadee UI" pitchFamily="34" charset="0"/>
-                <a:ea typeface="Leelawadee UI" pitchFamily="34" charset="-122"/>
-                <a:cs typeface="Leelawadee UI" pitchFamily="34" charset="-120"/>
-              </a:rPr>
-              <a:t>circularity (ใหม่)</a:t>
-            </a:r>
-            <a:endParaRPr lang="en-US" sz="1300" dirty="0"/>
-          </a:p>
-        </p:txBody>
-      </p:sp>
-      <p:sp>
-        <p:nvSpPr>
-          <p:cNvPr id="7" name="Shape 5"/>
-          <p:cNvSpPr/>
-          <p:nvPr/>
-        </p:nvSpPr>
-        <p:spPr>
-          <a:xfrm>
-            <a:off x="9144000" y="2121408"/>
-            <a:ext cx="2286000" cy="274320"/>
-          </a:xfrm>
-          <a:prstGeom prst="rect">
-            <a:avLst/>
-          </a:prstGeom>
-          <a:solidFill>
-            <a:srgbClr val="3A4046"/>
-          </a:solidFill>
-          <a:ln/>
-        </p:spPr>
-        <p:txBody>
-          <a:bodyPr/>
-          <a:lstStyle/>
-          <a:p>
-            <a:endParaRPr lang="en-US"/>
-          </a:p>
-        </p:txBody>
-      </p:sp>
-      <p:sp>
-        <p:nvSpPr>
-          <p:cNvPr id="8" name="Shape 6"/>
-          <p:cNvSpPr/>
-          <p:nvPr/>
-        </p:nvSpPr>
-        <p:spPr>
-          <a:xfrm>
-            <a:off x="9144000" y="2121408"/>
-            <a:ext cx="2179181" cy="274320"/>
-          </a:xfrm>
-          <a:prstGeom prst="rect">
-            <a:avLst/>
-          </a:prstGeom>
-          <a:solidFill>
-            <a:srgbClr val="E8871E"/>
-          </a:solidFill>
-          <a:ln/>
-        </p:spPr>
-        <p:txBody>
-          <a:bodyPr/>
-          <a:lstStyle/>
-          <a:p>
-            <a:endParaRPr lang="en-US"/>
-          </a:p>
-        </p:txBody>
-      </p:sp>
-      <p:sp>
-        <p:nvSpPr>
-          <p:cNvPr id="9" name="Text 7"/>
-          <p:cNvSpPr/>
-          <p:nvPr/>
-        </p:nvSpPr>
-        <p:spPr>
-          <a:xfrm>
-            <a:off x="9144000" y="2084832"/>
-            <a:ext cx="2286000" cy="310896"/>
-          </a:xfrm>
-          <a:prstGeom prst="rect">
-            <a:avLst/>
-          </a:prstGeom>
-          <a:noFill/>
-          <a:ln/>
-        </p:spPr>
-        <p:txBody>
-          <a:bodyPr wrap="square" rtlCol="0" anchor="ctr"/>
-          <a:lstStyle/>
-          <a:p>
-            <a:pPr marL="0" indent="0" algn="r">
-              <a:buNone/>
-            </a:pPr>
-            <a:r>
-              <a:rPr lang="en-US" sz="1100" b="1" dirty="0">
-                <a:solidFill>
-                  <a:srgbClr val="FFFFFF"/>
-                </a:solidFill>
-                <a:latin typeface="Leelawadee UI" pitchFamily="34" charset="0"/>
-                <a:ea typeface="Leelawadee UI" pitchFamily="34" charset="-122"/>
-                <a:cs typeface="Leelawadee UI" pitchFamily="34" charset="-120"/>
-              </a:rPr>
-              <a:t>0.5243</a:t>
-            </a:r>
-            <a:endParaRPr lang="en-US" sz="1100" dirty="0"/>
-          </a:p>
-        </p:txBody>
-      </p:sp>
-      <p:sp>
-        <p:nvSpPr>
-          <p:cNvPr id="10" name="Text 8"/>
-          <p:cNvSpPr/>
-          <p:nvPr/>
-        </p:nvSpPr>
-        <p:spPr>
-          <a:xfrm>
-            <a:off x="6400800" y="2761488"/>
-            <a:ext cx="2743200" cy="365760"/>
-          </a:xfrm>
-          <a:prstGeom prst="rect">
-            <a:avLst/>
-          </a:prstGeom>
-          <a:noFill/>
-          <a:ln/>
-        </p:spPr>
-        <p:txBody>
-          <a:bodyPr wrap="square" rtlCol="0" anchor="ctr"/>
-          <a:lstStyle/>
-          <a:p>
-            <a:pPr marL="0" indent="0">
-              <a:buNone/>
-            </a:pPr>
-            <a:r>
-              <a:rPr lang="en-US" sz="1300" dirty="0">
-                <a:solidFill>
-                  <a:srgbClr val="AEB6BC"/>
-                </a:solidFill>
-                <a:latin typeface="Leelawadee UI" pitchFamily="34" charset="0"/>
-                <a:ea typeface="Leelawadee UI" pitchFamily="34" charset="-122"/>
-                <a:cs typeface="Leelawadee UI" pitchFamily="34" charset="-120"/>
-              </a:rPr>
-              <a:t>ไม่กรองรูปทรง</a:t>
-            </a:r>
-            <a:endParaRPr lang="en-US" sz="1300" dirty="0"/>
-          </a:p>
-        </p:txBody>
-      </p:sp>
-      <p:sp>
-        <p:nvSpPr>
-          <p:cNvPr id="11" name="Shape 9"/>
-          <p:cNvSpPr/>
-          <p:nvPr/>
-        </p:nvSpPr>
-        <p:spPr>
-          <a:xfrm>
-            <a:off x="9144000" y="2779776"/>
-            <a:ext cx="2286000" cy="274320"/>
-          </a:xfrm>
-          <a:prstGeom prst="rect">
-            <a:avLst/>
-          </a:prstGeom>
-          <a:solidFill>
-            <a:srgbClr val="3A4046"/>
-          </a:solidFill>
-          <a:ln/>
-        </p:spPr>
-        <p:txBody>
-          <a:bodyPr/>
-          <a:lstStyle/>
-          <a:p>
-            <a:endParaRPr lang="en-US"/>
-          </a:p>
-        </p:txBody>
-      </p:sp>
-      <p:sp>
-        <p:nvSpPr>
-          <p:cNvPr id="12" name="Shape 10"/>
-          <p:cNvSpPr/>
-          <p:nvPr/>
-        </p:nvSpPr>
-        <p:spPr>
-          <a:xfrm>
-            <a:off x="9144000" y="2779776"/>
-            <a:ext cx="2161725" cy="274320"/>
-          </a:xfrm>
-          <a:prstGeom prst="rect">
-            <a:avLst/>
-          </a:prstGeom>
-          <a:solidFill>
-            <a:srgbClr val="6B747B"/>
-          </a:solidFill>
-          <a:ln/>
-        </p:spPr>
-        <p:txBody>
-          <a:bodyPr/>
-          <a:lstStyle/>
-          <a:p>
-            <a:endParaRPr lang="en-US"/>
-          </a:p>
-        </p:txBody>
-      </p:sp>
-      <p:sp>
-        <p:nvSpPr>
-          <p:cNvPr id="13" name="Text 11"/>
-          <p:cNvSpPr/>
-          <p:nvPr/>
-        </p:nvSpPr>
-        <p:spPr>
-          <a:xfrm>
-            <a:off x="9144000" y="2743200"/>
-            <a:ext cx="2286000" cy="310896"/>
-          </a:xfrm>
-          <a:prstGeom prst="rect">
-            <a:avLst/>
-          </a:prstGeom>
-          <a:noFill/>
-          <a:ln/>
-        </p:spPr>
-        <p:txBody>
-          <a:bodyPr wrap="square" rtlCol="0" anchor="ctr"/>
-          <a:lstStyle/>
-          <a:p>
-            <a:pPr marL="0" indent="0" algn="r">
-              <a:buNone/>
-            </a:pPr>
-            <a:r>
-              <a:rPr lang="en-US" sz="1100" dirty="0">
-                <a:solidFill>
-                  <a:srgbClr val="FFFFFF"/>
-                </a:solidFill>
-                <a:latin typeface="Leelawadee UI" pitchFamily="34" charset="0"/>
-                <a:ea typeface="Leelawadee UI" pitchFamily="34" charset="-122"/>
-                <a:cs typeface="Leelawadee UI" pitchFamily="34" charset="-120"/>
-              </a:rPr>
-              <a:t>0.5201</a:t>
-            </a:r>
-            <a:endParaRPr lang="en-US" sz="1100" dirty="0"/>
-          </a:p>
-        </p:txBody>
-      </p:sp>
-      <p:sp>
-        <p:nvSpPr>
-          <p:cNvPr id="14" name="Text 12"/>
-          <p:cNvSpPr/>
-          <p:nvPr/>
-        </p:nvSpPr>
-        <p:spPr>
-          <a:xfrm>
-            <a:off x="6400800" y="3419856"/>
-            <a:ext cx="2743200" cy="365760"/>
-          </a:xfrm>
-          <a:prstGeom prst="rect">
-            <a:avLst/>
-          </a:prstGeom>
-          <a:noFill/>
-          <a:ln/>
-        </p:spPr>
-        <p:txBody>
-          <a:bodyPr wrap="square" rtlCol="0" anchor="ctr"/>
-          <a:lstStyle/>
-          <a:p>
-            <a:pPr marL="0" indent="0">
-              <a:buNone/>
-            </a:pPr>
-            <a:r>
-              <a:rPr lang="en-US" sz="1300" dirty="0">
-                <a:solidFill>
-                  <a:srgbClr val="AEB6BC"/>
-                </a:solidFill>
-                <a:latin typeface="Leelawadee UI" pitchFamily="34" charset="0"/>
-                <a:ea typeface="Leelawadee UI" pitchFamily="34" charset="-122"/>
-                <a:cs typeface="Leelawadee UI" pitchFamily="34" charset="-120"/>
-              </a:rPr>
-              <a:t>ใช้ทั้งสองเกณฑ์</a:t>
-            </a:r>
-            <a:endParaRPr lang="en-US" sz="1300" dirty="0"/>
-          </a:p>
-        </p:txBody>
-      </p:sp>
-      <p:sp>
-        <p:nvSpPr>
-          <p:cNvPr id="15" name="Shape 13"/>
-          <p:cNvSpPr/>
-          <p:nvPr/>
-        </p:nvSpPr>
-        <p:spPr>
-          <a:xfrm>
-            <a:off x="9144000" y="3438144"/>
-            <a:ext cx="2286000" cy="274320"/>
-          </a:xfrm>
-          <a:prstGeom prst="rect">
-            <a:avLst/>
-          </a:prstGeom>
-          <a:solidFill>
-            <a:srgbClr val="3A4046"/>
-          </a:solidFill>
-          <a:ln/>
-        </p:spPr>
-        <p:txBody>
-          <a:bodyPr/>
-          <a:lstStyle/>
-          <a:p>
-            <a:endParaRPr lang="en-US"/>
-          </a:p>
-        </p:txBody>
-      </p:sp>
-      <p:sp>
-        <p:nvSpPr>
-          <p:cNvPr id="16" name="Shape 14"/>
-          <p:cNvSpPr/>
-          <p:nvPr/>
-        </p:nvSpPr>
-        <p:spPr>
-          <a:xfrm>
-            <a:off x="9144000" y="3438144"/>
-            <a:ext cx="2090651" cy="274320"/>
-          </a:xfrm>
-          <a:prstGeom prst="rect">
-            <a:avLst/>
-          </a:prstGeom>
-          <a:solidFill>
-            <a:srgbClr val="6B747B"/>
-          </a:solidFill>
-          <a:ln/>
-        </p:spPr>
-        <p:txBody>
-          <a:bodyPr/>
-          <a:lstStyle/>
-          <a:p>
-            <a:endParaRPr lang="en-US"/>
-          </a:p>
-        </p:txBody>
-      </p:sp>
-      <p:sp>
-        <p:nvSpPr>
-          <p:cNvPr id="17" name="Text 15"/>
-          <p:cNvSpPr/>
-          <p:nvPr/>
-        </p:nvSpPr>
-        <p:spPr>
-          <a:xfrm>
-            <a:off x="9144000" y="3401568"/>
-            <a:ext cx="2286000" cy="310896"/>
-          </a:xfrm>
-          <a:prstGeom prst="rect">
-            <a:avLst/>
-          </a:prstGeom>
-          <a:noFill/>
-          <a:ln/>
-        </p:spPr>
-        <p:txBody>
-          <a:bodyPr wrap="square" rtlCol="0" anchor="ctr"/>
-          <a:lstStyle/>
-          <a:p>
-            <a:pPr marL="0" indent="0" algn="r">
-              <a:buNone/>
-            </a:pPr>
-            <a:r>
-              <a:rPr lang="en-US" sz="1100" dirty="0">
-                <a:solidFill>
-                  <a:srgbClr val="FFFFFF"/>
-                </a:solidFill>
-                <a:latin typeface="Leelawadee UI" pitchFamily="34" charset="0"/>
-                <a:ea typeface="Leelawadee UI" pitchFamily="34" charset="-122"/>
-                <a:cs typeface="Leelawadee UI" pitchFamily="34" charset="-120"/>
-              </a:rPr>
-              <a:t>0.5030</a:t>
-            </a:r>
-            <a:endParaRPr lang="en-US" sz="1100" dirty="0"/>
-          </a:p>
-        </p:txBody>
-      </p:sp>
-      <p:sp>
-        <p:nvSpPr>
-          <p:cNvPr id="18" name="Text 16"/>
-          <p:cNvSpPr/>
-          <p:nvPr/>
-        </p:nvSpPr>
-        <p:spPr>
-          <a:xfrm>
-            <a:off x="6400800" y="4078224"/>
-            <a:ext cx="2743200" cy="365760"/>
-          </a:xfrm>
-          <a:prstGeom prst="rect">
-            <a:avLst/>
-          </a:prstGeom>
-          <a:noFill/>
-          <a:ln/>
-        </p:spPr>
-        <p:txBody>
-          <a:bodyPr wrap="square" rtlCol="0" anchor="ctr"/>
-          <a:lstStyle/>
-          <a:p>
-            <a:pPr marL="0" indent="0">
-              <a:buNone/>
-            </a:pPr>
-            <a:r>
-              <a:rPr lang="en-US" sz="1300" dirty="0">
-                <a:solidFill>
-                  <a:srgbClr val="AEB6BC"/>
-                </a:solidFill>
-                <a:latin typeface="Leelawadee UI" pitchFamily="34" charset="0"/>
-                <a:ea typeface="Leelawadee UI" pitchFamily="34" charset="-122"/>
-                <a:cs typeface="Leelawadee UI" pitchFamily="34" charset="-120"/>
-              </a:rPr>
-              <a:t>aspect ratio (เดิม)</a:t>
-            </a:r>
-            <a:endParaRPr lang="en-US" sz="1300" dirty="0"/>
-          </a:p>
-        </p:txBody>
-      </p:sp>
-      <p:sp>
-        <p:nvSpPr>
-          <p:cNvPr id="19" name="Shape 17"/>
-          <p:cNvSpPr/>
-          <p:nvPr/>
-        </p:nvSpPr>
-        <p:spPr>
-          <a:xfrm>
-            <a:off x="9144000" y="4096512"/>
-            <a:ext cx="2286000" cy="274320"/>
-          </a:xfrm>
-          <a:prstGeom prst="rect">
-            <a:avLst/>
-          </a:prstGeom>
-          <a:solidFill>
-            <a:srgbClr val="3A4046"/>
-          </a:solidFill>
-          <a:ln/>
-        </p:spPr>
-        <p:txBody>
-          <a:bodyPr/>
-          <a:lstStyle/>
-          <a:p>
-            <a:endParaRPr lang="en-US"/>
-          </a:p>
-        </p:txBody>
-      </p:sp>
-      <p:sp>
-        <p:nvSpPr>
-          <p:cNvPr id="20" name="Shape 18"/>
-          <p:cNvSpPr/>
-          <p:nvPr/>
-        </p:nvSpPr>
-        <p:spPr>
-          <a:xfrm>
-            <a:off x="9144000" y="4096512"/>
-            <a:ext cx="2076935" cy="274320"/>
-          </a:xfrm>
-          <a:prstGeom prst="rect">
-            <a:avLst/>
-          </a:prstGeom>
-          <a:solidFill>
-            <a:srgbClr val="6B747B"/>
-          </a:solidFill>
-          <a:ln/>
-        </p:spPr>
-        <p:txBody>
-          <a:bodyPr/>
-          <a:lstStyle/>
-          <a:p>
-            <a:endParaRPr lang="en-US"/>
-          </a:p>
-        </p:txBody>
-      </p:sp>
-      <p:sp>
-        <p:nvSpPr>
-          <p:cNvPr id="21" name="Text 19"/>
-          <p:cNvSpPr/>
-          <p:nvPr/>
-        </p:nvSpPr>
-        <p:spPr>
-          <a:xfrm>
-            <a:off x="9144000" y="4059936"/>
-            <a:ext cx="2286000" cy="310896"/>
-          </a:xfrm>
-          <a:prstGeom prst="rect">
-            <a:avLst/>
-          </a:prstGeom>
-          <a:noFill/>
-          <a:ln/>
-        </p:spPr>
-        <p:txBody>
-          <a:bodyPr wrap="square" rtlCol="0" anchor="ctr"/>
-          <a:lstStyle/>
-          <a:p>
-            <a:pPr marL="0" indent="0" algn="r">
-              <a:buNone/>
-            </a:pPr>
-            <a:r>
-              <a:rPr lang="en-US" sz="1100" dirty="0">
-                <a:solidFill>
-                  <a:srgbClr val="FFFFFF"/>
-                </a:solidFill>
-                <a:latin typeface="Leelawadee UI" pitchFamily="34" charset="0"/>
-                <a:ea typeface="Leelawadee UI" pitchFamily="34" charset="-122"/>
-                <a:cs typeface="Leelawadee UI" pitchFamily="34" charset="-120"/>
-              </a:rPr>
-              <a:t>0.4997</a:t>
-            </a:r>
-            <a:endParaRPr lang="en-US" sz="1100" dirty="0"/>
-          </a:p>
-        </p:txBody>
-      </p:sp>
-      <p:sp>
-        <p:nvSpPr>
-          <p:cNvPr id="22" name="Text 20"/>
-          <p:cNvSpPr/>
-          <p:nvPr/>
-        </p:nvSpPr>
-        <p:spPr>
-          <a:xfrm>
-            <a:off x="6400800" y="5029200"/>
-            <a:ext cx="5120640" cy="731520"/>
-          </a:xfrm>
-          <a:prstGeom prst="rect">
-            <a:avLst/>
-          </a:prstGeom>
-          <a:noFill/>
-          <a:ln/>
-        </p:spPr>
-        <p:txBody>
-          <a:bodyPr wrap="square" rtlCol="0" anchor="t"/>
-          <a:lstStyle/>
-          <a:p>
-            <a:pPr marL="0" indent="0">
-              <a:lnSpc>
-                <a:spcPct val="120000"/>
-              </a:lnSpc>
-              <a:buNone/>
-            </a:pPr>
-            <a:r>
-              <a:rPr lang="en-US" sz="1300" i="1" dirty="0">
-                <a:solidFill>
-                  <a:srgbClr val="E8871E"/>
-                </a:solidFill>
-                <a:latin typeface="Leelawadee UI" pitchFamily="34" charset="0"/>
-                <a:ea typeface="Leelawadee UI" pitchFamily="34" charset="-122"/>
-                <a:cs typeface="Leelawadee UI" pitchFamily="34" charset="-120"/>
-              </a:rPr>
-              <a:t>เกณฑ์เดิม (0.4997) แย่กว่าการไม่กรองเลย (0.5201) — ครั้งแรกที่ขั้นตอนนี้มีเหตุผลเชิงตัวเลขรองรับ</a:t>
+              <a:t>ทุกรอบเลือกพารามิเตอร์จากภาพฝึก แล้ววัดผลบนภาพที่กันไว้ ไม่ได้จูนเข้ากับภาพทดสอบ</a:t>
             </a:r>
             <a:endParaRPr lang="en-US" sz="1300" dirty="0"/>
           </a:p>
@@ -2839,7 +3425,6 @@
         <a:solidFill>
           <a:srgbClr val="F4F4F2"/>
         </a:solidFill>
-        <a:effectLst/>
       </p:bgPr>
     </p:bg>
     <p:spTree>
@@ -2877,7 +3462,7 @@
           <a:bodyPr wrap="square" rtlCol="0" anchor="ctr"/>
           <a:lstStyle/>
           <a:p>
-            <a:pPr marL="0" indent="0">
+            <a:pPr indent="0" marL="0">
               <a:buNone/>
             </a:pPr>
             <a:r>
@@ -2916,7 +3501,7 @@
           <a:bodyPr wrap="square" rtlCol="0" anchor="ctr"/>
           <a:lstStyle/>
           <a:p>
-            <a:pPr marL="0" indent="0">
+            <a:pPr indent="0" marL="0">
               <a:buNone/>
             </a:pPr>
             <a:r>
@@ -2936,14 +3521,14 @@
       </p:sp>
       <p:pic>
         <p:nvPicPr>
-          <p:cNvPr id="4" name="Image 0" descr="/sessions/eager-charming-feynman/mnt/MiniProject/docs/figures/success_cases.png"/>
+          <p:cNvPr id="4" name="Image 0" descr="/sessions/eager-charming-feynman/mnt/MiniProject/docs/figures/success_cases.png">    </p:cNvPr>
           <p:cNvPicPr>
             <a:picLocks noChangeAspect="1"/>
           </p:cNvPicPr>
           <p:nvPr/>
         </p:nvPicPr>
         <p:blipFill>
-          <a:blip r:embed="rId3"/>
+          <a:blip r:embed="rId1"/>
           <a:stretch>
             <a:fillRect/>
           </a:stretch>
@@ -2979,7 +3564,7 @@
           <a:bodyPr wrap="square" rtlCol="0" anchor="ctr"/>
           <a:lstStyle/>
           <a:p>
-            <a:pPr marL="0" indent="0" algn="ctr">
+            <a:pPr algn="ctr" indent="0" marL="0">
               <a:buNone/>
             </a:pPr>
             <a:r>
@@ -2999,14 +3584,14 @@
       </p:sp>
       <p:pic>
         <p:nvPicPr>
-          <p:cNvPr id="6" name="Image 1" descr="/sessions/eager-charming-feynman/mnt/MiniProject/docs/figures/failure_cases.png"/>
+          <p:cNvPr id="6" name="Image 1" descr="/sessions/eager-charming-feynman/mnt/MiniProject/docs/figures/failure_cases.png">    </p:cNvPr>
           <p:cNvPicPr>
             <a:picLocks noChangeAspect="1"/>
           </p:cNvPicPr>
           <p:nvPr/>
         </p:nvPicPr>
         <p:blipFill>
-          <a:blip r:embed="rId4"/>
+          <a:blip r:embed="rId2"/>
           <a:stretch>
             <a:fillRect/>
           </a:stretch>
@@ -3042,7 +3627,7 @@
           <a:bodyPr wrap="square" rtlCol="0" anchor="ctr"/>
           <a:lstStyle/>
           <a:p>
-            <a:pPr marL="0" indent="0" algn="ctr">
+            <a:pPr algn="ctr" indent="0" marL="0">
               <a:buNone/>
             </a:pPr>
             <a:r>
@@ -3081,7 +3666,7 @@
           <a:bodyPr wrap="square" rtlCol="0" anchor="t"/>
           <a:lstStyle/>
           <a:p>
-            <a:pPr marL="0" indent="0" algn="ctr">
+            <a:pPr algn="ctr" indent="0" marL="0">
               <a:lnSpc>
                 <a:spcPct val="115000"/>
               </a:lnSpc>
@@ -3118,7 +3703,6 @@
         <a:solidFill>
           <a:srgbClr val="2E3338"/>
         </a:solidFill>
-        <a:effectLst/>
       </p:bgPr>
     </p:bg>
     <p:spTree>
@@ -3156,7 +3740,7 @@
           <a:bodyPr wrap="square" rtlCol="0" anchor="ctr"/>
           <a:lstStyle/>
           <a:p>
-            <a:pPr marL="0" indent="0">
+            <a:pPr indent="0" marL="0">
               <a:buNone/>
             </a:pPr>
             <a:r>
@@ -3195,7 +3779,7 @@
           <a:bodyPr wrap="square" rtlCol="0" anchor="ctr"/>
           <a:lstStyle/>
           <a:p>
-            <a:pPr marL="0" indent="0">
+            <a:pPr indent="0" marL="0">
               <a:buNone/>
             </a:pPr>
             <a:r>
@@ -3239,13 +3823,6 @@
             <a:prstDash val="solid"/>
           </a:ln>
         </p:spPr>
-        <p:txBody>
-          <a:bodyPr/>
-          <a:lstStyle/>
-          <a:p>
-            <a:endParaRPr lang="en-US"/>
-          </a:p>
-        </p:txBody>
       </p:sp>
       <p:sp>
         <p:nvSpPr>
@@ -3266,13 +3843,6 @@
           </a:solidFill>
           <a:ln/>
         </p:spPr>
-        <p:txBody>
-          <a:bodyPr/>
-          <a:lstStyle/>
-          <a:p>
-            <a:endParaRPr lang="en-US"/>
-          </a:p>
-        </p:txBody>
       </p:sp>
       <p:sp>
         <p:nvSpPr>
@@ -3295,7 +3865,7 @@
           <a:bodyPr wrap="square" rtlCol="0" anchor="ctr"/>
           <a:lstStyle/>
           <a:p>
-            <a:pPr marL="0" indent="0" algn="ctr">
+            <a:pPr algn="ctr" indent="0" marL="0">
               <a:buNone/>
             </a:pPr>
             <a:r>
@@ -3334,7 +3904,7 @@
           <a:bodyPr wrap="square" rtlCol="0" anchor="ctr"/>
           <a:lstStyle/>
           <a:p>
-            <a:pPr marL="0" indent="0">
+            <a:pPr indent="0" marL="0">
               <a:buNone/>
             </a:pPr>
             <a:r>
@@ -3373,7 +3943,7 @@
           <a:bodyPr wrap="square" rtlCol="0" anchor="t"/>
           <a:lstStyle/>
           <a:p>
-            <a:pPr marL="0" indent="0">
+            <a:pPr indent="0" marL="0">
               <a:lnSpc>
                 <a:spcPct val="115000"/>
               </a:lnSpc>
@@ -3420,13 +3990,6 @@
             <a:prstDash val="solid"/>
           </a:ln>
         </p:spPr>
-        <p:txBody>
-          <a:bodyPr/>
-          <a:lstStyle/>
-          <a:p>
-            <a:endParaRPr lang="en-US"/>
-          </a:p>
-        </p:txBody>
       </p:sp>
       <p:sp>
         <p:nvSpPr>
@@ -3447,13 +4010,6 @@
           </a:solidFill>
           <a:ln/>
         </p:spPr>
-        <p:txBody>
-          <a:bodyPr/>
-          <a:lstStyle/>
-          <a:p>
-            <a:endParaRPr lang="en-US"/>
-          </a:p>
-        </p:txBody>
       </p:sp>
       <p:sp>
         <p:nvSpPr>
@@ -3476,7 +4032,7 @@
           <a:bodyPr wrap="square" rtlCol="0" anchor="ctr"/>
           <a:lstStyle/>
           <a:p>
-            <a:pPr marL="0" indent="0" algn="ctr">
+            <a:pPr algn="ctr" indent="0" marL="0">
               <a:buNone/>
             </a:pPr>
             <a:r>
@@ -3515,7 +4071,7 @@
           <a:bodyPr wrap="square" rtlCol="0" anchor="ctr"/>
           <a:lstStyle/>
           <a:p>
-            <a:pPr marL="0" indent="0">
+            <a:pPr indent="0" marL="0">
               <a:buNone/>
             </a:pPr>
             <a:r>
@@ -3554,7 +4110,7 @@
           <a:bodyPr wrap="square" rtlCol="0" anchor="t"/>
           <a:lstStyle/>
           <a:p>
-            <a:pPr marL="0" indent="0">
+            <a:pPr indent="0" marL="0">
               <a:lnSpc>
                 <a:spcPct val="115000"/>
               </a:lnSpc>
@@ -3601,13 +4157,6 @@
             <a:prstDash val="solid"/>
           </a:ln>
         </p:spPr>
-        <p:txBody>
-          <a:bodyPr/>
-          <a:lstStyle/>
-          <a:p>
-            <a:endParaRPr lang="en-US"/>
-          </a:p>
-        </p:txBody>
       </p:sp>
       <p:sp>
         <p:nvSpPr>
@@ -3628,13 +4177,6 @@
           </a:solidFill>
           <a:ln/>
         </p:spPr>
-        <p:txBody>
-          <a:bodyPr/>
-          <a:lstStyle/>
-          <a:p>
-            <a:endParaRPr lang="en-US"/>
-          </a:p>
-        </p:txBody>
       </p:sp>
       <p:sp>
         <p:nvSpPr>
@@ -3657,7 +4199,7 @@
           <a:bodyPr wrap="square" rtlCol="0" anchor="ctr"/>
           <a:lstStyle/>
           <a:p>
-            <a:pPr marL="0" indent="0" algn="ctr">
+            <a:pPr algn="ctr" indent="0" marL="0">
               <a:buNone/>
             </a:pPr>
             <a:r>
@@ -3696,7 +4238,7 @@
           <a:bodyPr wrap="square" rtlCol="0" anchor="ctr"/>
           <a:lstStyle/>
           <a:p>
-            <a:pPr marL="0" indent="0">
+            <a:pPr indent="0" marL="0">
               <a:buNone/>
             </a:pPr>
             <a:r>
@@ -3735,7 +4277,7 @@
           <a:bodyPr wrap="square" rtlCol="0" anchor="t"/>
           <a:lstStyle/>
           <a:p>
-            <a:pPr marL="0" indent="0">
+            <a:pPr indent="0" marL="0">
               <a:lnSpc>
                 <a:spcPct val="115000"/>
               </a:lnSpc>
@@ -3782,13 +4324,6 @@
             <a:prstDash val="solid"/>
           </a:ln>
         </p:spPr>
-        <p:txBody>
-          <a:bodyPr/>
-          <a:lstStyle/>
-          <a:p>
-            <a:endParaRPr lang="en-US"/>
-          </a:p>
-        </p:txBody>
       </p:sp>
       <p:sp>
         <p:nvSpPr>
@@ -3809,13 +4344,6 @@
           </a:solidFill>
           <a:ln/>
         </p:spPr>
-        <p:txBody>
-          <a:bodyPr/>
-          <a:lstStyle/>
-          <a:p>
-            <a:endParaRPr lang="en-US"/>
-          </a:p>
-        </p:txBody>
       </p:sp>
       <p:sp>
         <p:nvSpPr>
@@ -3838,7 +4366,7 @@
           <a:bodyPr wrap="square" rtlCol="0" anchor="ctr"/>
           <a:lstStyle/>
           <a:p>
-            <a:pPr marL="0" indent="0" algn="ctr">
+            <a:pPr algn="ctr" indent="0" marL="0">
               <a:buNone/>
             </a:pPr>
             <a:r>
@@ -3877,7 +4405,7 @@
           <a:bodyPr wrap="square" rtlCol="0" anchor="ctr"/>
           <a:lstStyle/>
           <a:p>
-            <a:pPr marL="0" indent="0">
+            <a:pPr indent="0" marL="0">
               <a:buNone/>
             </a:pPr>
             <a:r>
@@ -3916,7 +4444,7 @@
           <a:bodyPr wrap="square" rtlCol="0" anchor="t"/>
           <a:lstStyle/>
           <a:p>
-            <a:pPr marL="0" indent="0">
+            <a:pPr indent="0" marL="0">
               <a:lnSpc>
                 <a:spcPct val="115000"/>
               </a:lnSpc>
@@ -3958,7 +4486,7 @@
           <a:bodyPr wrap="square" rtlCol="0" anchor="t"/>
           <a:lstStyle/>
           <a:p>
-            <a:pPr marL="0" indent="0">
+            <a:pPr indent="0" marL="0">
               <a:lnSpc>
                 <a:spcPct val="125000"/>
               </a:lnSpc>
@@ -3975,6 +4503,12 @@
               </a:rPr>
               <a:t>สรุป: </a:t>
             </a:r>
+            <a:pPr indent="0" marL="0">
+              <a:lnSpc>
+                <a:spcPct val="125000"/>
+              </a:lnSpc>
+              <a:buNone/>
+            </a:pPr>
             <a:r>
               <a:rPr lang="en-US" sz="1500" dirty="0">
                 <a:solidFill>
@@ -4011,7 +4545,7 @@
           <a:bodyPr wrap="square" rtlCol="0" anchor="ctr"/>
           <a:lstStyle/>
           <a:p>
-            <a:pPr marL="0" indent="0">
+            <a:pPr indent="0" marL="0">
               <a:buNone/>
             </a:pPr>
             <a:r>
@@ -4045,7 +4579,6 @@
         <a:solidFill>
           <a:srgbClr val="F4F4F2"/>
         </a:solidFill>
-        <a:effectLst/>
       </p:bgPr>
     </p:bg>
     <p:spTree>
@@ -4083,7 +4616,7 @@
           <a:bodyPr wrap="square" rtlCol="0" anchor="ctr"/>
           <a:lstStyle/>
           <a:p>
-            <a:pPr marL="0" indent="0">
+            <a:pPr indent="0" marL="0">
               <a:buNone/>
             </a:pPr>
             <a:r>
@@ -4122,7 +4655,7 @@
           <a:bodyPr wrap="square" rtlCol="0" anchor="ctr"/>
           <a:lstStyle/>
           <a:p>
-            <a:pPr marL="0" indent="0">
+            <a:pPr indent="0" marL="0">
               <a:buNone/>
             </a:pPr>
             <a:r>
@@ -4161,7 +4694,7 @@
           <a:bodyPr wrap="square" rtlCol="0" anchor="t"/>
           <a:lstStyle/>
           <a:p>
-            <a:pPr marL="0" indent="0">
+            <a:pPr indent="0" marL="0">
               <a:lnSpc>
                 <a:spcPct val="130000"/>
               </a:lnSpc>
@@ -4208,20 +4741,13 @@
             <a:prstDash val="solid"/>
           </a:ln>
           <a:effectLst>
-            <a:outerShdw blurRad="76200" dist="25400" dir="5400000" algn="bl" rotWithShape="0">
+            <a:outerShdw sx="100000" sy="100000" kx="0" ky="0" algn="bl" rotWithShape="0" blurRad="76200" dist="25400" dir="5400000">
               <a:srgbClr val="BBBBBB">
                 <a:alpha val="50000"/>
               </a:srgbClr>
             </a:outerShdw>
           </a:effectLst>
         </p:spPr>
-        <p:txBody>
-          <a:bodyPr/>
-          <a:lstStyle/>
-          <a:p>
-            <a:endParaRPr lang="en-US"/>
-          </a:p>
-        </p:txBody>
       </p:sp>
       <p:sp>
         <p:nvSpPr>
@@ -4242,13 +4768,6 @@
           </a:solidFill>
           <a:ln/>
         </p:spPr>
-        <p:txBody>
-          <a:bodyPr/>
-          <a:lstStyle/>
-          <a:p>
-            <a:endParaRPr lang="en-US"/>
-          </a:p>
-        </p:txBody>
       </p:sp>
       <p:sp>
         <p:nvSpPr>
@@ -4271,7 +4790,7 @@
           <a:bodyPr wrap="square" rtlCol="0" anchor="ctr"/>
           <a:lstStyle/>
           <a:p>
-            <a:pPr marL="0" indent="0" algn="ctr">
+            <a:pPr algn="ctr" indent="0" marL="0">
               <a:buNone/>
             </a:pPr>
             <a:r>
@@ -4310,7 +4829,7 @@
           <a:bodyPr wrap="square" rtlCol="0" anchor="ctr"/>
           <a:lstStyle/>
           <a:p>
-            <a:pPr marL="0" indent="0">
+            <a:pPr indent="0" marL="0">
               <a:lnSpc>
                 <a:spcPct val="105000"/>
               </a:lnSpc>
@@ -4328,6 +4847,12 @@
               <a:t>ตรวจด้วยสายตา ช้าและแพง
 </a:t>
             </a:r>
+            <a:pPr indent="0" marL="0">
+              <a:lnSpc>
+                <a:spcPct val="105000"/>
+              </a:lnSpc>
+              <a:buNone/>
+            </a:pPr>
             <a:r>
               <a:rPr lang="en-US" sz="1200" dirty="0">
                 <a:solidFill>
@@ -4369,20 +4894,13 @@
             <a:prstDash val="solid"/>
           </a:ln>
           <a:effectLst>
-            <a:outerShdw blurRad="76200" dist="25400" dir="5400000" algn="bl" rotWithShape="0">
+            <a:outerShdw sx="100000" sy="100000" kx="0" ky="0" algn="bl" rotWithShape="0" blurRad="76200" dist="25400" dir="5400000">
               <a:srgbClr val="BBBBBB">
                 <a:alpha val="50000"/>
               </a:srgbClr>
             </a:outerShdw>
           </a:effectLst>
         </p:spPr>
-        <p:txBody>
-          <a:bodyPr/>
-          <a:lstStyle/>
-          <a:p>
-            <a:endParaRPr lang="en-US"/>
-          </a:p>
-        </p:txBody>
       </p:sp>
       <p:sp>
         <p:nvSpPr>
@@ -4403,13 +4921,6 @@
           </a:solidFill>
           <a:ln/>
         </p:spPr>
-        <p:txBody>
-          <a:bodyPr/>
-          <a:lstStyle/>
-          <a:p>
-            <a:endParaRPr lang="en-US"/>
-          </a:p>
-        </p:txBody>
       </p:sp>
       <p:sp>
         <p:nvSpPr>
@@ -4432,7 +4943,7 @@
           <a:bodyPr wrap="square" rtlCol="0" anchor="ctr"/>
           <a:lstStyle/>
           <a:p>
-            <a:pPr marL="0" indent="0" algn="ctr">
+            <a:pPr algn="ctr" indent="0" marL="0">
               <a:buNone/>
             </a:pPr>
             <a:r>
@@ -4471,7 +4982,7 @@
           <a:bodyPr wrap="square" rtlCol="0" anchor="ctr"/>
           <a:lstStyle/>
           <a:p>
-            <a:pPr marL="0" indent="0">
+            <a:pPr indent="0" marL="0">
               <a:lnSpc>
                 <a:spcPct val="105000"/>
               </a:lnSpc>
@@ -4489,6 +5000,12 @@
               <a:t>ผลขึ้นกับคน
 </a:t>
             </a:r>
+            <a:pPr indent="0" marL="0">
+              <a:lnSpc>
+                <a:spcPct val="105000"/>
+              </a:lnSpc>
+              <a:buNone/>
+            </a:pPr>
             <a:r>
               <a:rPr lang="en-US" sz="1200" dirty="0">
                 <a:solidFill>
@@ -4530,20 +5047,13 @@
             <a:prstDash val="solid"/>
           </a:ln>
           <a:effectLst>
-            <a:outerShdw blurRad="76200" dist="25400" dir="5400000" algn="bl" rotWithShape="0">
+            <a:outerShdw sx="100000" sy="100000" kx="0" ky="0" algn="bl" rotWithShape="0" blurRad="76200" dist="25400" dir="5400000">
               <a:srgbClr val="BBBBBB">
                 <a:alpha val="50000"/>
               </a:srgbClr>
             </a:outerShdw>
           </a:effectLst>
         </p:spPr>
-        <p:txBody>
-          <a:bodyPr/>
-          <a:lstStyle/>
-          <a:p>
-            <a:endParaRPr lang="en-US"/>
-          </a:p>
-        </p:txBody>
       </p:sp>
       <p:sp>
         <p:nvSpPr>
@@ -4564,13 +5074,6 @@
           </a:solidFill>
           <a:ln/>
         </p:spPr>
-        <p:txBody>
-          <a:bodyPr/>
-          <a:lstStyle/>
-          <a:p>
-            <a:endParaRPr lang="en-US"/>
-          </a:p>
-        </p:txBody>
       </p:sp>
       <p:sp>
         <p:nvSpPr>
@@ -4593,7 +5096,7 @@
           <a:bodyPr wrap="square" rtlCol="0" anchor="ctr"/>
           <a:lstStyle/>
           <a:p>
-            <a:pPr marL="0" indent="0" algn="ctr">
+            <a:pPr algn="ctr" indent="0" marL="0">
               <a:buNone/>
             </a:pPr>
             <a:r>
@@ -4632,7 +5135,7 @@
           <a:bodyPr wrap="square" rtlCol="0" anchor="ctr"/>
           <a:lstStyle/>
           <a:p>
-            <a:pPr marL="0" indent="0">
+            <a:pPr indent="0" marL="0">
               <a:lnSpc>
                 <a:spcPct val="105000"/>
               </a:lnSpc>
@@ -4650,6 +5153,12 @@
               <a:t>ต้องการตัวช่วยคัดกรอง
 </a:t>
             </a:r>
+            <a:pPr indent="0" marL="0">
+              <a:lnSpc>
+                <a:spcPct val="105000"/>
+              </a:lnSpc>
+              <a:buNone/>
+            </a:pPr>
             <a:r>
               <a:rPr lang="en-US" sz="1200" dirty="0">
                 <a:solidFill>
@@ -4681,7 +5190,6 @@
         <a:solidFill>
           <a:srgbClr val="F4F4F2"/>
         </a:solidFill>
-        <a:effectLst/>
       </p:bgPr>
     </p:bg>
     <p:spTree>
@@ -4719,7 +5227,7 @@
           <a:bodyPr wrap="square" rtlCol="0" anchor="ctr"/>
           <a:lstStyle/>
           <a:p>
-            <a:pPr marL="0" indent="0">
+            <a:pPr indent="0" marL="0">
               <a:buNone/>
             </a:pPr>
             <a:r>
@@ -4758,13 +5266,6 @@
           </a:solidFill>
           <a:ln/>
         </p:spPr>
-        <p:txBody>
-          <a:bodyPr/>
-          <a:lstStyle/>
-          <a:p>
-            <a:endParaRPr lang="en-US"/>
-          </a:p>
-        </p:txBody>
       </p:sp>
       <p:sp>
         <p:nvSpPr>
@@ -4787,7 +5288,7 @@
           <a:bodyPr wrap="square" rtlCol="0" anchor="ctr"/>
           <a:lstStyle/>
           <a:p>
-            <a:pPr marL="0" indent="0">
+            <a:pPr indent="0" marL="0">
               <a:lnSpc>
                 <a:spcPct val="115000"/>
               </a:lnSpc>
@@ -4804,6 +5305,12 @@
               </a:rPr>
               <a:t>จุดประสงค์   </a:t>
             </a:r>
+            <a:pPr indent="0" marL="0">
+              <a:lnSpc>
+                <a:spcPct val="115000"/>
+              </a:lnSpc>
+              <a:buNone/>
+            </a:pPr>
             <a:r>
               <a:rPr lang="en-US" sz="1600" dirty="0">
                 <a:solidFill>
@@ -4821,18 +5328,57 @@
       </p:sp>
       <p:sp>
         <p:nvSpPr>
-          <p:cNvPr id="5" name="Shape 3"/>
-          <p:cNvSpPr/>
-          <p:nvPr/>
-        </p:nvSpPr>
-        <p:spPr>
-          <a:xfrm>
-            <a:off x="640080" y="2743200"/>
-            <a:ext cx="5349240" cy="1600200"/>
+          <p:cNvPr id="5" name="Text 3"/>
+          <p:cNvSpPr/>
+          <p:nvPr/>
+        </p:nvSpPr>
+        <p:spPr>
+          <a:xfrm>
+            <a:off x="640080" y="2487168"/>
+            <a:ext cx="10881360" cy="274320"/>
+          </a:xfrm>
+          <a:prstGeom prst="rect">
+            <a:avLst/>
+          </a:prstGeom>
+          <a:noFill/>
+          <a:ln/>
+        </p:spPr>
+        <p:txBody>
+          <a:bodyPr wrap="square" rtlCol="0" anchor="ctr"/>
+          <a:lstStyle/>
+          <a:p>
+            <a:pPr indent="0" marL="0">
+              <a:buNone/>
+            </a:pPr>
+            <a:r>
+              <a:rPr lang="en-US" sz="1250" i="1" dirty="0">
+                <a:solidFill>
+                  <a:srgbClr val="B5670F"/>
+                </a:solidFill>
+                <a:latin typeface="Leelawadee UI" pitchFamily="34" charset="0"/>
+                <a:ea typeface="Leelawadee UI" pitchFamily="34" charset="-122"/>
+                <a:cs typeface="Leelawadee UI" pitchFamily="34" charset="-120"/>
+              </a:rPr>
+              <a:t>ทำนายระดับพิกเซล (pixel-level segmentation) — ตัดสินทุกพิกเซลว่าเป็นรอยร้าวหรือไม่ ได้ผลเป็น binary mask ไม่ใช่แค่บอกว่าทั้งภาพมี/ไม่มีรอยร้าว</a:t>
+            </a:r>
+            <a:endParaRPr lang="en-US" sz="1250" dirty="0"/>
+          </a:p>
+        </p:txBody>
+      </p:sp>
+      <p:sp>
+        <p:nvSpPr>
+          <p:cNvPr id="6" name="Shape 4"/>
+          <p:cNvSpPr/>
+          <p:nvPr/>
+        </p:nvSpPr>
+        <p:spPr>
+          <a:xfrm>
+            <a:off x="640080" y="2926080"/>
+            <a:ext cx="5349240" cy="1554480"/>
           </a:xfrm>
           <a:prstGeom prst="roundRect">
             <a:avLst>
-              <a:gd name="adj" fmla="val 3429"/>
+              <a:gd name="adj" fmla="val 3529"/>
             </a:avLst>
           </a:prstGeom>
           <a:solidFill>
@@ -4845,23 +5391,16 @@
             <a:prstDash val="solid"/>
           </a:ln>
         </p:spPr>
-        <p:txBody>
-          <a:bodyPr/>
-          <a:lstStyle/>
-          <a:p>
-            <a:endParaRPr lang="en-US"/>
-          </a:p>
-        </p:txBody>
-      </p:sp>
-      <p:sp>
-        <p:nvSpPr>
-          <p:cNvPr id="6" name="Shape 4"/>
-          <p:cNvSpPr/>
-          <p:nvPr/>
-        </p:nvSpPr>
-        <p:spPr>
-          <a:xfrm>
-            <a:off x="914400" y="3054096"/>
+      </p:sp>
+      <p:sp>
+        <p:nvSpPr>
+          <p:cNvPr id="7" name="Shape 5"/>
+          <p:cNvSpPr/>
+          <p:nvPr/>
+        </p:nvSpPr>
+        <p:spPr>
+          <a:xfrm>
+            <a:off x="914400" y="3236976"/>
             <a:ext cx="128016" cy="128016"/>
           </a:xfrm>
           <a:prstGeom prst="rect">
@@ -4872,23 +5411,16 @@
           </a:solidFill>
           <a:ln/>
         </p:spPr>
-        <p:txBody>
-          <a:bodyPr/>
-          <a:lstStyle/>
-          <a:p>
-            <a:endParaRPr lang="en-US"/>
-          </a:p>
-        </p:txBody>
-      </p:sp>
-      <p:sp>
-        <p:nvSpPr>
-          <p:cNvPr id="7" name="Text 5"/>
-          <p:cNvSpPr/>
-          <p:nvPr/>
-        </p:nvSpPr>
-        <p:spPr>
-          <a:xfrm>
-            <a:off x="1143000" y="2944368"/>
+      </p:sp>
+      <p:sp>
+        <p:nvSpPr>
+          <p:cNvPr id="8" name="Text 6"/>
+          <p:cNvSpPr/>
+          <p:nvPr/>
+        </p:nvSpPr>
+        <p:spPr>
+          <a:xfrm>
+            <a:off x="1143000" y="3127248"/>
             <a:ext cx="4617720" cy="365760"/>
           </a:xfrm>
           <a:prstGeom prst="rect">
@@ -4901,7 +5433,7 @@
           <a:bodyPr wrap="square" rtlCol="0" anchor="ctr"/>
           <a:lstStyle/>
           <a:p>
-            <a:pPr marL="0" indent="0">
+            <a:pPr indent="0" marL="0">
               <a:buNone/>
             </a:pPr>
             <a:r>
@@ -4921,13 +5453,13 @@
       </p:sp>
       <p:sp>
         <p:nvSpPr>
-          <p:cNvPr id="8" name="Text 6"/>
-          <p:cNvSpPr/>
-          <p:nvPr/>
-        </p:nvSpPr>
-        <p:spPr>
-          <a:xfrm>
-            <a:off x="914400" y="3401568"/>
+          <p:cNvPr id="9" name="Text 7"/>
+          <p:cNvSpPr/>
+          <p:nvPr/>
+        </p:nvSpPr>
+        <p:spPr>
+          <a:xfrm>
+            <a:off x="914400" y="3584448"/>
             <a:ext cx="4800600" cy="822960"/>
           </a:xfrm>
           <a:prstGeom prst="rect">
@@ -4940,7 +5472,7 @@
           <a:bodyPr wrap="square" rtlCol="0" anchor="t"/>
           <a:lstStyle/>
           <a:p>
-            <a:pPr marL="0" indent="0">
+            <a:pPr indent="0" marL="0">
               <a:lnSpc>
                 <a:spcPct val="115000"/>
               </a:lnSpc>
@@ -4963,18 +5495,18 @@
       </p:sp>
       <p:sp>
         <p:nvSpPr>
-          <p:cNvPr id="9" name="Shape 7"/>
-          <p:cNvSpPr/>
-          <p:nvPr/>
-        </p:nvSpPr>
-        <p:spPr>
-          <a:xfrm>
-            <a:off x="6172200" y="2743200"/>
-            <a:ext cx="5349240" cy="1600200"/>
+          <p:cNvPr id="10" name="Shape 8"/>
+          <p:cNvSpPr/>
+          <p:nvPr/>
+        </p:nvSpPr>
+        <p:spPr>
+          <a:xfrm>
+            <a:off x="6172200" y="2926080"/>
+            <a:ext cx="5349240" cy="1554480"/>
           </a:xfrm>
           <a:prstGeom prst="roundRect">
             <a:avLst>
-              <a:gd name="adj" fmla="val 3429"/>
+              <a:gd name="adj" fmla="val 3529"/>
             </a:avLst>
           </a:prstGeom>
           <a:solidFill>
@@ -4987,23 +5519,16 @@
             <a:prstDash val="solid"/>
           </a:ln>
         </p:spPr>
-        <p:txBody>
-          <a:bodyPr/>
-          <a:lstStyle/>
-          <a:p>
-            <a:endParaRPr lang="en-US"/>
-          </a:p>
-        </p:txBody>
-      </p:sp>
-      <p:sp>
-        <p:nvSpPr>
-          <p:cNvPr id="10" name="Shape 8"/>
-          <p:cNvSpPr/>
-          <p:nvPr/>
-        </p:nvSpPr>
-        <p:spPr>
-          <a:xfrm>
-            <a:off x="6446520" y="3054096"/>
+      </p:sp>
+      <p:sp>
+        <p:nvSpPr>
+          <p:cNvPr id="11" name="Shape 9"/>
+          <p:cNvSpPr/>
+          <p:nvPr/>
+        </p:nvSpPr>
+        <p:spPr>
+          <a:xfrm>
+            <a:off x="6446520" y="3236976"/>
             <a:ext cx="128016" cy="128016"/>
           </a:xfrm>
           <a:prstGeom prst="rect">
@@ -5014,23 +5539,16 @@
           </a:solidFill>
           <a:ln/>
         </p:spPr>
-        <p:txBody>
-          <a:bodyPr/>
-          <a:lstStyle/>
-          <a:p>
-            <a:endParaRPr lang="en-US"/>
-          </a:p>
-        </p:txBody>
-      </p:sp>
-      <p:sp>
-        <p:nvSpPr>
-          <p:cNvPr id="11" name="Text 9"/>
-          <p:cNvSpPr/>
-          <p:nvPr/>
-        </p:nvSpPr>
-        <p:spPr>
-          <a:xfrm>
-            <a:off x="6675120" y="2944368"/>
+      </p:sp>
+      <p:sp>
+        <p:nvSpPr>
+          <p:cNvPr id="12" name="Text 10"/>
+          <p:cNvSpPr/>
+          <p:nvPr/>
+        </p:nvSpPr>
+        <p:spPr>
+          <a:xfrm>
+            <a:off x="6675120" y="3127248"/>
             <a:ext cx="4617720" cy="365760"/>
           </a:xfrm>
           <a:prstGeom prst="rect">
@@ -5043,7 +5561,7 @@
           <a:bodyPr wrap="square" rtlCol="0" anchor="ctr"/>
           <a:lstStyle/>
           <a:p>
-            <a:pPr marL="0" indent="0">
+            <a:pPr indent="0" marL="0">
               <a:buNone/>
             </a:pPr>
             <a:r>
@@ -5063,13 +5581,13 @@
       </p:sp>
       <p:sp>
         <p:nvSpPr>
-          <p:cNvPr id="12" name="Text 10"/>
-          <p:cNvSpPr/>
-          <p:nvPr/>
-        </p:nvSpPr>
-        <p:spPr>
-          <a:xfrm>
-            <a:off x="6446520" y="3401568"/>
+          <p:cNvPr id="13" name="Text 11"/>
+          <p:cNvSpPr/>
+          <p:nvPr/>
+        </p:nvSpPr>
+        <p:spPr>
+          <a:xfrm>
+            <a:off x="6446520" y="3584448"/>
             <a:ext cx="4800600" cy="822960"/>
           </a:xfrm>
           <a:prstGeom prst="rect">
@@ -5082,7 +5600,7 @@
           <a:bodyPr wrap="square" rtlCol="0" anchor="t"/>
           <a:lstStyle/>
           <a:p>
-            <a:pPr marL="0" indent="0">
+            <a:pPr indent="0" marL="0">
               <a:lnSpc>
                 <a:spcPct val="115000"/>
               </a:lnSpc>
@@ -5105,18 +5623,18 @@
       </p:sp>
       <p:sp>
         <p:nvSpPr>
-          <p:cNvPr id="13" name="Shape 11"/>
-          <p:cNvSpPr/>
-          <p:nvPr/>
-        </p:nvSpPr>
-        <p:spPr>
-          <a:xfrm>
-            <a:off x="640080" y="4526280"/>
-            <a:ext cx="5349240" cy="1600200"/>
+          <p:cNvPr id="14" name="Shape 12"/>
+          <p:cNvSpPr/>
+          <p:nvPr/>
+        </p:nvSpPr>
+        <p:spPr>
+          <a:xfrm>
+            <a:off x="640080" y="4663440"/>
+            <a:ext cx="5349240" cy="1554480"/>
           </a:xfrm>
           <a:prstGeom prst="roundRect">
             <a:avLst>
-              <a:gd name="adj" fmla="val 3429"/>
+              <a:gd name="adj" fmla="val 3529"/>
             </a:avLst>
           </a:prstGeom>
           <a:solidFill>
@@ -5129,23 +5647,16 @@
             <a:prstDash val="solid"/>
           </a:ln>
         </p:spPr>
-        <p:txBody>
-          <a:bodyPr/>
-          <a:lstStyle/>
-          <a:p>
-            <a:endParaRPr lang="en-US"/>
-          </a:p>
-        </p:txBody>
-      </p:sp>
-      <p:sp>
-        <p:nvSpPr>
-          <p:cNvPr id="14" name="Shape 12"/>
-          <p:cNvSpPr/>
-          <p:nvPr/>
-        </p:nvSpPr>
-        <p:spPr>
-          <a:xfrm>
-            <a:off x="914400" y="4837176"/>
+      </p:sp>
+      <p:sp>
+        <p:nvSpPr>
+          <p:cNvPr id="15" name="Shape 13"/>
+          <p:cNvSpPr/>
+          <p:nvPr/>
+        </p:nvSpPr>
+        <p:spPr>
+          <a:xfrm>
+            <a:off x="914400" y="4974336"/>
             <a:ext cx="128016" cy="128016"/>
           </a:xfrm>
           <a:prstGeom prst="rect">
@@ -5156,23 +5667,16 @@
           </a:solidFill>
           <a:ln/>
         </p:spPr>
-        <p:txBody>
-          <a:bodyPr/>
-          <a:lstStyle/>
-          <a:p>
-            <a:endParaRPr lang="en-US"/>
-          </a:p>
-        </p:txBody>
-      </p:sp>
-      <p:sp>
-        <p:nvSpPr>
-          <p:cNvPr id="15" name="Text 13"/>
-          <p:cNvSpPr/>
-          <p:nvPr/>
-        </p:nvSpPr>
-        <p:spPr>
-          <a:xfrm>
-            <a:off x="1143000" y="4727448"/>
+      </p:sp>
+      <p:sp>
+        <p:nvSpPr>
+          <p:cNvPr id="16" name="Text 14"/>
+          <p:cNvSpPr/>
+          <p:nvPr/>
+        </p:nvSpPr>
+        <p:spPr>
+          <a:xfrm>
+            <a:off x="1143000" y="4864608"/>
             <a:ext cx="4617720" cy="365760"/>
           </a:xfrm>
           <a:prstGeom prst="rect">
@@ -5185,7 +5689,7 @@
           <a:bodyPr wrap="square" rtlCol="0" anchor="ctr"/>
           <a:lstStyle/>
           <a:p>
-            <a:pPr marL="0" indent="0">
+            <a:pPr indent="0" marL="0">
               <a:buNone/>
             </a:pPr>
             <a:r>
@@ -5205,13 +5709,13 @@
       </p:sp>
       <p:sp>
         <p:nvSpPr>
-          <p:cNvPr id="16" name="Text 14"/>
-          <p:cNvSpPr/>
-          <p:nvPr/>
-        </p:nvSpPr>
-        <p:spPr>
-          <a:xfrm>
-            <a:off x="914400" y="5184648"/>
+          <p:cNvPr id="17" name="Text 15"/>
+          <p:cNvSpPr/>
+          <p:nvPr/>
+        </p:nvSpPr>
+        <p:spPr>
+          <a:xfrm>
+            <a:off x="914400" y="5321808"/>
             <a:ext cx="4800600" cy="822960"/>
           </a:xfrm>
           <a:prstGeom prst="rect">
@@ -5224,7 +5728,7 @@
           <a:bodyPr wrap="square" rtlCol="0" anchor="t"/>
           <a:lstStyle/>
           <a:p>
-            <a:pPr marL="0" indent="0">
+            <a:pPr indent="0" marL="0">
               <a:lnSpc>
                 <a:spcPct val="115000"/>
               </a:lnSpc>
@@ -5247,18 +5751,18 @@
       </p:sp>
       <p:sp>
         <p:nvSpPr>
-          <p:cNvPr id="17" name="Shape 15"/>
-          <p:cNvSpPr/>
-          <p:nvPr/>
-        </p:nvSpPr>
-        <p:spPr>
-          <a:xfrm>
-            <a:off x="6172200" y="4526280"/>
-            <a:ext cx="5349240" cy="1600200"/>
+          <p:cNvPr id="18" name="Shape 16"/>
+          <p:cNvSpPr/>
+          <p:nvPr/>
+        </p:nvSpPr>
+        <p:spPr>
+          <a:xfrm>
+            <a:off x="6172200" y="4663440"/>
+            <a:ext cx="5349240" cy="1554480"/>
           </a:xfrm>
           <a:prstGeom prst="roundRect">
             <a:avLst>
-              <a:gd name="adj" fmla="val 3429"/>
+              <a:gd name="adj" fmla="val 3529"/>
             </a:avLst>
           </a:prstGeom>
           <a:solidFill>
@@ -5271,23 +5775,16 @@
             <a:prstDash val="solid"/>
           </a:ln>
         </p:spPr>
-        <p:txBody>
-          <a:bodyPr/>
-          <a:lstStyle/>
-          <a:p>
-            <a:endParaRPr lang="en-US"/>
-          </a:p>
-        </p:txBody>
-      </p:sp>
-      <p:sp>
-        <p:nvSpPr>
-          <p:cNvPr id="18" name="Shape 16"/>
-          <p:cNvSpPr/>
-          <p:nvPr/>
-        </p:nvSpPr>
-        <p:spPr>
-          <a:xfrm>
-            <a:off x="6446520" y="4837176"/>
+      </p:sp>
+      <p:sp>
+        <p:nvSpPr>
+          <p:cNvPr id="19" name="Shape 17"/>
+          <p:cNvSpPr/>
+          <p:nvPr/>
+        </p:nvSpPr>
+        <p:spPr>
+          <a:xfrm>
+            <a:off x="6446520" y="4974336"/>
             <a:ext cx="128016" cy="128016"/>
           </a:xfrm>
           <a:prstGeom prst="rect">
@@ -5298,23 +5795,16 @@
           </a:solidFill>
           <a:ln/>
         </p:spPr>
-        <p:txBody>
-          <a:bodyPr/>
-          <a:lstStyle/>
-          <a:p>
-            <a:endParaRPr lang="en-US"/>
-          </a:p>
-        </p:txBody>
-      </p:sp>
-      <p:sp>
-        <p:nvSpPr>
-          <p:cNvPr id="19" name="Text 17"/>
-          <p:cNvSpPr/>
-          <p:nvPr/>
-        </p:nvSpPr>
-        <p:spPr>
-          <a:xfrm>
-            <a:off x="6675120" y="4727448"/>
+      </p:sp>
+      <p:sp>
+        <p:nvSpPr>
+          <p:cNvPr id="20" name="Text 18"/>
+          <p:cNvSpPr/>
+          <p:nvPr/>
+        </p:nvSpPr>
+        <p:spPr>
+          <a:xfrm>
+            <a:off x="6675120" y="4864608"/>
             <a:ext cx="4617720" cy="365760"/>
           </a:xfrm>
           <a:prstGeom prst="rect">
@@ -5327,7 +5817,7 @@
           <a:bodyPr wrap="square" rtlCol="0" anchor="ctr"/>
           <a:lstStyle/>
           <a:p>
-            <a:pPr marL="0" indent="0">
+            <a:pPr indent="0" marL="0">
               <a:buNone/>
             </a:pPr>
             <a:r>
@@ -5347,13 +5837,13 @@
       </p:sp>
       <p:sp>
         <p:nvSpPr>
-          <p:cNvPr id="20" name="Text 18"/>
-          <p:cNvSpPr/>
-          <p:nvPr/>
-        </p:nvSpPr>
-        <p:spPr>
-          <a:xfrm>
-            <a:off x="6446520" y="5184648"/>
+          <p:cNvPr id="21" name="Text 19"/>
+          <p:cNvSpPr/>
+          <p:nvPr/>
+        </p:nvSpPr>
+        <p:spPr>
+          <a:xfrm>
+            <a:off x="6446520" y="5321808"/>
             <a:ext cx="4800600" cy="822960"/>
           </a:xfrm>
           <a:prstGeom prst="rect">
@@ -5366,7 +5856,7 @@
           <a:bodyPr wrap="square" rtlCol="0" anchor="t"/>
           <a:lstStyle/>
           <a:p>
-            <a:pPr marL="0" indent="0">
+            <a:pPr indent="0" marL="0">
               <a:lnSpc>
                 <a:spcPct val="115000"/>
               </a:lnSpc>
@@ -5403,7 +5893,6 @@
         <a:solidFill>
           <a:srgbClr val="F4F4F2"/>
         </a:solidFill>
-        <a:effectLst/>
       </p:bgPr>
     </p:bg>
     <p:spTree>
@@ -5441,7 +5930,7 @@
           <a:bodyPr wrap="square" rtlCol="0" anchor="ctr"/>
           <a:lstStyle/>
           <a:p>
-            <a:pPr marL="0" indent="0">
+            <a:pPr indent="0" marL="0">
               <a:buNone/>
             </a:pPr>
             <a:r>
@@ -5480,7 +5969,7 @@
           <a:bodyPr wrap="square" rtlCol="0" anchor="ctr"/>
           <a:lstStyle/>
           <a:p>
-            <a:pPr marL="0" indent="0">
+            <a:pPr indent="0" marL="0">
               <a:buNone/>
             </a:pPr>
             <a:r>
@@ -5500,14 +5989,14 @@
       </p:sp>
       <p:pic>
         <p:nvPicPr>
-          <p:cNvPr id="4" name="Image 0" descr="/sessions/eager-charming-feynman/mnt/MiniProject/docs/figures/pipeline_stages.png"/>
+          <p:cNvPr id="4" name="Image 0" descr="/sessions/eager-charming-feynman/mnt/MiniProject/docs/figures/pipeline_stages.png">    </p:cNvPr>
           <p:cNvPicPr>
             <a:picLocks noChangeAspect="1"/>
           </p:cNvPicPr>
           <p:nvPr/>
         </p:nvPicPr>
         <p:blipFill>
-          <a:blip r:embed="rId3"/>
+          <a:blip r:embed="rId1"/>
           <a:stretch>
             <a:fillRect/>
           </a:stretch>
@@ -5543,7 +6032,7 @@
           <a:bodyPr wrap="square" rtlCol="0" anchor="ctr"/>
           <a:lstStyle/>
           <a:p>
-            <a:pPr marL="0" indent="0" algn="ctr">
+            <a:pPr algn="ctr" indent="0" marL="0">
               <a:buNone/>
             </a:pPr>
             <a:r>
@@ -5582,7 +6071,7 @@
           <a:bodyPr wrap="square" rtlCol="0" anchor="ctr"/>
           <a:lstStyle/>
           <a:p>
-            <a:pPr marL="0" indent="0" algn="ctr">
+            <a:pPr algn="ctr" indent="0" marL="0">
               <a:buNone/>
             </a:pPr>
             <a:r>
@@ -5616,7 +6105,6 @@
         <a:solidFill>
           <a:srgbClr val="F4F4F2"/>
         </a:solidFill>
-        <a:effectLst/>
       </p:bgPr>
     </p:bg>
     <p:spTree>
@@ -5654,7 +6142,7 @@
           <a:bodyPr wrap="square" rtlCol="0" anchor="ctr"/>
           <a:lstStyle/>
           <a:p>
-            <a:pPr marL="0" indent="0">
+            <a:pPr indent="0" marL="0">
               <a:buNone/>
             </a:pPr>
             <a:r>
@@ -5698,20 +6186,13 @@
             <a:prstDash val="solid"/>
           </a:ln>
           <a:effectLst>
-            <a:outerShdw blurRad="76200" dist="25400" dir="5400000" algn="bl" rotWithShape="0">
+            <a:outerShdw sx="100000" sy="100000" kx="0" ky="0" algn="bl" rotWithShape="0" blurRad="76200" dist="25400" dir="5400000">
               <a:srgbClr val="BBBBBB">
                 <a:alpha val="45000"/>
               </a:srgbClr>
             </a:outerShdw>
           </a:effectLst>
         </p:spPr>
-        <p:txBody>
-          <a:bodyPr/>
-          <a:lstStyle/>
-          <a:p>
-            <a:endParaRPr lang="en-US"/>
-          </a:p>
-        </p:txBody>
       </p:sp>
       <p:sp>
         <p:nvSpPr>
@@ -5732,13 +6213,6 @@
           </a:solidFill>
           <a:ln/>
         </p:spPr>
-        <p:txBody>
-          <a:bodyPr/>
-          <a:lstStyle/>
-          <a:p>
-            <a:endParaRPr lang="en-US"/>
-          </a:p>
-        </p:txBody>
       </p:sp>
       <p:sp>
         <p:nvSpPr>
@@ -5761,7 +6235,7 @@
           <a:bodyPr wrap="square" rtlCol="0" anchor="ctr"/>
           <a:lstStyle/>
           <a:p>
-            <a:pPr marL="0" indent="0" algn="ctr">
+            <a:pPr algn="ctr" indent="0" marL="0">
               <a:buNone/>
             </a:pPr>
             <a:r>
@@ -5800,7 +6274,7 @@
           <a:bodyPr wrap="square" rtlCol="0" anchor="ctr"/>
           <a:lstStyle/>
           <a:p>
-            <a:pPr marL="0" indent="0" algn="ctr">
+            <a:pPr algn="ctr" indent="0" marL="0">
               <a:buNone/>
             </a:pPr>
             <a:r>
@@ -5839,7 +6313,7 @@
           <a:bodyPr wrap="square" rtlCol="0" anchor="t"/>
           <a:lstStyle/>
           <a:p>
-            <a:pPr marL="0" indent="0" algn="ctr">
+            <a:pPr algn="ctr" indent="0" marL="0">
               <a:lnSpc>
                 <a:spcPct val="120000"/>
               </a:lnSpc>
@@ -5879,13 +6353,6 @@
           </a:solidFill>
           <a:ln/>
         </p:spPr>
-        <p:txBody>
-          <a:bodyPr/>
-          <a:lstStyle/>
-          <a:p>
-            <a:endParaRPr lang="en-US"/>
-          </a:p>
-        </p:txBody>
       </p:sp>
       <p:sp>
         <p:nvSpPr>
@@ -5913,20 +6380,13 @@
             <a:prstDash val="solid"/>
           </a:ln>
           <a:effectLst>
-            <a:outerShdw blurRad="76200" dist="25400" dir="5400000" algn="bl" rotWithShape="0">
+            <a:outerShdw sx="100000" sy="100000" kx="0" ky="0" algn="bl" rotWithShape="0" blurRad="76200" dist="25400" dir="5400000">
               <a:srgbClr val="BBBBBB">
                 <a:alpha val="45000"/>
               </a:srgbClr>
             </a:outerShdw>
           </a:effectLst>
         </p:spPr>
-        <p:txBody>
-          <a:bodyPr/>
-          <a:lstStyle/>
-          <a:p>
-            <a:endParaRPr lang="en-US"/>
-          </a:p>
-        </p:txBody>
       </p:sp>
       <p:sp>
         <p:nvSpPr>
@@ -5947,13 +6407,6 @@
           </a:solidFill>
           <a:ln/>
         </p:spPr>
-        <p:txBody>
-          <a:bodyPr/>
-          <a:lstStyle/>
-          <a:p>
-            <a:endParaRPr lang="en-US"/>
-          </a:p>
-        </p:txBody>
       </p:sp>
       <p:sp>
         <p:nvSpPr>
@@ -5976,7 +6429,7 @@
           <a:bodyPr wrap="square" rtlCol="0" anchor="ctr"/>
           <a:lstStyle/>
           <a:p>
-            <a:pPr marL="0" indent="0" algn="ctr">
+            <a:pPr algn="ctr" indent="0" marL="0">
               <a:buNone/>
             </a:pPr>
             <a:r>
@@ -6015,7 +6468,7 @@
           <a:bodyPr wrap="square" rtlCol="0" anchor="ctr"/>
           <a:lstStyle/>
           <a:p>
-            <a:pPr marL="0" indent="0" algn="ctr">
+            <a:pPr algn="ctr" indent="0" marL="0">
               <a:buNone/>
             </a:pPr>
             <a:r>
@@ -6054,7 +6507,7 @@
           <a:bodyPr wrap="square" rtlCol="0" anchor="t"/>
           <a:lstStyle/>
           <a:p>
-            <a:pPr marL="0" indent="0" algn="ctr">
+            <a:pPr algn="ctr" indent="0" marL="0">
               <a:lnSpc>
                 <a:spcPct val="120000"/>
               </a:lnSpc>
@@ -6094,13 +6547,6 @@
           </a:solidFill>
           <a:ln/>
         </p:spPr>
-        <p:txBody>
-          <a:bodyPr/>
-          <a:lstStyle/>
-          <a:p>
-            <a:endParaRPr lang="en-US"/>
-          </a:p>
-        </p:txBody>
       </p:sp>
       <p:sp>
         <p:nvSpPr>
@@ -6128,20 +6574,13 @@
             <a:prstDash val="solid"/>
           </a:ln>
           <a:effectLst>
-            <a:outerShdw blurRad="76200" dist="25400" dir="5400000" algn="bl" rotWithShape="0">
+            <a:outerShdw sx="100000" sy="100000" kx="0" ky="0" algn="bl" rotWithShape="0" blurRad="76200" dist="25400" dir="5400000">
               <a:srgbClr val="BBBBBB">
                 <a:alpha val="45000"/>
               </a:srgbClr>
             </a:outerShdw>
           </a:effectLst>
         </p:spPr>
-        <p:txBody>
-          <a:bodyPr/>
-          <a:lstStyle/>
-          <a:p>
-            <a:endParaRPr lang="en-US"/>
-          </a:p>
-        </p:txBody>
       </p:sp>
       <p:sp>
         <p:nvSpPr>
@@ -6162,13 +6601,6 @@
           </a:solidFill>
           <a:ln/>
         </p:spPr>
-        <p:txBody>
-          <a:bodyPr/>
-          <a:lstStyle/>
-          <a:p>
-            <a:endParaRPr lang="en-US"/>
-          </a:p>
-        </p:txBody>
       </p:sp>
       <p:sp>
         <p:nvSpPr>
@@ -6191,7 +6623,7 @@
           <a:bodyPr wrap="square" rtlCol="0" anchor="ctr"/>
           <a:lstStyle/>
           <a:p>
-            <a:pPr marL="0" indent="0" algn="ctr">
+            <a:pPr algn="ctr" indent="0" marL="0">
               <a:buNone/>
             </a:pPr>
             <a:r>
@@ -6230,7 +6662,7 @@
           <a:bodyPr wrap="square" rtlCol="0" anchor="ctr"/>
           <a:lstStyle/>
           <a:p>
-            <a:pPr marL="0" indent="0" algn="ctr">
+            <a:pPr algn="ctr" indent="0" marL="0">
               <a:buNone/>
             </a:pPr>
             <a:r>
@@ -6269,7 +6701,7 @@
           <a:bodyPr wrap="square" rtlCol="0" anchor="t"/>
           <a:lstStyle/>
           <a:p>
-            <a:pPr marL="0" indent="0" algn="ctr">
+            <a:pPr algn="ctr" indent="0" marL="0">
               <a:lnSpc>
                 <a:spcPct val="120000"/>
               </a:lnSpc>
@@ -6309,13 +6741,6 @@
           </a:solidFill>
           <a:ln/>
         </p:spPr>
-        <p:txBody>
-          <a:bodyPr/>
-          <a:lstStyle/>
-          <a:p>
-            <a:endParaRPr lang="en-US"/>
-          </a:p>
-        </p:txBody>
       </p:sp>
       <p:sp>
         <p:nvSpPr>
@@ -6343,20 +6768,13 @@
             <a:prstDash val="solid"/>
           </a:ln>
           <a:effectLst>
-            <a:outerShdw blurRad="76200" dist="25400" dir="5400000" algn="bl" rotWithShape="0">
+            <a:outerShdw sx="100000" sy="100000" kx="0" ky="0" algn="bl" rotWithShape="0" blurRad="76200" dist="25400" dir="5400000">
               <a:srgbClr val="BBBBBB">
                 <a:alpha val="45000"/>
               </a:srgbClr>
             </a:outerShdw>
           </a:effectLst>
         </p:spPr>
-        <p:txBody>
-          <a:bodyPr/>
-          <a:lstStyle/>
-          <a:p>
-            <a:endParaRPr lang="en-US"/>
-          </a:p>
-        </p:txBody>
       </p:sp>
       <p:sp>
         <p:nvSpPr>
@@ -6377,13 +6795,6 @@
           </a:solidFill>
           <a:ln/>
         </p:spPr>
-        <p:txBody>
-          <a:bodyPr/>
-          <a:lstStyle/>
-          <a:p>
-            <a:endParaRPr lang="en-US"/>
-          </a:p>
-        </p:txBody>
       </p:sp>
       <p:sp>
         <p:nvSpPr>
@@ -6406,7 +6817,7 @@
           <a:bodyPr wrap="square" rtlCol="0" anchor="ctr"/>
           <a:lstStyle/>
           <a:p>
-            <a:pPr marL="0" indent="0" algn="ctr">
+            <a:pPr algn="ctr" indent="0" marL="0">
               <a:buNone/>
             </a:pPr>
             <a:r>
@@ -6445,7 +6856,7 @@
           <a:bodyPr wrap="square" rtlCol="0" anchor="ctr"/>
           <a:lstStyle/>
           <a:p>
-            <a:pPr marL="0" indent="0" algn="ctr">
+            <a:pPr algn="ctr" indent="0" marL="0">
               <a:buNone/>
             </a:pPr>
             <a:r>
@@ -6484,7 +6895,7 @@
           <a:bodyPr wrap="square" rtlCol="0" anchor="t"/>
           <a:lstStyle/>
           <a:p>
-            <a:pPr marL="0" indent="0" algn="ctr">
+            <a:pPr algn="ctr" indent="0" marL="0">
               <a:lnSpc>
                 <a:spcPct val="120000"/>
               </a:lnSpc>
@@ -6526,7 +6937,7 @@
           <a:bodyPr wrap="square" rtlCol="0" anchor="ctr"/>
           <a:lstStyle/>
           <a:p>
-            <a:pPr marL="0" indent="0" algn="ctr">
+            <a:pPr algn="ctr" indent="0" marL="0">
               <a:buNone/>
             </a:pPr>
             <a:r>
@@ -6560,7 +6971,6 @@
         <a:solidFill>
           <a:srgbClr val="F4F4F2"/>
         </a:solidFill>
-        <a:effectLst/>
       </p:bgPr>
     </p:bg>
     <p:spTree>
@@ -6598,7 +7008,7 @@
           <a:bodyPr wrap="square" rtlCol="0" anchor="ctr"/>
           <a:lstStyle/>
           <a:p>
-            <a:pPr marL="0" indent="0">
+            <a:pPr indent="0" marL="0">
               <a:buNone/>
             </a:pPr>
             <a:r>
@@ -6637,7 +7047,7 @@
           <a:bodyPr wrap="square" rtlCol="0" anchor="ctr"/>
           <a:lstStyle/>
           <a:p>
-            <a:pPr marL="0" indent="0">
+            <a:pPr indent="0" marL="0">
               <a:buNone/>
             </a:pPr>
             <a:r>
@@ -6681,13 +7091,6 @@
             <a:prstDash val="solid"/>
           </a:ln>
         </p:spPr>
-        <p:txBody>
-          <a:bodyPr/>
-          <a:lstStyle/>
-          <a:p>
-            <a:endParaRPr lang="en-US"/>
-          </a:p>
-        </p:txBody>
       </p:sp>
       <p:sp>
         <p:nvSpPr>
@@ -6708,13 +7111,6 @@
           </a:solidFill>
           <a:ln/>
         </p:spPr>
-        <p:txBody>
-          <a:bodyPr/>
-          <a:lstStyle/>
-          <a:p>
-            <a:endParaRPr lang="en-US"/>
-          </a:p>
-        </p:txBody>
       </p:sp>
       <p:sp>
         <p:nvSpPr>
@@ -6737,7 +7133,7 @@
           <a:bodyPr wrap="square" rtlCol="0" anchor="ctr"/>
           <a:lstStyle/>
           <a:p>
-            <a:pPr marL="0" indent="0" algn="ctr">
+            <a:pPr algn="ctr" indent="0" marL="0">
               <a:buNone/>
             </a:pPr>
             <a:r>
@@ -6776,7 +7172,7 @@
           <a:bodyPr wrap="square" rtlCol="0" anchor="ctr"/>
           <a:lstStyle/>
           <a:p>
-            <a:pPr marL="0" indent="0">
+            <a:pPr indent="0" marL="0">
               <a:lnSpc>
                 <a:spcPct val="115000"/>
               </a:lnSpc>
@@ -6794,6 +7190,12 @@
               <a:t>แยก train / held-out
 </a:t>
             </a:r>
+            <a:pPr indent="0" marL="0">
+              <a:lnSpc>
+                <a:spcPct val="115000"/>
+              </a:lnSpc>
+              <a:buNone/>
+            </a:pPr>
             <a:r>
               <a:rPr lang="en-US" sz="1400" dirty="0">
                 <a:solidFill>
@@ -6835,13 +7237,6 @@
             <a:prstDash val="solid"/>
           </a:ln>
         </p:spPr>
-        <p:txBody>
-          <a:bodyPr/>
-          <a:lstStyle/>
-          <a:p>
-            <a:endParaRPr lang="en-US"/>
-          </a:p>
-        </p:txBody>
       </p:sp>
       <p:sp>
         <p:nvSpPr>
@@ -6862,13 +7257,6 @@
           </a:solidFill>
           <a:ln/>
         </p:spPr>
-        <p:txBody>
-          <a:bodyPr/>
-          <a:lstStyle/>
-          <a:p>
-            <a:endParaRPr lang="en-US"/>
-          </a:p>
-        </p:txBody>
       </p:sp>
       <p:sp>
         <p:nvSpPr>
@@ -6891,7 +7279,7 @@
           <a:bodyPr wrap="square" rtlCol="0" anchor="ctr"/>
           <a:lstStyle/>
           <a:p>
-            <a:pPr marL="0" indent="0" algn="ctr">
+            <a:pPr algn="ctr" indent="0" marL="0">
               <a:buNone/>
             </a:pPr>
             <a:r>
@@ -6930,7 +7318,7 @@
           <a:bodyPr wrap="square" rtlCol="0" anchor="ctr"/>
           <a:lstStyle/>
           <a:p>
-            <a:pPr marL="0" indent="0">
+            <a:pPr indent="0" marL="0">
               <a:lnSpc>
                 <a:spcPct val="115000"/>
               </a:lnSpc>
@@ -6948,6 +7336,12 @@
               <a:t>เลือกที่ดีและนิ่ง
 </a:t>
             </a:r>
+            <a:pPr indent="0" marL="0">
+              <a:lnSpc>
+                <a:spcPct val="115000"/>
+              </a:lnSpc>
+              <a:buNone/>
+            </a:pPr>
             <a:r>
               <a:rPr lang="en-US" sz="1400" dirty="0">
                 <a:solidFill>
@@ -6989,13 +7383,6 @@
             <a:prstDash val="solid"/>
           </a:ln>
         </p:spPr>
-        <p:txBody>
-          <a:bodyPr/>
-          <a:lstStyle/>
-          <a:p>
-            <a:endParaRPr lang="en-US"/>
-          </a:p>
-        </p:txBody>
       </p:sp>
       <p:sp>
         <p:nvSpPr>
@@ -7016,13 +7403,6 @@
           </a:solidFill>
           <a:ln/>
         </p:spPr>
-        <p:txBody>
-          <a:bodyPr/>
-          <a:lstStyle/>
-          <a:p>
-            <a:endParaRPr lang="en-US"/>
-          </a:p>
-        </p:txBody>
       </p:sp>
       <p:sp>
         <p:nvSpPr>
@@ -7045,7 +7425,7 @@
           <a:bodyPr wrap="square" rtlCol="0" anchor="ctr"/>
           <a:lstStyle/>
           <a:p>
-            <a:pPr marL="0" indent="0" algn="ctr">
+            <a:pPr algn="ctr" indent="0" marL="0">
               <a:buNone/>
             </a:pPr>
             <a:r>
@@ -7084,7 +7464,7 @@
           <a:bodyPr wrap="square" rtlCol="0" anchor="ctr"/>
           <a:lstStyle/>
           <a:p>
-            <a:pPr marL="0" indent="0">
+            <a:pPr indent="0" marL="0">
               <a:lnSpc>
                 <a:spcPct val="115000"/>
               </a:lnSpc>
@@ -7102,6 +7482,12 @@
               <a:t>ไม่ใช้ Accuracy
 </a:t>
             </a:r>
+            <a:pPr indent="0" marL="0">
+              <a:lnSpc>
+                <a:spcPct val="115000"/>
+              </a:lnSpc>
+              <a:buNone/>
+            </a:pPr>
             <a:r>
               <a:rPr lang="en-US" sz="1400" dirty="0">
                 <a:solidFill>
@@ -7133,7 +7519,6 @@
         <a:solidFill>
           <a:srgbClr val="F4F4F2"/>
         </a:solidFill>
-        <a:effectLst/>
       </p:bgPr>
     </p:bg>
     <p:spTree>
@@ -7152,19 +7537,263 @@
       </p:grpSpPr>
       <p:sp>
         <p:nvSpPr>
-          <p:cNvPr id="28" name="Shape 14">
-            <a:extLst>
-              <a:ext uri="{FF2B5EF4-FFF2-40B4-BE49-F238E27FC236}">
-                <a16:creationId xmlns:a16="http://schemas.microsoft.com/office/drawing/2014/main" id="{4E08B674-E127-18B1-DD92-5C442939B885}"/>
-              </a:ext>
-            </a:extLst>
-          </p:cNvPr>
-          <p:cNvSpPr/>
-          <p:nvPr/>
-        </p:nvSpPr>
-        <p:spPr>
-          <a:xfrm>
-            <a:off x="6400800" y="5120640"/>
+          <p:cNvPr id="2" name="Text 0"/>
+          <p:cNvSpPr/>
+          <p:nvPr/>
+        </p:nvSpPr>
+        <p:spPr>
+          <a:xfrm>
+            <a:off x="640080" y="457200"/>
+            <a:ext cx="10881360" cy="731520"/>
+          </a:xfrm>
+          <a:prstGeom prst="rect">
+            <a:avLst/>
+          </a:prstGeom>
+          <a:noFill/>
+          <a:ln/>
+        </p:spPr>
+        <p:txBody>
+          <a:bodyPr wrap="square" rtlCol="0" anchor="ctr"/>
+          <a:lstStyle/>
+          <a:p>
+            <a:pPr indent="0" marL="0">
+              <a:buNone/>
+            </a:pPr>
+            <a:r>
+              <a:rPr lang="en-US" sz="3200" b="1" dirty="0">
+                <a:solidFill>
+                  <a:srgbClr val="222629"/>
+                </a:solidFill>
+                <a:latin typeface="Leelawadee UI" pitchFamily="34" charset="0"/>
+                <a:ea typeface="Leelawadee UI" pitchFamily="34" charset="-122"/>
+                <a:cs typeface="Leelawadee UI" pitchFamily="34" charset="-120"/>
+              </a:rPr>
+              <a:t>ตัวชี้วัดที่ใช้วัดผล</a:t>
+            </a:r>
+            <a:endParaRPr lang="en-US" sz="3200" dirty="0"/>
+          </a:p>
+        </p:txBody>
+      </p:sp>
+      <p:sp>
+        <p:nvSpPr>
+          <p:cNvPr id="3" name="Text 1"/>
+          <p:cNvSpPr/>
+          <p:nvPr/>
+        </p:nvSpPr>
+        <p:spPr>
+          <a:xfrm>
+            <a:off x="658368" y="1170432"/>
+            <a:ext cx="10881360" cy="457200"/>
+          </a:xfrm>
+          <a:prstGeom prst="rect">
+            <a:avLst/>
+          </a:prstGeom>
+          <a:noFill/>
+          <a:ln/>
+        </p:spPr>
+        <p:txBody>
+          <a:bodyPr wrap="square" rtlCol="0" anchor="ctr"/>
+          <a:lstStyle/>
+          <a:p>
+            <a:pPr indent="0" marL="0">
+              <a:buNone/>
+            </a:pPr>
+            <a:r>
+              <a:rPr lang="en-US" sz="1500" i="1" dirty="0">
+                <a:solidFill>
+                  <a:srgbClr val="5B6770"/>
+                </a:solidFill>
+                <a:latin typeface="Leelawadee UI" pitchFamily="34" charset="0"/>
+                <a:ea typeface="Leelawadee UI" pitchFamily="34" charset="-122"/>
+                <a:cs typeface="Leelawadee UI" pitchFamily="34" charset="-120"/>
+              </a:rPr>
+              <a:t>วัดทีละพิกเซล เทียบ mask ที่ทายกับภาพเฉลย</a:t>
+            </a:r>
+            <a:endParaRPr lang="en-US" sz="1500" dirty="0"/>
+          </a:p>
+        </p:txBody>
+      </p:sp>
+      <p:pic>
+        <p:nvPicPr>
+          <p:cNvPr id="4" name="Image 0" descr="/sessions/eager-charming-feynman/mnt/MiniProject/docs/figures/metric_diagram.png">    </p:cNvPr>
+          <p:cNvPicPr>
+            <a:picLocks noChangeAspect="1"/>
+          </p:cNvPicPr>
+          <p:nvPr/>
+        </p:nvPicPr>
+        <p:blipFill>
+          <a:blip r:embed="rId1"/>
+          <a:stretch>
+            <a:fillRect/>
+          </a:stretch>
+        </p:blipFill>
+        <p:spPr>
+          <a:xfrm>
+            <a:off x="484757" y="1737360"/>
+            <a:ext cx="5614165" cy="3291840"/>
+          </a:xfrm>
+          <a:prstGeom prst="rect">
+            <a:avLst/>
+          </a:prstGeom>
+        </p:spPr>
+      </p:pic>
+      <p:sp>
+        <p:nvSpPr>
+          <p:cNvPr id="5" name="Text 2"/>
+          <p:cNvSpPr/>
+          <p:nvPr/>
+        </p:nvSpPr>
+        <p:spPr>
+          <a:xfrm>
+            <a:off x="457200" y="5029200"/>
+            <a:ext cx="5669280" cy="365760"/>
+          </a:xfrm>
+          <a:prstGeom prst="rect">
+            <a:avLst/>
+          </a:prstGeom>
+          <a:noFill/>
+          <a:ln/>
+        </p:spPr>
+        <p:txBody>
+          <a:bodyPr wrap="square" rtlCol="0" anchor="ctr"/>
+          <a:lstStyle/>
+          <a:p>
+            <a:pPr algn="ctr" indent="0" marL="0">
+              <a:buNone/>
+            </a:pPr>
+            <a:r>
+              <a:rPr lang="en-US" sz="1400" b="1" dirty="0">
+                <a:solidFill>
+                  <a:srgbClr val="1E5A3A"/>
+                </a:solidFill>
+                <a:latin typeface="Leelawadee UI" pitchFamily="34" charset="0"/>
+                <a:ea typeface="Leelawadee UI" pitchFamily="34" charset="-122"/>
+                <a:cs typeface="Leelawadee UI" pitchFamily="34" charset="-120"/>
+              </a:rPr>
+              <a:t>TP</a:t>
+            </a:r>
+            <a:pPr algn="ctr" indent="0" marL="0">
+              <a:buNone/>
+            </a:pPr>
+            <a:r>
+              <a:rPr lang="en-US" sz="1400" dirty="0">
+                <a:solidFill>
+                  <a:srgbClr val="5B6770"/>
+                </a:solidFill>
+                <a:latin typeface="Leelawadee UI" pitchFamily="34" charset="0"/>
+                <a:ea typeface="Leelawadee UI" pitchFamily="34" charset="-122"/>
+                <a:cs typeface="Leelawadee UI" pitchFamily="34" charset="-120"/>
+              </a:rPr>
+              <a:t> ถูก   </a:t>
+            </a:r>
+            <a:pPr algn="ctr" indent="0" marL="0">
+              <a:buNone/>
+            </a:pPr>
+            <a:r>
+              <a:rPr lang="en-US" sz="1400" b="1" dirty="0">
+                <a:solidFill>
+                  <a:srgbClr val="B5670F"/>
+                </a:solidFill>
+                <a:latin typeface="Leelawadee UI" pitchFamily="34" charset="0"/>
+                <a:ea typeface="Leelawadee UI" pitchFamily="34" charset="-122"/>
+                <a:cs typeface="Leelawadee UI" pitchFamily="34" charset="-120"/>
+              </a:rPr>
+              <a:t>FP</a:t>
+            </a:r>
+            <a:pPr algn="ctr" indent="0" marL="0">
+              <a:buNone/>
+            </a:pPr>
+            <a:r>
+              <a:rPr lang="en-US" sz="1400" dirty="0">
+                <a:solidFill>
+                  <a:srgbClr val="5B6770"/>
+                </a:solidFill>
+                <a:latin typeface="Leelawadee UI" pitchFamily="34" charset="0"/>
+                <a:ea typeface="Leelawadee UI" pitchFamily="34" charset="-122"/>
+                <a:cs typeface="Leelawadee UI" pitchFamily="34" charset="-120"/>
+              </a:rPr>
+              <a:t> ทายเกิน   </a:t>
+            </a:r>
+            <a:pPr algn="ctr" indent="0" marL="0">
+              <a:buNone/>
+            </a:pPr>
+            <a:r>
+              <a:rPr lang="en-US" sz="1400" b="1" dirty="0">
+                <a:solidFill>
+                  <a:srgbClr val="2E5E8E"/>
+                </a:solidFill>
+                <a:latin typeface="Leelawadee UI" pitchFamily="34" charset="0"/>
+                <a:ea typeface="Leelawadee UI" pitchFamily="34" charset="-122"/>
+                <a:cs typeface="Leelawadee UI" pitchFamily="34" charset="-120"/>
+              </a:rPr>
+              <a:t>FN</a:t>
+            </a:r>
+            <a:pPr algn="ctr" indent="0" marL="0">
+              <a:buNone/>
+            </a:pPr>
+            <a:r>
+              <a:rPr lang="en-US" sz="1400" dirty="0">
+                <a:solidFill>
+                  <a:srgbClr val="5B6770"/>
+                </a:solidFill>
+                <a:latin typeface="Leelawadee UI" pitchFamily="34" charset="0"/>
+                <a:ea typeface="Leelawadee UI" pitchFamily="34" charset="-122"/>
+                <a:cs typeface="Leelawadee UI" pitchFamily="34" charset="-120"/>
+              </a:rPr>
+              <a:t> พลาด</a:t>
+            </a:r>
+            <a:endParaRPr lang="en-US" sz="1400" dirty="0"/>
+          </a:p>
+        </p:txBody>
+      </p:sp>
+      <p:sp>
+        <p:nvSpPr>
+          <p:cNvPr id="6" name="Text 3"/>
+          <p:cNvSpPr/>
+          <p:nvPr/>
+        </p:nvSpPr>
+        <p:spPr>
+          <a:xfrm>
+            <a:off x="457200" y="5440680"/>
+            <a:ext cx="5669280" cy="365760"/>
+          </a:xfrm>
+          <a:prstGeom prst="rect">
+            <a:avLst/>
+          </a:prstGeom>
+          <a:noFill/>
+          <a:ln/>
+        </p:spPr>
+        <p:txBody>
+          <a:bodyPr wrap="square" rtlCol="0" anchor="ctr"/>
+          <a:lstStyle/>
+          <a:p>
+            <a:pPr algn="ctr" indent="0" marL="0">
+              <a:buNone/>
+            </a:pPr>
+            <a:r>
+              <a:rPr lang="en-US" sz="1200" i="1" dirty="0">
+                <a:solidFill>
+                  <a:srgbClr val="5B6770"/>
+                </a:solidFill>
+                <a:latin typeface="Leelawadee UI" pitchFamily="34" charset="0"/>
+                <a:ea typeface="Leelawadee UI" pitchFamily="34" charset="-122"/>
+                <a:cs typeface="Leelawadee UI" pitchFamily="34" charset="-120"/>
+              </a:rPr>
+              <a:t>จากงานจริง 118 ภาพ:  TP 180,802 · FP 171,802 · FN 233,636</a:t>
+            </a:r>
+            <a:endParaRPr lang="en-US" sz="1200" dirty="0"/>
+          </a:p>
+        </p:txBody>
+      </p:sp>
+      <p:sp>
+        <p:nvSpPr>
+          <p:cNvPr id="7" name="Shape 4"/>
+          <p:cNvSpPr/>
+          <p:nvPr/>
+        </p:nvSpPr>
+        <p:spPr>
+          <a:xfrm>
+            <a:off x="6400800" y="1737360"/>
             <a:ext cx="5120640" cy="1024128"/>
           </a:xfrm>
           <a:prstGeom prst="roundRect">
@@ -7182,24 +7811,17 @@
             <a:prstDash val="solid"/>
           </a:ln>
         </p:spPr>
-        <p:txBody>
-          <a:bodyPr/>
-          <a:lstStyle/>
-          <a:p>
-            <a:endParaRPr lang="en-US"/>
-          </a:p>
-        </p:txBody>
-      </p:sp>
-      <p:sp>
-        <p:nvSpPr>
-          <p:cNvPr id="2" name="Text 0"/>
-          <p:cNvSpPr/>
-          <p:nvPr/>
-        </p:nvSpPr>
-        <p:spPr>
-          <a:xfrm>
-            <a:off x="640080" y="457200"/>
-            <a:ext cx="10881360" cy="731520"/>
+      </p:sp>
+      <p:sp>
+        <p:nvSpPr>
+          <p:cNvPr id="8" name="Text 5"/>
+          <p:cNvSpPr/>
+          <p:nvPr/>
+        </p:nvSpPr>
+        <p:spPr>
+          <a:xfrm>
+            <a:off x="6629400" y="1847088"/>
+            <a:ext cx="2286000" cy="365760"/>
           </a:xfrm>
           <a:prstGeom prst="rect">
             <a:avLst/>
@@ -7211,11 +7833,11 @@
           <a:bodyPr wrap="square" rtlCol="0" anchor="ctr"/>
           <a:lstStyle/>
           <a:p>
-            <a:pPr marL="0" indent="0">
+            <a:pPr indent="0" marL="0">
               <a:buNone/>
             </a:pPr>
             <a:r>
-              <a:rPr lang="en-US" sz="3200" b="1" dirty="0">
+              <a:rPr lang="en-US" sz="1700" b="1" dirty="0">
                 <a:solidFill>
                   <a:srgbClr val="222629"/>
                 </a:solidFill>
@@ -7223,22 +7845,22 @@
                 <a:ea typeface="Leelawadee UI" pitchFamily="34" charset="-122"/>
                 <a:cs typeface="Leelawadee UI" pitchFamily="34" charset="-120"/>
               </a:rPr>
-              <a:t>ตัวชี้วัดที่ใช้วัดผล</a:t>
-            </a:r>
-            <a:endParaRPr lang="en-US" sz="3200" dirty="0"/>
-          </a:p>
-        </p:txBody>
-      </p:sp>
-      <p:sp>
-        <p:nvSpPr>
-          <p:cNvPr id="3" name="Text 1"/>
-          <p:cNvSpPr/>
-          <p:nvPr/>
-        </p:nvSpPr>
-        <p:spPr>
-          <a:xfrm>
-            <a:off x="658368" y="1170432"/>
-            <a:ext cx="10881360" cy="457200"/>
+              <a:t>Precision</a:t>
+            </a:r>
+            <a:endParaRPr lang="en-US" sz="1700" dirty="0"/>
+          </a:p>
+        </p:txBody>
+      </p:sp>
+      <p:sp>
+        <p:nvSpPr>
+          <p:cNvPr id="9" name="Text 6"/>
+          <p:cNvSpPr/>
+          <p:nvPr/>
+        </p:nvSpPr>
+        <p:spPr>
+          <a:xfrm>
+            <a:off x="6629400" y="2240280"/>
+            <a:ext cx="2834640" cy="365760"/>
           </a:xfrm>
           <a:prstGeom prst="rect">
             <a:avLst/>
@@ -7250,11 +7872,89 @@
           <a:bodyPr wrap="square" rtlCol="0" anchor="ctr"/>
           <a:lstStyle/>
           <a:p>
-            <a:pPr marL="0" indent="0">
+            <a:pPr indent="0" marL="0">
               <a:buNone/>
             </a:pPr>
             <a:r>
-              <a:rPr lang="en-US" sz="1500" i="1" dirty="0">
+              <a:rPr lang="en-US" sz="1300" dirty="0">
+                <a:solidFill>
+                  <a:srgbClr val="5B6770"/>
+                </a:solidFill>
+                <a:latin typeface="Consolas" pitchFamily="34" charset="0"/>
+                <a:ea typeface="Consolas" pitchFamily="34" charset="-122"/>
+                <a:cs typeface="Consolas" pitchFamily="34" charset="-120"/>
+              </a:rPr>
+              <a:t>TP / (TP + FP)</a:t>
+            </a:r>
+            <a:endParaRPr lang="en-US" sz="1300" dirty="0"/>
+          </a:p>
+        </p:txBody>
+      </p:sp>
+      <p:sp>
+        <p:nvSpPr>
+          <p:cNvPr id="10" name="Text 7"/>
+          <p:cNvSpPr/>
+          <p:nvPr/>
+        </p:nvSpPr>
+        <p:spPr>
+          <a:xfrm>
+            <a:off x="9326880" y="1828800"/>
+            <a:ext cx="2011680" cy="502920"/>
+          </a:xfrm>
+          <a:prstGeom prst="rect">
+            <a:avLst/>
+          </a:prstGeom>
+          <a:noFill/>
+          <a:ln/>
+        </p:spPr>
+        <p:txBody>
+          <a:bodyPr wrap="square" rtlCol="0" anchor="ctr"/>
+          <a:lstStyle/>
+          <a:p>
+            <a:pPr algn="r" indent="0" marL="0">
+              <a:buNone/>
+            </a:pPr>
+            <a:r>
+              <a:rPr lang="en-US" sz="2600" b="1" dirty="0">
+                <a:solidFill>
+                  <a:srgbClr val="222629"/>
+                </a:solidFill>
+                <a:latin typeface="Leelawadee UI" pitchFamily="34" charset="0"/>
+                <a:ea typeface="Leelawadee UI" pitchFamily="34" charset="-122"/>
+                <a:cs typeface="Leelawadee UI" pitchFamily="34" charset="-120"/>
+              </a:rPr>
+              <a:t>0.53</a:t>
+            </a:r>
+            <a:endParaRPr lang="en-US" sz="2600" dirty="0"/>
+          </a:p>
+        </p:txBody>
+      </p:sp>
+      <p:sp>
+        <p:nvSpPr>
+          <p:cNvPr id="11" name="Text 8"/>
+          <p:cNvSpPr/>
+          <p:nvPr/>
+        </p:nvSpPr>
+        <p:spPr>
+          <a:xfrm>
+            <a:off x="6629400" y="2395728"/>
+            <a:ext cx="4663440" cy="320040"/>
+          </a:xfrm>
+          <a:prstGeom prst="rect">
+            <a:avLst/>
+          </a:prstGeom>
+          <a:noFill/>
+          <a:ln/>
+        </p:spPr>
+        <p:txBody>
+          <a:bodyPr wrap="square" rtlCol="0" anchor="ctr"/>
+          <a:lstStyle/>
+          <a:p>
+            <a:pPr indent="0" marL="0">
+              <a:buNone/>
+            </a:pPr>
+            <a:r>
+              <a:rPr lang="en-US" sz="1200" dirty="0">
                 <a:solidFill>
                   <a:srgbClr val="5B6770"/>
                 </a:solidFill>
@@ -7262,164 +7962,7 @@
                 <a:ea typeface="Leelawadee UI" pitchFamily="34" charset="-122"/>
                 <a:cs typeface="Leelawadee UI" pitchFamily="34" charset="-120"/>
               </a:rPr>
-              <a:t>วัดทีละพิกเซล เทียบ mask ที่ทายกับภาพเฉลย</a:t>
-            </a:r>
-            <a:endParaRPr lang="en-US" sz="1500" dirty="0"/>
-          </a:p>
-        </p:txBody>
-      </p:sp>
-      <p:pic>
-        <p:nvPicPr>
-          <p:cNvPr id="4" name="Image 0" descr="/sessions/eager-charming-feynman/mnt/MiniProject/docs/figures/metric_diagram.png"/>
-          <p:cNvPicPr>
-            <a:picLocks noChangeAspect="1"/>
-          </p:cNvPicPr>
-          <p:nvPr/>
-        </p:nvPicPr>
-        <p:blipFill>
-          <a:blip r:embed="rId3"/>
-          <a:stretch>
-            <a:fillRect/>
-          </a:stretch>
-        </p:blipFill>
-        <p:spPr>
-          <a:xfrm>
-            <a:off x="484757" y="1737360"/>
-            <a:ext cx="5614165" cy="3291840"/>
-          </a:xfrm>
-          <a:prstGeom prst="rect">
-            <a:avLst/>
-          </a:prstGeom>
-        </p:spPr>
-      </p:pic>
-      <p:sp>
-        <p:nvSpPr>
-          <p:cNvPr id="5" name="Text 2"/>
-          <p:cNvSpPr/>
-          <p:nvPr/>
-        </p:nvSpPr>
-        <p:spPr>
-          <a:xfrm>
-            <a:off x="457200" y="5029200"/>
-            <a:ext cx="5669280" cy="365760"/>
-          </a:xfrm>
-          <a:prstGeom prst="rect">
-            <a:avLst/>
-          </a:prstGeom>
-          <a:noFill/>
-          <a:ln/>
-        </p:spPr>
-        <p:txBody>
-          <a:bodyPr wrap="square" rtlCol="0" anchor="ctr"/>
-          <a:lstStyle/>
-          <a:p>
-            <a:pPr marL="0" indent="0" algn="ctr">
-              <a:buNone/>
-            </a:pPr>
-            <a:r>
-              <a:rPr lang="en-US" sz="1400" b="1" dirty="0">
-                <a:solidFill>
-                  <a:srgbClr val="1E5A3A"/>
-                </a:solidFill>
-                <a:latin typeface="Leelawadee UI" pitchFamily="34" charset="0"/>
-                <a:ea typeface="Leelawadee UI" pitchFamily="34" charset="-122"/>
-                <a:cs typeface="Leelawadee UI" pitchFamily="34" charset="-120"/>
-              </a:rPr>
-              <a:t>TP</a:t>
-            </a:r>
-            <a:r>
-              <a:rPr lang="en-US" sz="1400" dirty="0">
-                <a:solidFill>
-                  <a:srgbClr val="5B6770"/>
-                </a:solidFill>
-                <a:latin typeface="Leelawadee UI" pitchFamily="34" charset="0"/>
-                <a:ea typeface="Leelawadee UI" pitchFamily="34" charset="-122"/>
-                <a:cs typeface="Leelawadee UI" pitchFamily="34" charset="-120"/>
-              </a:rPr>
-              <a:t> ถูก   </a:t>
-            </a:r>
-            <a:r>
-              <a:rPr lang="en-US" sz="1400" b="1" dirty="0">
-                <a:solidFill>
-                  <a:srgbClr val="B5670F"/>
-                </a:solidFill>
-                <a:latin typeface="Leelawadee UI" pitchFamily="34" charset="0"/>
-                <a:ea typeface="Leelawadee UI" pitchFamily="34" charset="-122"/>
-                <a:cs typeface="Leelawadee UI" pitchFamily="34" charset="-120"/>
-              </a:rPr>
-              <a:t>FP</a:t>
-            </a:r>
-            <a:r>
-              <a:rPr lang="en-US" sz="1400" dirty="0">
-                <a:solidFill>
-                  <a:srgbClr val="5B6770"/>
-                </a:solidFill>
-                <a:latin typeface="Leelawadee UI" pitchFamily="34" charset="0"/>
-                <a:ea typeface="Leelawadee UI" pitchFamily="34" charset="-122"/>
-                <a:cs typeface="Leelawadee UI" pitchFamily="34" charset="-120"/>
-              </a:rPr>
-              <a:t> ทายเกิน   </a:t>
-            </a:r>
-            <a:r>
-              <a:rPr lang="en-US" sz="1400" b="1" dirty="0">
-                <a:solidFill>
-                  <a:srgbClr val="2E5E8E"/>
-                </a:solidFill>
-                <a:latin typeface="Leelawadee UI" pitchFamily="34" charset="0"/>
-                <a:ea typeface="Leelawadee UI" pitchFamily="34" charset="-122"/>
-                <a:cs typeface="Leelawadee UI" pitchFamily="34" charset="-120"/>
-              </a:rPr>
-              <a:t>FN</a:t>
-            </a:r>
-            <a:r>
-              <a:rPr lang="en-US" sz="1400" dirty="0">
-                <a:solidFill>
-                  <a:srgbClr val="5B6770"/>
-                </a:solidFill>
-                <a:latin typeface="Leelawadee UI" pitchFamily="34" charset="0"/>
-                <a:ea typeface="Leelawadee UI" pitchFamily="34" charset="-122"/>
-                <a:cs typeface="Leelawadee UI" pitchFamily="34" charset="-120"/>
-              </a:rPr>
-              <a:t> พลาด</a:t>
-            </a:r>
-            <a:endParaRPr lang="en-US" sz="1400" dirty="0"/>
-          </a:p>
-        </p:txBody>
-      </p:sp>
-      <p:sp>
-        <p:nvSpPr>
-          <p:cNvPr id="6" name="Text 3"/>
-          <p:cNvSpPr/>
-          <p:nvPr/>
-        </p:nvSpPr>
-        <p:spPr>
-          <a:xfrm>
-            <a:off x="457200" y="5440680"/>
-            <a:ext cx="5669280" cy="365760"/>
-          </a:xfrm>
-          <a:prstGeom prst="rect">
-            <a:avLst/>
-          </a:prstGeom>
-          <a:noFill/>
-          <a:ln/>
-        </p:spPr>
-        <p:txBody>
-          <a:bodyPr wrap="square" rtlCol="0" anchor="ctr"/>
-          <a:lstStyle/>
-          <a:p>
-            <a:pPr marL="0" indent="0" algn="ctr">
-              <a:buNone/>
-            </a:pPr>
-            <a:r>
-              <a:rPr lang="en-US" sz="1200" i="1" dirty="0">
-                <a:solidFill>
-                  <a:srgbClr val="5B6770"/>
-                </a:solidFill>
-                <a:latin typeface="Leelawadee UI" pitchFamily="34" charset="0"/>
-                <a:ea typeface="Leelawadee UI" pitchFamily="34" charset="-122"/>
-                <a:cs typeface="Leelawadee UI" pitchFamily="34" charset="-120"/>
-              </a:rPr>
-              <a:t>จากงานจริง 118 ภาพ:  TP 180,802 · FP 171,802 · FN 233,636</a:t>
+              <a:t>ที่ทายว่ารอยร้าว ถูกจริงกี่ % (ลดเตือนลวง)</a:t>
             </a:r>
             <a:endParaRPr lang="en-US" sz="1200" dirty="0"/>
           </a:p>
@@ -7427,13 +7970,13 @@
       </p:sp>
       <p:sp>
         <p:nvSpPr>
-          <p:cNvPr id="7" name="Shape 4"/>
-          <p:cNvSpPr/>
-          <p:nvPr/>
-        </p:nvSpPr>
-        <p:spPr>
-          <a:xfrm>
-            <a:off x="6400800" y="1737360"/>
+          <p:cNvPr id="12" name="Shape 9"/>
+          <p:cNvSpPr/>
+          <p:nvPr/>
+        </p:nvSpPr>
+        <p:spPr>
+          <a:xfrm>
+            <a:off x="6400800" y="2862072"/>
             <a:ext cx="5120640" cy="1024128"/>
           </a:xfrm>
           <a:prstGeom prst="roundRect">
@@ -7451,23 +7994,16 @@
             <a:prstDash val="solid"/>
           </a:ln>
         </p:spPr>
-        <p:txBody>
-          <a:bodyPr/>
-          <a:lstStyle/>
-          <a:p>
-            <a:endParaRPr lang="en-US"/>
-          </a:p>
-        </p:txBody>
-      </p:sp>
-      <p:sp>
-        <p:nvSpPr>
-          <p:cNvPr id="8" name="Text 5"/>
-          <p:cNvSpPr/>
-          <p:nvPr/>
-        </p:nvSpPr>
-        <p:spPr>
-          <a:xfrm>
-            <a:off x="6629400" y="1847088"/>
+      </p:sp>
+      <p:sp>
+        <p:nvSpPr>
+          <p:cNvPr id="13" name="Text 10"/>
+          <p:cNvSpPr/>
+          <p:nvPr/>
+        </p:nvSpPr>
+        <p:spPr>
+          <a:xfrm>
+            <a:off x="6629400" y="2971800"/>
             <a:ext cx="2286000" cy="365760"/>
           </a:xfrm>
           <a:prstGeom prst="rect">
@@ -7480,7 +8016,7 @@
           <a:bodyPr wrap="square" rtlCol="0" anchor="ctr"/>
           <a:lstStyle/>
           <a:p>
-            <a:pPr marL="0" indent="0">
+            <a:pPr indent="0" marL="0">
               <a:buNone/>
             </a:pPr>
             <a:r>
@@ -7492,7 +8028,7 @@
                 <a:ea typeface="Leelawadee UI" pitchFamily="34" charset="-122"/>
                 <a:cs typeface="Leelawadee UI" pitchFamily="34" charset="-120"/>
               </a:rPr>
-              <a:t>Precision</a:t>
+              <a:t>Recall</a:t>
             </a:r>
             <a:endParaRPr lang="en-US" sz="1700" dirty="0"/>
           </a:p>
@@ -7500,13 +8036,13 @@
       </p:sp>
       <p:sp>
         <p:nvSpPr>
-          <p:cNvPr id="9" name="Text 6"/>
-          <p:cNvSpPr/>
-          <p:nvPr/>
-        </p:nvSpPr>
-        <p:spPr>
-          <a:xfrm>
-            <a:off x="6629400" y="2240280"/>
+          <p:cNvPr id="14" name="Text 11"/>
+          <p:cNvSpPr/>
+          <p:nvPr/>
+        </p:nvSpPr>
+        <p:spPr>
+          <a:xfrm>
+            <a:off x="6629400" y="3364992"/>
             <a:ext cx="2834640" cy="365760"/>
           </a:xfrm>
           <a:prstGeom prst="rect">
@@ -7519,7 +8055,7 @@
           <a:bodyPr wrap="square" rtlCol="0" anchor="ctr"/>
           <a:lstStyle/>
           <a:p>
-            <a:pPr marL="0" indent="0">
+            <a:pPr indent="0" marL="0">
               <a:buNone/>
             </a:pPr>
             <a:r>
@@ -7531,7 +8067,7 @@
                 <a:ea typeface="Consolas" pitchFamily="34" charset="-122"/>
                 <a:cs typeface="Consolas" pitchFamily="34" charset="-120"/>
               </a:rPr>
-              <a:t>TP / (TP + FP)</a:t>
+              <a:t>TP / (TP + FN)</a:t>
             </a:r>
             <a:endParaRPr lang="en-US" sz="1300" dirty="0"/>
           </a:p>
@@ -7539,13 +8075,13 @@
       </p:sp>
       <p:sp>
         <p:nvSpPr>
-          <p:cNvPr id="10" name="Text 7"/>
-          <p:cNvSpPr/>
-          <p:nvPr/>
-        </p:nvSpPr>
-        <p:spPr>
-          <a:xfrm>
-            <a:off x="9326880" y="1828800"/>
+          <p:cNvPr id="15" name="Text 12"/>
+          <p:cNvSpPr/>
+          <p:nvPr/>
+        </p:nvSpPr>
+        <p:spPr>
+          <a:xfrm>
+            <a:off x="9326880" y="2953512"/>
             <a:ext cx="2011680" cy="502920"/>
           </a:xfrm>
           <a:prstGeom prst="rect">
@@ -7558,7 +8094,7 @@
           <a:bodyPr wrap="square" rtlCol="0" anchor="ctr"/>
           <a:lstStyle/>
           <a:p>
-            <a:pPr marL="0" indent="0" algn="r">
+            <a:pPr algn="r" indent="0" marL="0">
               <a:buNone/>
             </a:pPr>
             <a:r>
@@ -7570,7 +8106,7 @@
                 <a:ea typeface="Leelawadee UI" pitchFamily="34" charset="-122"/>
                 <a:cs typeface="Leelawadee UI" pitchFamily="34" charset="-120"/>
               </a:rPr>
-              <a:t>0.53</a:t>
+              <a:t>0.57</a:t>
             </a:r>
             <a:endParaRPr lang="en-US" sz="2600" dirty="0"/>
           </a:p>
@@ -7578,13 +8114,13 @@
       </p:sp>
       <p:sp>
         <p:nvSpPr>
-          <p:cNvPr id="11" name="Text 8"/>
-          <p:cNvSpPr/>
-          <p:nvPr/>
-        </p:nvSpPr>
-        <p:spPr>
-          <a:xfrm>
-            <a:off x="6629400" y="2395728"/>
+          <p:cNvPr id="16" name="Text 13"/>
+          <p:cNvSpPr/>
+          <p:nvPr/>
+        </p:nvSpPr>
+        <p:spPr>
+          <a:xfrm>
+            <a:off x="6629400" y="3520440"/>
             <a:ext cx="4663440" cy="320040"/>
           </a:xfrm>
           <a:prstGeom prst="rect">
@@ -7597,7 +8133,7 @@
           <a:bodyPr wrap="square" rtlCol="0" anchor="ctr"/>
           <a:lstStyle/>
           <a:p>
-            <a:pPr marL="0" indent="0">
+            <a:pPr indent="0" marL="0">
               <a:buNone/>
             </a:pPr>
             <a:r>
@@ -7609,7 +8145,7 @@
                 <a:ea typeface="Leelawadee UI" pitchFamily="34" charset="-122"/>
                 <a:cs typeface="Leelawadee UI" pitchFamily="34" charset="-120"/>
               </a:rPr>
-              <a:t>ที่ทายว่ารอยร้าว ถูกจริงกี่ % (ลดเตือนลวง)</a:t>
+              <a:t>รอยร้าวจริงทั้งหมด จับได้กี่ % (ลดที่พลาด)</a:t>
             </a:r>
             <a:endParaRPr lang="en-US" sz="1200" dirty="0"/>
           </a:p>
@@ -7617,13 +8153,13 @@
       </p:sp>
       <p:sp>
         <p:nvSpPr>
-          <p:cNvPr id="12" name="Shape 9"/>
-          <p:cNvSpPr/>
-          <p:nvPr/>
-        </p:nvSpPr>
-        <p:spPr>
-          <a:xfrm>
-            <a:off x="6400800" y="2862072"/>
+          <p:cNvPr id="17" name="Shape 14"/>
+          <p:cNvSpPr/>
+          <p:nvPr/>
+        </p:nvSpPr>
+        <p:spPr>
+          <a:xfrm>
+            <a:off x="6400800" y="3986784"/>
             <a:ext cx="5120640" cy="1024128"/>
           </a:xfrm>
           <a:prstGeom prst="roundRect">
@@ -7641,203 +8177,6 @@
             <a:prstDash val="solid"/>
           </a:ln>
         </p:spPr>
-        <p:txBody>
-          <a:bodyPr/>
-          <a:lstStyle/>
-          <a:p>
-            <a:endParaRPr lang="en-US"/>
-          </a:p>
-        </p:txBody>
-      </p:sp>
-      <p:sp>
-        <p:nvSpPr>
-          <p:cNvPr id="13" name="Text 10"/>
-          <p:cNvSpPr/>
-          <p:nvPr/>
-        </p:nvSpPr>
-        <p:spPr>
-          <a:xfrm>
-            <a:off x="6629400" y="2971800"/>
-            <a:ext cx="2286000" cy="365760"/>
-          </a:xfrm>
-          <a:prstGeom prst="rect">
-            <a:avLst/>
-          </a:prstGeom>
-          <a:noFill/>
-          <a:ln/>
-        </p:spPr>
-        <p:txBody>
-          <a:bodyPr wrap="square" rtlCol="0" anchor="ctr"/>
-          <a:lstStyle/>
-          <a:p>
-            <a:pPr marL="0" indent="0">
-              <a:buNone/>
-            </a:pPr>
-            <a:r>
-              <a:rPr lang="en-US" sz="1700" b="1" dirty="0">
-                <a:solidFill>
-                  <a:srgbClr val="222629"/>
-                </a:solidFill>
-                <a:latin typeface="Leelawadee UI" pitchFamily="34" charset="0"/>
-                <a:ea typeface="Leelawadee UI" pitchFamily="34" charset="-122"/>
-                <a:cs typeface="Leelawadee UI" pitchFamily="34" charset="-120"/>
-              </a:rPr>
-              <a:t>Recall</a:t>
-            </a:r>
-            <a:endParaRPr lang="en-US" sz="1700" dirty="0"/>
-          </a:p>
-        </p:txBody>
-      </p:sp>
-      <p:sp>
-        <p:nvSpPr>
-          <p:cNvPr id="14" name="Text 11"/>
-          <p:cNvSpPr/>
-          <p:nvPr/>
-        </p:nvSpPr>
-        <p:spPr>
-          <a:xfrm>
-            <a:off x="6629400" y="3364992"/>
-            <a:ext cx="2834640" cy="365760"/>
-          </a:xfrm>
-          <a:prstGeom prst="rect">
-            <a:avLst/>
-          </a:prstGeom>
-          <a:noFill/>
-          <a:ln/>
-        </p:spPr>
-        <p:txBody>
-          <a:bodyPr wrap="square" rtlCol="0" anchor="ctr"/>
-          <a:lstStyle/>
-          <a:p>
-            <a:pPr marL="0" indent="0">
-              <a:buNone/>
-            </a:pPr>
-            <a:r>
-              <a:rPr lang="en-US" sz="1300" dirty="0">
-                <a:solidFill>
-                  <a:srgbClr val="5B6770"/>
-                </a:solidFill>
-                <a:latin typeface="Consolas" pitchFamily="34" charset="0"/>
-                <a:ea typeface="Consolas" pitchFamily="34" charset="-122"/>
-                <a:cs typeface="Consolas" pitchFamily="34" charset="-120"/>
-              </a:rPr>
-              <a:t>TP / (TP + FN)</a:t>
-            </a:r>
-            <a:endParaRPr lang="en-US" sz="1300" dirty="0"/>
-          </a:p>
-        </p:txBody>
-      </p:sp>
-      <p:sp>
-        <p:nvSpPr>
-          <p:cNvPr id="15" name="Text 12"/>
-          <p:cNvSpPr/>
-          <p:nvPr/>
-        </p:nvSpPr>
-        <p:spPr>
-          <a:xfrm>
-            <a:off x="9326880" y="2953512"/>
-            <a:ext cx="2011680" cy="502920"/>
-          </a:xfrm>
-          <a:prstGeom prst="rect">
-            <a:avLst/>
-          </a:prstGeom>
-          <a:noFill/>
-          <a:ln/>
-        </p:spPr>
-        <p:txBody>
-          <a:bodyPr wrap="square" rtlCol="0" anchor="ctr"/>
-          <a:lstStyle/>
-          <a:p>
-            <a:pPr marL="0" indent="0" algn="r">
-              <a:buNone/>
-            </a:pPr>
-            <a:r>
-              <a:rPr lang="en-US" sz="2600" b="1" dirty="0">
-                <a:solidFill>
-                  <a:srgbClr val="222629"/>
-                </a:solidFill>
-                <a:latin typeface="Leelawadee UI" pitchFamily="34" charset="0"/>
-                <a:ea typeface="Leelawadee UI" pitchFamily="34" charset="-122"/>
-                <a:cs typeface="Leelawadee UI" pitchFamily="34" charset="-120"/>
-              </a:rPr>
-              <a:t>0.57</a:t>
-            </a:r>
-            <a:endParaRPr lang="en-US" sz="2600" dirty="0"/>
-          </a:p>
-        </p:txBody>
-      </p:sp>
-      <p:sp>
-        <p:nvSpPr>
-          <p:cNvPr id="16" name="Text 13"/>
-          <p:cNvSpPr/>
-          <p:nvPr/>
-        </p:nvSpPr>
-        <p:spPr>
-          <a:xfrm>
-            <a:off x="6629400" y="3520440"/>
-            <a:ext cx="4663440" cy="320040"/>
-          </a:xfrm>
-          <a:prstGeom prst="rect">
-            <a:avLst/>
-          </a:prstGeom>
-          <a:noFill/>
-          <a:ln/>
-        </p:spPr>
-        <p:txBody>
-          <a:bodyPr wrap="square" rtlCol="0" anchor="ctr"/>
-          <a:lstStyle/>
-          <a:p>
-            <a:pPr marL="0" indent="0">
-              <a:buNone/>
-            </a:pPr>
-            <a:r>
-              <a:rPr lang="en-US" sz="1200" dirty="0">
-                <a:solidFill>
-                  <a:srgbClr val="5B6770"/>
-                </a:solidFill>
-                <a:latin typeface="Leelawadee UI" pitchFamily="34" charset="0"/>
-                <a:ea typeface="Leelawadee UI" pitchFamily="34" charset="-122"/>
-                <a:cs typeface="Leelawadee UI" pitchFamily="34" charset="-120"/>
-              </a:rPr>
-              <a:t>รอยร้าวจริงทั้งหมด จับได้กี่ % (ลดที่พลาด)</a:t>
-            </a:r>
-            <a:endParaRPr lang="en-US" sz="1200" dirty="0"/>
-          </a:p>
-        </p:txBody>
-      </p:sp>
-      <p:sp>
-        <p:nvSpPr>
-          <p:cNvPr id="17" name="Shape 14"/>
-          <p:cNvSpPr/>
-          <p:nvPr/>
-        </p:nvSpPr>
-        <p:spPr>
-          <a:xfrm>
-            <a:off x="6400800" y="3986784"/>
-            <a:ext cx="5120640" cy="1024128"/>
-          </a:xfrm>
-          <a:prstGeom prst="roundRect">
-            <a:avLst>
-              <a:gd name="adj" fmla="val 5357"/>
-            </a:avLst>
-          </a:prstGeom>
-          <a:solidFill>
-            <a:srgbClr val="FFFFFF"/>
-          </a:solidFill>
-          <a:ln w="12700">
-            <a:solidFill>
-              <a:srgbClr val="DDDDDD"/>
-            </a:solidFill>
-            <a:prstDash val="solid"/>
-          </a:ln>
-        </p:spPr>
-        <p:txBody>
-          <a:bodyPr/>
-          <a:lstStyle/>
-          <a:p>
-            <a:endParaRPr lang="en-US"/>
-          </a:p>
-        </p:txBody>
       </p:sp>
       <p:sp>
         <p:nvSpPr>
@@ -7860,7 +8199,7 @@
           <a:bodyPr wrap="square" rtlCol="0" anchor="ctr"/>
           <a:lstStyle/>
           <a:p>
-            <a:pPr marL="0" indent="0">
+            <a:pPr indent="0" marL="0">
               <a:buNone/>
             </a:pPr>
             <a:r>
@@ -7899,7 +8238,7 @@
           <a:bodyPr wrap="square" rtlCol="0" anchor="ctr"/>
           <a:lstStyle/>
           <a:p>
-            <a:pPr marL="0" indent="0">
+            <a:pPr indent="0" marL="0">
               <a:buNone/>
             </a:pPr>
             <a:r>
@@ -7938,7 +8277,7 @@
           <a:bodyPr wrap="square" rtlCol="0" anchor="ctr"/>
           <a:lstStyle/>
           <a:p>
-            <a:pPr marL="0" indent="0" algn="r">
+            <a:pPr algn="r" indent="0" marL="0">
               <a:buNone/>
             </a:pPr>
             <a:r>
@@ -7977,7 +8316,7 @@
           <a:bodyPr wrap="square" rtlCol="0" anchor="ctr"/>
           <a:lstStyle/>
           <a:p>
-            <a:pPr marL="0" indent="0">
+            <a:pPr indent="0" marL="0">
               <a:buNone/>
             </a:pPr>
             <a:r>
@@ -7997,6 +8336,33 @@
       </p:sp>
       <p:sp>
         <p:nvSpPr>
+          <p:cNvPr id="22" name="Shape 19"/>
+          <p:cNvSpPr/>
+          <p:nvPr/>
+        </p:nvSpPr>
+        <p:spPr>
+          <a:xfrm>
+            <a:off x="6400800" y="5111496"/>
+            <a:ext cx="5120640" cy="1024128"/>
+          </a:xfrm>
+          <a:prstGeom prst="roundRect">
+            <a:avLst>
+              <a:gd name="adj" fmla="val 5357"/>
+            </a:avLst>
+          </a:prstGeom>
+          <a:solidFill>
+            <a:srgbClr val="FBEEDD"/>
+          </a:solidFill>
+          <a:ln w="12700">
+            <a:solidFill>
+              <a:srgbClr val="E8871E"/>
+            </a:solidFill>
+            <a:prstDash val="solid"/>
+          </a:ln>
+        </p:spPr>
+      </p:sp>
+      <p:sp>
+        <p:nvSpPr>
           <p:cNvPr id="23" name="Text 20"/>
           <p:cNvSpPr/>
           <p:nvPr/>
@@ -8016,11 +8382,14 @@
           <a:bodyPr wrap="square" rtlCol="0" anchor="ctr"/>
           <a:lstStyle/>
           <a:p>
-            <a:pPr marL="0" indent="0">
+            <a:pPr indent="0" marL="0">
               <a:buNone/>
             </a:pPr>
             <a:r>
               <a:rPr lang="en-US" sz="1700" b="1" dirty="0">
+                <a:solidFill>
+                  <a:srgbClr val="B5670F"/>
+                </a:solidFill>
                 <a:latin typeface="Leelawadee UI" pitchFamily="34" charset="0"/>
                 <a:ea typeface="Leelawadee UI" pitchFamily="34" charset="-122"/>
                 <a:cs typeface="Leelawadee UI" pitchFamily="34" charset="-120"/>
@@ -8052,7 +8421,7 @@
           <a:bodyPr wrap="square" rtlCol="0" anchor="ctr"/>
           <a:lstStyle/>
           <a:p>
-            <a:pPr marL="0" indent="0">
+            <a:pPr indent="0" marL="0">
               <a:buNone/>
             </a:pPr>
             <a:r>
@@ -8091,11 +8460,14 @@
           <a:bodyPr wrap="square" rtlCol="0" anchor="ctr"/>
           <a:lstStyle/>
           <a:p>
-            <a:pPr marL="0" indent="0" algn="r">
+            <a:pPr algn="r" indent="0" marL="0">
               <a:buNone/>
             </a:pPr>
             <a:r>
               <a:rPr lang="en-US" sz="2600" b="1" dirty="0">
+                <a:solidFill>
+                  <a:srgbClr val="B5670F"/>
+                </a:solidFill>
                 <a:latin typeface="Leelawadee UI" pitchFamily="34" charset="0"/>
                 <a:ea typeface="Leelawadee UI" pitchFamily="34" charset="-122"/>
                 <a:cs typeface="Leelawadee UI" pitchFamily="34" charset="-120"/>
@@ -8127,7 +8499,7 @@
           <a:bodyPr wrap="square" rtlCol="0" anchor="ctr"/>
           <a:lstStyle/>
           <a:p>
-            <a:pPr marL="0" indent="0">
+            <a:pPr indent="0" marL="0">
               <a:buNone/>
             </a:pPr>
             <a:r>
@@ -8161,7 +8533,6 @@
         <a:solidFill>
           <a:srgbClr val="F4F4F2"/>
         </a:solidFill>
-        <a:effectLst/>
       </p:bgPr>
     </p:bg>
     <p:spTree>
@@ -8199,7 +8570,7 @@
           <a:bodyPr wrap="square" rtlCol="0" anchor="ctr"/>
           <a:lstStyle/>
           <a:p>
-            <a:pPr marL="0" indent="0">
+            <a:pPr indent="0" marL="0">
               <a:buNone/>
             </a:pPr>
             <a:r>
@@ -8238,7 +8609,7 @@
           <a:bodyPr wrap="square" rtlCol="0" anchor="ctr"/>
           <a:lstStyle/>
           <a:p>
-            <a:pPr marL="0" indent="0">
+            <a:pPr indent="0" marL="0">
               <a:buNone/>
             </a:pPr>
             <a:r>
@@ -8282,13 +8653,6 @@
             <a:prstDash val="solid"/>
           </a:ln>
         </p:spPr>
-        <p:txBody>
-          <a:bodyPr/>
-          <a:lstStyle/>
-          <a:p>
-            <a:endParaRPr lang="en-US"/>
-          </a:p>
-        </p:txBody>
       </p:sp>
       <p:sp>
         <p:nvSpPr>
@@ -8311,7 +8675,7 @@
           <a:bodyPr wrap="square" rtlCol="0" anchor="ctr"/>
           <a:lstStyle/>
           <a:p>
-            <a:pPr marL="0" indent="0" algn="ctr">
+            <a:pPr algn="ctr" indent="0" marL="0">
               <a:buNone/>
             </a:pPr>
             <a:r>
@@ -8350,11 +8714,14 @@
           <a:bodyPr wrap="square" rtlCol="0" anchor="ctr"/>
           <a:lstStyle/>
           <a:p>
-            <a:pPr marL="0" indent="0" algn="ctr">
+            <a:pPr algn="ctr" indent="0" marL="0">
               <a:buNone/>
             </a:pPr>
             <a:r>
               <a:rPr lang="en-US" sz="3600" b="1" dirty="0">
+                <a:solidFill>
+                  <a:srgbClr val="E8871E"/>
+                </a:solidFill>
                 <a:latin typeface="Leelawadee UI" pitchFamily="34" charset="0"/>
                 <a:ea typeface="Leelawadee UI" pitchFamily="34" charset="-122"/>
                 <a:cs typeface="Leelawadee UI" pitchFamily="34" charset="-120"/>
@@ -8386,7 +8753,7 @@
           <a:bodyPr wrap="square" rtlCol="0" anchor="ctr"/>
           <a:lstStyle/>
           <a:p>
-            <a:pPr marL="0" indent="0" algn="ctr">
+            <a:pPr algn="ctr" indent="0" marL="0">
               <a:buNone/>
             </a:pPr>
             <a:r>
@@ -8430,13 +8797,6 @@
             <a:prstDash val="solid"/>
           </a:ln>
         </p:spPr>
-        <p:txBody>
-          <a:bodyPr/>
-          <a:lstStyle/>
-          <a:p>
-            <a:endParaRPr lang="en-US"/>
-          </a:p>
-        </p:txBody>
       </p:sp>
       <p:sp>
         <p:nvSpPr>
@@ -8459,7 +8819,7 @@
           <a:bodyPr wrap="square" rtlCol="0" anchor="ctr"/>
           <a:lstStyle/>
           <a:p>
-            <a:pPr marL="0" indent="0" algn="ctr">
+            <a:pPr algn="ctr" indent="0" marL="0">
               <a:buNone/>
             </a:pPr>
             <a:r>
@@ -8498,7 +8858,7 @@
           <a:bodyPr wrap="square" rtlCol="0" anchor="ctr"/>
           <a:lstStyle/>
           <a:p>
-            <a:pPr marL="0" indent="0" algn="ctr">
+            <a:pPr algn="ctr" indent="0" marL="0">
               <a:buNone/>
             </a:pPr>
             <a:r>
@@ -8537,7 +8897,7 @@
           <a:bodyPr wrap="square" rtlCol="0" anchor="ctr"/>
           <a:lstStyle/>
           <a:p>
-            <a:pPr marL="0" indent="0" algn="ctr">
+            <a:pPr algn="ctr" indent="0" marL="0">
               <a:buNone/>
             </a:pPr>
             <a:r>
@@ -8581,13 +8941,6 @@
             <a:prstDash val="solid"/>
           </a:ln>
         </p:spPr>
-        <p:txBody>
-          <a:bodyPr/>
-          <a:lstStyle/>
-          <a:p>
-            <a:endParaRPr lang="en-US"/>
-          </a:p>
-        </p:txBody>
       </p:sp>
       <p:sp>
         <p:nvSpPr>
@@ -8610,7 +8963,7 @@
           <a:bodyPr wrap="square" rtlCol="0" anchor="ctr"/>
           <a:lstStyle/>
           <a:p>
-            <a:pPr marL="0" indent="0" algn="ctr">
+            <a:pPr algn="ctr" indent="0" marL="0">
               <a:buNone/>
             </a:pPr>
             <a:r>
@@ -8649,7 +9002,7 @@
           <a:bodyPr wrap="square" rtlCol="0" anchor="ctr"/>
           <a:lstStyle/>
           <a:p>
-            <a:pPr marL="0" indent="0" algn="ctr">
+            <a:pPr algn="ctr" indent="0" marL="0">
               <a:buNone/>
             </a:pPr>
             <a:r>
@@ -8688,7 +9041,7 @@
           <a:bodyPr wrap="square" rtlCol="0" anchor="ctr"/>
           <a:lstStyle/>
           <a:p>
-            <a:pPr marL="0" indent="0" algn="ctr">
+            <a:pPr algn="ctr" indent="0" marL="0">
               <a:buNone/>
             </a:pPr>
             <a:r>
@@ -8732,13 +9085,6 @@
             <a:prstDash val="solid"/>
           </a:ln>
         </p:spPr>
-        <p:txBody>
-          <a:bodyPr/>
-          <a:lstStyle/>
-          <a:p>
-            <a:endParaRPr lang="en-US"/>
-          </a:p>
-        </p:txBody>
       </p:sp>
       <p:sp>
         <p:nvSpPr>
@@ -8761,7 +9107,7 @@
           <a:bodyPr wrap="square" rtlCol="0" anchor="ctr"/>
           <a:lstStyle/>
           <a:p>
-            <a:pPr marL="0" indent="0" algn="ctr">
+            <a:pPr algn="ctr" indent="0" marL="0">
               <a:buNone/>
             </a:pPr>
             <a:r>
@@ -8800,7 +9146,7 @@
           <a:bodyPr wrap="square" rtlCol="0" anchor="ctr"/>
           <a:lstStyle/>
           <a:p>
-            <a:pPr marL="0" indent="0" algn="ctr">
+            <a:pPr algn="ctr" indent="0" marL="0">
               <a:buNone/>
             </a:pPr>
             <a:r>
@@ -8839,7 +9185,7 @@
           <a:bodyPr wrap="square" rtlCol="0" anchor="ctr"/>
           <a:lstStyle/>
           <a:p>
-            <a:pPr marL="0" indent="0" algn="ctr">
+            <a:pPr algn="ctr" indent="0" marL="0">
               <a:buNone/>
             </a:pPr>
             <a:r>
@@ -8878,7 +9224,7 @@
           <a:bodyPr wrap="square" rtlCol="0" anchor="ctr"/>
           <a:lstStyle/>
           <a:p>
-            <a:pPr marL="0" indent="0">
+            <a:pPr indent="0" marL="0">
               <a:buNone/>
             </a:pPr>
             <a:r>
@@ -8898,62 +9244,32 @@
       </p:sp>
       <p:graphicFrame>
         <p:nvGraphicFramePr>
-          <p:cNvPr id="21" name="Table 0"/>
+          <p:cNvPr id="9" name="Table 0"/>
           <p:cNvGraphicFramePr>
             <a:graphicFrameLocks noGrp="1"/>
           </p:cNvGraphicFramePr>
           <p:nvPr>
             <p:extLst>
               <p:ext uri="{D42A27DB-BD31-4B8C-83A1-F6EECF244321}">
-                <p14:modId xmlns:p14="http://schemas.microsoft.com/office/powerpoint/2010/main" val="2533965769"/>
+                <p14:modId xmlns:p14="http://schemas.microsoft.com/office/powerpoint/2010/main" val="1579011935"/>
               </p:ext>
             </p:extLst>
           </p:nvPr>
         </p:nvGraphicFramePr>
         <p:xfrm>
           <a:off x="640080" y="3977640"/>
-          <a:ext cx="10881360" cy="1920240"/>
+          <a:ext cx="10881360" cy="914400"/>
         </p:xfrm>
         <a:graphic>
           <a:graphicData uri="http://schemas.openxmlformats.org/drawingml/2006/table">
             <a:tbl>
               <a:tblPr/>
               <a:tblGrid>
-                <a:gridCol w="2103120">
-                  <a:extLst>
-                    <a:ext uri="{9D8B030D-6E8A-4147-A177-3AD203B41FA5}">
-                      <a16:colId xmlns:a16="http://schemas.microsoft.com/office/drawing/2014/main" val="20000"/>
-                    </a:ext>
-                  </a:extLst>
-                </a:gridCol>
-                <a:gridCol w="2194560">
-                  <a:extLst>
-                    <a:ext uri="{9D8B030D-6E8A-4147-A177-3AD203B41FA5}">
-                      <a16:colId xmlns:a16="http://schemas.microsoft.com/office/drawing/2014/main" val="20001"/>
-                    </a:ext>
-                  </a:extLst>
-                </a:gridCol>
-                <a:gridCol w="2194560">
-                  <a:extLst>
-                    <a:ext uri="{9D8B030D-6E8A-4147-A177-3AD203B41FA5}">
-                      <a16:colId xmlns:a16="http://schemas.microsoft.com/office/drawing/2014/main" val="20002"/>
-                    </a:ext>
-                  </a:extLst>
-                </a:gridCol>
-                <a:gridCol w="2194560">
-                  <a:extLst>
-                    <a:ext uri="{9D8B030D-6E8A-4147-A177-3AD203B41FA5}">
-                      <a16:colId xmlns:a16="http://schemas.microsoft.com/office/drawing/2014/main" val="20003"/>
-                    </a:ext>
-                  </a:extLst>
-                </a:gridCol>
-                <a:gridCol w="2194560">
-                  <a:extLst>
-                    <a:ext uri="{9D8B030D-6E8A-4147-A177-3AD203B41FA5}">
-                      <a16:colId xmlns:a16="http://schemas.microsoft.com/office/drawing/2014/main" val="20004"/>
-                    </a:ext>
-                  </a:extLst>
-                </a:gridCol>
+                <a:gridCol w="2103120"/>
+                <a:gridCol w="2194560"/>
+                <a:gridCol w="2194560"/>
+                <a:gridCol w="2194560"/>
+                <a:gridCol w="2194560"/>
               </a:tblGrid>
               <a:tr h="384048">
                 <a:tc>
@@ -8961,7 +9277,7 @@
                     <a:bodyPr/>
                     <a:lstStyle/>
                     <a:p>
-                      <a:pPr marL="0" indent="0">
+                      <a:pPr indent="0" marL="0">
                         <a:buNone/>
                       </a:pPr>
                       <a:endParaRPr lang="en-US" sz="1400" dirty="0">
@@ -8971,7 +9287,7 @@
                       </a:endParaRPr>
                     </a:p>
                   </a:txBody>
-                  <a:tcPr anchor="ctr">
+                  <a:tcPr marL="91440" marR="91440" marT="45720" marB="45720" anchor="ctr">
                     <a:lnL w="12700" cap="flat" cmpd="sng" algn="ctr">
                       <a:solidFill>
                         <a:srgbClr val="DDDDDD"/>
@@ -9018,7 +9334,7 @@
                     <a:bodyPr/>
                     <a:lstStyle/>
                     <a:p>
-                      <a:pPr marL="0" indent="0" algn="ctr">
+                      <a:pPr algn="ctr" indent="0" marL="0">
                         <a:buNone/>
                       </a:pPr>
                       <a:r>
@@ -9039,7 +9355,7 @@
                       </a:endParaRPr>
                     </a:p>
                   </a:txBody>
-                  <a:tcPr anchor="ctr">
+                  <a:tcPr marL="91440" marR="91440" marT="45720" marB="45720" anchor="ctr">
                     <a:lnL w="12700" cap="flat" cmpd="sng" algn="ctr">
                       <a:solidFill>
                         <a:srgbClr val="DDDDDD"/>
@@ -9086,7 +9402,7 @@
                     <a:bodyPr/>
                     <a:lstStyle/>
                     <a:p>
-                      <a:pPr marL="0" indent="0" algn="ctr">
+                      <a:pPr algn="ctr" indent="0" marL="0">
                         <a:buNone/>
                       </a:pPr>
                       <a:r>
@@ -9107,7 +9423,7 @@
                       </a:endParaRPr>
                     </a:p>
                   </a:txBody>
-                  <a:tcPr anchor="ctr">
+                  <a:tcPr marL="91440" marR="91440" marT="45720" marB="45720" anchor="ctr">
                     <a:lnL w="12700" cap="flat" cmpd="sng" algn="ctr">
                       <a:solidFill>
                         <a:srgbClr val="DDDDDD"/>
@@ -9154,7 +9470,7 @@
                     <a:bodyPr/>
                     <a:lstStyle/>
                     <a:p>
-                      <a:pPr marL="0" indent="0" algn="ctr">
+                      <a:pPr algn="ctr" indent="0" marL="0">
                         <a:buNone/>
                       </a:pPr>
                       <a:r>
@@ -9175,7 +9491,7 @@
                       </a:endParaRPr>
                     </a:p>
                   </a:txBody>
-                  <a:tcPr anchor="ctr">
+                  <a:tcPr marL="91440" marR="91440" marT="45720" marB="45720" anchor="ctr">
                     <a:lnL w="12700" cap="flat" cmpd="sng" algn="ctr">
                       <a:solidFill>
                         <a:srgbClr val="DDDDDD"/>
@@ -9222,7 +9538,7 @@
                     <a:bodyPr/>
                     <a:lstStyle/>
                     <a:p>
-                      <a:pPr marL="0" indent="0" algn="ctr">
+                      <a:pPr algn="ctr" indent="0" marL="0">
                         <a:buNone/>
                       </a:pPr>
                       <a:r>
@@ -9243,7 +9559,7 @@
                       </a:endParaRPr>
                     </a:p>
                   </a:txBody>
-                  <a:tcPr anchor="ctr">
+                  <a:tcPr marL="91440" marR="91440" marT="45720" marB="45720" anchor="ctr">
                     <a:lnL w="12700" cap="flat" cmpd="sng" algn="ctr">
                       <a:solidFill>
                         <a:srgbClr val="DDDDDD"/>
@@ -9285,11 +9601,6 @@
                     </a:solidFill>
                   </a:tcPr>
                 </a:tc>
-                <a:extLst>
-                  <a:ext uri="{0D108BD9-81ED-4DB2-BD59-A6C34878D82A}">
-                    <a16:rowId xmlns:a16="http://schemas.microsoft.com/office/drawing/2014/main" val="10000"/>
-                  </a:ext>
-                </a:extLst>
               </a:tr>
               <a:tr h="384048">
                 <a:tc>
@@ -9297,7 +9608,7 @@
                     <a:bodyPr/>
                     <a:lstStyle/>
                     <a:p>
-                      <a:pPr marL="0" indent="0" algn="l">
+                      <a:pPr algn="l" indent="0" marL="0">
                         <a:buNone/>
                       </a:pPr>
                       <a:r>
@@ -9318,7 +9629,7 @@
                       </a:endParaRPr>
                     </a:p>
                   </a:txBody>
-                  <a:tcPr anchor="ctr">
+                  <a:tcPr marL="91440" marR="91440" marT="45720" marB="45720" anchor="ctr">
                     <a:lnL w="12700" cap="flat" cmpd="sng" algn="ctr">
                       <a:solidFill>
                         <a:srgbClr val="DDDDDD"/>
@@ -9365,7 +9676,7 @@
                     <a:bodyPr/>
                     <a:lstStyle/>
                     <a:p>
-                      <a:pPr marL="0" indent="0" algn="ctr">
+                      <a:pPr algn="ctr" indent="0" marL="0">
                         <a:buNone/>
                       </a:pPr>
                       <a:r>
@@ -9386,7 +9697,7 @@
                       </a:endParaRPr>
                     </a:p>
                   </a:txBody>
-                  <a:tcPr anchor="ctr">
+                  <a:tcPr marL="91440" marR="91440" marT="45720" marB="45720" anchor="ctr">
                     <a:lnL w="12700" cap="flat" cmpd="sng" algn="ctr">
                       <a:solidFill>
                         <a:srgbClr val="DDDDDD"/>
@@ -9433,7 +9744,7 @@
                     <a:bodyPr/>
                     <a:lstStyle/>
                     <a:p>
-                      <a:pPr marL="0" indent="0" algn="ctr">
+                      <a:pPr algn="ctr" indent="0" marL="0">
                         <a:buNone/>
                       </a:pPr>
                       <a:r>
@@ -9454,7 +9765,7 @@
                       </a:endParaRPr>
                     </a:p>
                   </a:txBody>
-                  <a:tcPr anchor="ctr">
+                  <a:tcPr marL="91440" marR="91440" marT="45720" marB="45720" anchor="ctr">
                     <a:lnL w="12700" cap="flat" cmpd="sng" algn="ctr">
                       <a:solidFill>
                         <a:srgbClr val="DDDDDD"/>
@@ -9501,7 +9812,7 @@
                     <a:bodyPr/>
                     <a:lstStyle/>
                     <a:p>
-                      <a:pPr marL="0" indent="0" algn="ctr">
+                      <a:pPr algn="ctr" indent="0" marL="0">
                         <a:buNone/>
                       </a:pPr>
                       <a:r>
@@ -9522,7 +9833,7 @@
                       </a:endParaRPr>
                     </a:p>
                   </a:txBody>
-                  <a:tcPr anchor="ctr">
+                  <a:tcPr marL="91440" marR="91440" marT="45720" marB="45720" anchor="ctr">
                     <a:lnL w="12700" cap="flat" cmpd="sng" algn="ctr">
                       <a:solidFill>
                         <a:srgbClr val="DDDDDD"/>
@@ -9569,7 +9880,7 @@
                     <a:bodyPr/>
                     <a:lstStyle/>
                     <a:p>
-                      <a:pPr marL="0" indent="0" algn="ctr">
+                      <a:pPr algn="ctr" indent="0" marL="0">
                         <a:buNone/>
                       </a:pPr>
                       <a:r>
@@ -9590,7 +9901,7 @@
                       </a:endParaRPr>
                     </a:p>
                   </a:txBody>
-                  <a:tcPr anchor="ctr">
+                  <a:tcPr marL="91440" marR="91440" marT="45720" marB="45720" anchor="ctr">
                     <a:lnL w="12700" cap="flat" cmpd="sng" algn="ctr">
                       <a:solidFill>
                         <a:srgbClr val="DDDDDD"/>
@@ -9632,11 +9943,6 @@
                     </a:solidFill>
                   </a:tcPr>
                 </a:tc>
-                <a:extLst>
-                  <a:ext uri="{0D108BD9-81ED-4DB2-BD59-A6C34878D82A}">
-                    <a16:rowId xmlns:a16="http://schemas.microsoft.com/office/drawing/2014/main" val="10001"/>
-                  </a:ext>
-                </a:extLst>
               </a:tr>
               <a:tr h="384048">
                 <a:tc>
@@ -9644,7 +9950,7 @@
                     <a:bodyPr/>
                     <a:lstStyle/>
                     <a:p>
-                      <a:pPr marL="0" indent="0" algn="l">
+                      <a:pPr algn="l" indent="0" marL="0">
                         <a:buNone/>
                       </a:pPr>
                       <a:r>
@@ -9665,7 +9971,7 @@
                       </a:endParaRPr>
                     </a:p>
                   </a:txBody>
-                  <a:tcPr anchor="ctr">
+                  <a:tcPr marL="91440" marR="91440" marT="45720" marB="45720" anchor="ctr">
                     <a:lnL w="12700" cap="flat" cmpd="sng" algn="ctr">
                       <a:solidFill>
                         <a:srgbClr val="DDDDDD"/>
@@ -9712,7 +10018,7 @@
                     <a:bodyPr/>
                     <a:lstStyle/>
                     <a:p>
-                      <a:pPr marL="0" indent="0" algn="ctr">
+                      <a:pPr algn="ctr" indent="0" marL="0">
                         <a:buNone/>
                       </a:pPr>
                       <a:r>
@@ -9733,7 +10039,7 @@
                       </a:endParaRPr>
                     </a:p>
                   </a:txBody>
-                  <a:tcPr anchor="ctr">
+                  <a:tcPr marL="91440" marR="91440" marT="45720" marB="45720" anchor="ctr">
                     <a:lnL w="12700" cap="flat" cmpd="sng" algn="ctr">
                       <a:solidFill>
                         <a:srgbClr val="DDDDDD"/>
@@ -9780,7 +10086,7 @@
                     <a:bodyPr/>
                     <a:lstStyle/>
                     <a:p>
-                      <a:pPr marL="0" indent="0" algn="ctr">
+                      <a:pPr algn="ctr" indent="0" marL="0">
                         <a:buNone/>
                       </a:pPr>
                       <a:r>
@@ -9801,7 +10107,7 @@
                       </a:endParaRPr>
                     </a:p>
                   </a:txBody>
-                  <a:tcPr anchor="ctr">
+                  <a:tcPr marL="91440" marR="91440" marT="45720" marB="45720" anchor="ctr">
                     <a:lnL w="12700" cap="flat" cmpd="sng" algn="ctr">
                       <a:solidFill>
                         <a:srgbClr val="DDDDDD"/>
@@ -9848,7 +10154,7 @@
                     <a:bodyPr/>
                     <a:lstStyle/>
                     <a:p>
-                      <a:pPr marL="0" indent="0" algn="ctr">
+                      <a:pPr algn="ctr" indent="0" marL="0">
                         <a:buNone/>
                       </a:pPr>
                       <a:r>
@@ -9869,7 +10175,7 @@
                       </a:endParaRPr>
                     </a:p>
                   </a:txBody>
-                  <a:tcPr anchor="ctr">
+                  <a:tcPr marL="91440" marR="91440" marT="45720" marB="45720" anchor="ctr">
                     <a:lnL w="12700" cap="flat" cmpd="sng" algn="ctr">
                       <a:solidFill>
                         <a:srgbClr val="DDDDDD"/>
@@ -9916,7 +10222,7 @@
                     <a:bodyPr/>
                     <a:lstStyle/>
                     <a:p>
-                      <a:pPr marL="0" indent="0" algn="ctr">
+                      <a:pPr algn="ctr" indent="0" marL="0">
                         <a:buNone/>
                       </a:pPr>
                       <a:r>
@@ -9937,7 +10243,7 @@
                       </a:endParaRPr>
                     </a:p>
                   </a:txBody>
-                  <a:tcPr anchor="ctr">
+                  <a:tcPr marL="91440" marR="91440" marT="45720" marB="45720" anchor="ctr">
                     <a:lnL w="12700" cap="flat" cmpd="sng" algn="ctr">
                       <a:solidFill>
                         <a:srgbClr val="DDDDDD"/>
@@ -9979,11 +10285,6 @@
                     </a:solidFill>
                   </a:tcPr>
                 </a:tc>
-                <a:extLst>
-                  <a:ext uri="{0D108BD9-81ED-4DB2-BD59-A6C34878D82A}">
-                    <a16:rowId xmlns:a16="http://schemas.microsoft.com/office/drawing/2014/main" val="10002"/>
-                  </a:ext>
-                </a:extLst>
               </a:tr>
               <a:tr h="384048">
                 <a:tc>
@@ -9991,7 +10292,7 @@
                     <a:bodyPr/>
                     <a:lstStyle/>
                     <a:p>
-                      <a:pPr marL="0" indent="0" algn="l">
+                      <a:pPr algn="l" indent="0" marL="0">
                         <a:buNone/>
                       </a:pPr>
                       <a:r>
@@ -10012,7 +10313,7 @@
                       </a:endParaRPr>
                     </a:p>
                   </a:txBody>
-                  <a:tcPr anchor="ctr">
+                  <a:tcPr marL="91440" marR="91440" marT="45720" marB="45720" anchor="ctr">
                     <a:lnL w="12700" cap="flat" cmpd="sng" algn="ctr">
                       <a:solidFill>
                         <a:srgbClr val="DDDDDD"/>
@@ -10059,7 +10360,7 @@
                     <a:bodyPr/>
                     <a:lstStyle/>
                     <a:p>
-                      <a:pPr marL="0" indent="0" algn="ctr">
+                      <a:pPr algn="ctr" indent="0" marL="0">
                         <a:buNone/>
                       </a:pPr>
                       <a:r>
@@ -10080,7 +10381,7 @@
                       </a:endParaRPr>
                     </a:p>
                   </a:txBody>
-                  <a:tcPr anchor="ctr">
+                  <a:tcPr marL="91440" marR="91440" marT="45720" marB="45720" anchor="ctr">
                     <a:lnL w="12700" cap="flat" cmpd="sng" algn="ctr">
                       <a:solidFill>
                         <a:srgbClr val="DDDDDD"/>
@@ -10127,7 +10428,7 @@
                     <a:bodyPr/>
                     <a:lstStyle/>
                     <a:p>
-                      <a:pPr marL="0" indent="0" algn="ctr">
+                      <a:pPr algn="ctr" indent="0" marL="0">
                         <a:buNone/>
                       </a:pPr>
                       <a:r>
@@ -10148,7 +10449,7 @@
                       </a:endParaRPr>
                     </a:p>
                   </a:txBody>
-                  <a:tcPr anchor="ctr">
+                  <a:tcPr marL="91440" marR="91440" marT="45720" marB="45720" anchor="ctr">
                     <a:lnL w="12700" cap="flat" cmpd="sng" algn="ctr">
                       <a:solidFill>
                         <a:srgbClr val="DDDDDD"/>
@@ -10195,7 +10496,7 @@
                     <a:bodyPr/>
                     <a:lstStyle/>
                     <a:p>
-                      <a:pPr marL="0" indent="0" algn="ctr">
+                      <a:pPr algn="ctr" indent="0" marL="0">
                         <a:buNone/>
                       </a:pPr>
                       <a:r>
@@ -10216,7 +10517,7 @@
                       </a:endParaRPr>
                     </a:p>
                   </a:txBody>
-                  <a:tcPr anchor="ctr">
+                  <a:tcPr marL="91440" marR="91440" marT="45720" marB="45720" anchor="ctr">
                     <a:lnL w="12700" cap="flat" cmpd="sng" algn="ctr">
                       <a:solidFill>
                         <a:srgbClr val="DDDDDD"/>
@@ -10263,7 +10564,7 @@
                     <a:bodyPr/>
                     <a:lstStyle/>
                     <a:p>
-                      <a:pPr marL="0" indent="0" algn="ctr">
+                      <a:pPr algn="ctr" indent="0" marL="0">
                         <a:buNone/>
                       </a:pPr>
                       <a:r>
@@ -10284,7 +10585,7 @@
                       </a:endParaRPr>
                     </a:p>
                   </a:txBody>
-                  <a:tcPr anchor="ctr">
+                  <a:tcPr marL="91440" marR="91440" marT="45720" marB="45720" anchor="ctr">
                     <a:lnL w="12700" cap="flat" cmpd="sng" algn="ctr">
                       <a:solidFill>
                         <a:srgbClr val="DDDDDD"/>
@@ -10326,11 +10627,6 @@
                     </a:solidFill>
                   </a:tcPr>
                 </a:tc>
-                <a:extLst>
-                  <a:ext uri="{0D108BD9-81ED-4DB2-BD59-A6C34878D82A}">
-                    <a16:rowId xmlns:a16="http://schemas.microsoft.com/office/drawing/2014/main" val="10003"/>
-                  </a:ext>
-                </a:extLst>
               </a:tr>
               <a:tr h="384048">
                 <a:tc>
@@ -10338,13 +10634,13 @@
                     <a:bodyPr/>
                     <a:lstStyle/>
                     <a:p>
-                      <a:pPr marL="0" indent="0" algn="l">
+                      <a:pPr algn="l" indent="0" marL="0">
                         <a:buNone/>
                       </a:pPr>
                       <a:r>
                         <a:rPr lang="en-US" sz="1400" b="1" dirty="0">
                           <a:solidFill>
-                            <a:schemeClr val="tx1"/>
+                            <a:srgbClr val="B5670F"/>
                           </a:solidFill>
                           <a:latin typeface="Leelawadee UI" pitchFamily="34" charset="0"/>
                           <a:ea typeface="Leelawadee UI" pitchFamily="34" charset="-122"/>
@@ -10353,16 +10649,13 @@
                         <a:t>Dice</a:t>
                       </a:r>
                       <a:endParaRPr lang="en-US" sz="1400" dirty="0">
-                        <a:solidFill>
-                          <a:schemeClr val="tx1"/>
-                        </a:solidFill>
                         <a:latin typeface="Leelawadee UI" charset="0"/>
                         <a:ea typeface="Leelawadee UI" charset="0"/>
                         <a:cs typeface="Leelawadee UI" charset="0"/>
                       </a:endParaRPr>
                     </a:p>
                   </a:txBody>
-                  <a:tcPr anchor="ctr">
+                  <a:tcPr marL="91440" marR="91440" marT="45720" marB="45720" anchor="ctr">
                     <a:lnL w="12700" cap="flat" cmpd="sng" algn="ctr">
                       <a:solidFill>
                         <a:srgbClr val="DDDDDD"/>
@@ -10400,7 +10693,7 @@
                       <a:tailEnd type="none" w="med" len="med"/>
                     </a:lnB>
                     <a:solidFill>
-                      <a:schemeClr val="bg1"/>
+                      <a:srgbClr val="FBEEDD"/>
                     </a:solidFill>
                   </a:tcPr>
                 </a:tc>
@@ -10409,13 +10702,13 @@
                     <a:bodyPr/>
                     <a:lstStyle/>
                     <a:p>
-                      <a:pPr marL="0" indent="0" algn="ctr">
+                      <a:pPr algn="ctr" indent="0" marL="0">
                         <a:buNone/>
                       </a:pPr>
                       <a:r>
                         <a:rPr lang="en-US" sz="1400" b="1" dirty="0">
                           <a:solidFill>
-                            <a:schemeClr val="tx1"/>
+                            <a:srgbClr val="B5670F"/>
                           </a:solidFill>
                           <a:latin typeface="Leelawadee UI" pitchFamily="34" charset="0"/>
                           <a:ea typeface="Leelawadee UI" pitchFamily="34" charset="-122"/>
@@ -10424,16 +10717,13 @@
                         <a:t>0.3201</a:t>
                       </a:r>
                       <a:endParaRPr lang="en-US" sz="1400" dirty="0">
-                        <a:solidFill>
-                          <a:schemeClr val="tx1"/>
-                        </a:solidFill>
                         <a:latin typeface="Leelawadee UI" charset="0"/>
                         <a:ea typeface="Leelawadee UI" charset="0"/>
                         <a:cs typeface="Leelawadee UI" charset="0"/>
                       </a:endParaRPr>
                     </a:p>
                   </a:txBody>
-                  <a:tcPr anchor="ctr">
+                  <a:tcPr marL="91440" marR="91440" marT="45720" marB="45720" anchor="ctr">
                     <a:lnL w="12700" cap="flat" cmpd="sng" algn="ctr">
                       <a:solidFill>
                         <a:srgbClr val="DDDDDD"/>
@@ -10471,7 +10761,7 @@
                       <a:tailEnd type="none" w="med" len="med"/>
                     </a:lnB>
                     <a:solidFill>
-                      <a:schemeClr val="bg1"/>
+                      <a:srgbClr val="FBEEDD"/>
                     </a:solidFill>
                   </a:tcPr>
                 </a:tc>
@@ -10480,13 +10770,13 @@
                     <a:bodyPr/>
                     <a:lstStyle/>
                     <a:p>
-                      <a:pPr marL="0" indent="0" algn="ctr">
+                      <a:pPr algn="ctr" indent="0" marL="0">
                         <a:buNone/>
                       </a:pPr>
                       <a:r>
                         <a:rPr lang="en-US" sz="1400" b="1" dirty="0">
                           <a:solidFill>
-                            <a:schemeClr val="tx1"/>
+                            <a:srgbClr val="B5670F"/>
                           </a:solidFill>
                           <a:latin typeface="Leelawadee UI" pitchFamily="34" charset="0"/>
                           <a:ea typeface="Leelawadee UI" pitchFamily="34" charset="-122"/>
@@ -10495,16 +10785,13 @@
                         <a:t>0.4872</a:t>
                       </a:r>
                       <a:endParaRPr lang="en-US" sz="1400" dirty="0">
-                        <a:solidFill>
-                          <a:schemeClr val="tx1"/>
-                        </a:solidFill>
                         <a:latin typeface="Leelawadee UI" charset="0"/>
                         <a:ea typeface="Leelawadee UI" charset="0"/>
                         <a:cs typeface="Leelawadee UI" charset="0"/>
                       </a:endParaRPr>
                     </a:p>
                   </a:txBody>
-                  <a:tcPr anchor="ctr">
+                  <a:tcPr marL="91440" marR="91440" marT="45720" marB="45720" anchor="ctr">
                     <a:lnL w="12700" cap="flat" cmpd="sng" algn="ctr">
                       <a:solidFill>
                         <a:srgbClr val="DDDDDD"/>
@@ -10542,7 +10829,7 @@
                       <a:tailEnd type="none" w="med" len="med"/>
                     </a:lnB>
                     <a:solidFill>
-                      <a:schemeClr val="bg1"/>
+                      <a:srgbClr val="FBEEDD"/>
                     </a:solidFill>
                   </a:tcPr>
                 </a:tc>
@@ -10551,13 +10838,13 @@
                     <a:bodyPr/>
                     <a:lstStyle/>
                     <a:p>
-                      <a:pPr marL="0" indent="0" algn="ctr">
+                      <a:pPr algn="ctr" indent="0" marL="0">
                         <a:buNone/>
                       </a:pPr>
                       <a:r>
                         <a:rPr lang="en-US" sz="1400" b="1" dirty="0">
                           <a:solidFill>
-                            <a:schemeClr val="tx1"/>
+                            <a:srgbClr val="B5670F"/>
                           </a:solidFill>
                           <a:latin typeface="Leelawadee UI" pitchFamily="34" charset="0"/>
                           <a:ea typeface="Leelawadee UI" pitchFamily="34" charset="-122"/>
@@ -10566,16 +10853,13 @@
                         <a:t>0.4991</a:t>
                       </a:r>
                       <a:endParaRPr lang="en-US" sz="1400" dirty="0">
-                        <a:solidFill>
-                          <a:schemeClr val="tx1"/>
-                        </a:solidFill>
                         <a:latin typeface="Leelawadee UI" charset="0"/>
                         <a:ea typeface="Leelawadee UI" charset="0"/>
                         <a:cs typeface="Leelawadee UI" charset="0"/>
                       </a:endParaRPr>
                     </a:p>
                   </a:txBody>
-                  <a:tcPr anchor="ctr">
+                  <a:tcPr marL="91440" marR="91440" marT="45720" marB="45720" anchor="ctr">
                     <a:lnL w="12700" cap="flat" cmpd="sng" algn="ctr">
                       <a:solidFill>
                         <a:srgbClr val="DDDDDD"/>
@@ -10613,7 +10897,7 @@
                       <a:tailEnd type="none" w="med" len="med"/>
                     </a:lnB>
                     <a:solidFill>
-                      <a:schemeClr val="bg1"/>
+                      <a:srgbClr val="FBEEDD"/>
                     </a:solidFill>
                   </a:tcPr>
                 </a:tc>
@@ -10622,13 +10906,13 @@
                     <a:bodyPr/>
                     <a:lstStyle/>
                     <a:p>
-                      <a:pPr marL="0" indent="0" algn="ctr">
+                      <a:pPr algn="ctr" indent="0" marL="0">
                         <a:buNone/>
                       </a:pPr>
                       <a:r>
                         <a:rPr lang="en-US" sz="1400" b="1" dirty="0">
                           <a:solidFill>
-                            <a:schemeClr val="tx1"/>
+                            <a:srgbClr val="B5670F"/>
                           </a:solidFill>
                           <a:latin typeface="Leelawadee UI" pitchFamily="34" charset="0"/>
                           <a:ea typeface="Leelawadee UI" pitchFamily="34" charset="-122"/>
@@ -10637,16 +10921,13 @@
                         <a:t>0.5024</a:t>
                       </a:r>
                       <a:endParaRPr lang="en-US" sz="1400" dirty="0">
-                        <a:solidFill>
-                          <a:schemeClr val="tx1"/>
-                        </a:solidFill>
                         <a:latin typeface="Leelawadee UI" charset="0"/>
                         <a:ea typeface="Leelawadee UI" charset="0"/>
                         <a:cs typeface="Leelawadee UI" charset="0"/>
                       </a:endParaRPr>
                     </a:p>
                   </a:txBody>
-                  <a:tcPr anchor="ctr">
+                  <a:tcPr marL="91440" marR="91440" marT="45720" marB="45720" anchor="ctr">
                     <a:lnL w="12700" cap="flat" cmpd="sng" algn="ctr">
                       <a:solidFill>
                         <a:srgbClr val="DDDDDD"/>
@@ -10684,15 +10965,10 @@
                       <a:tailEnd type="none" w="med" len="med"/>
                     </a:lnB>
                     <a:solidFill>
-                      <a:schemeClr val="bg1"/>
+                      <a:srgbClr val="FBEEDD"/>
                     </a:solidFill>
                   </a:tcPr>
                 </a:tc>
-                <a:extLst>
-                  <a:ext uri="{0D108BD9-81ED-4DB2-BD59-A6C34878D82A}">
-                    <a16:rowId xmlns:a16="http://schemas.microsoft.com/office/drawing/2014/main" val="10004"/>
-                  </a:ext>
-                </a:extLst>
               </a:tr>
             </a:tbl>
           </a:graphicData>
@@ -10719,7 +10995,7 @@
           <a:bodyPr wrap="square" rtlCol="0" anchor="ctr"/>
           <a:lstStyle/>
           <a:p>
-            <a:pPr marL="0" indent="0">
+            <a:pPr indent="0" marL="0">
               <a:buNone/>
             </a:pPr>
             <a:r>
@@ -10753,7 +11029,6 @@
         <a:solidFill>
           <a:srgbClr val="F4F4F2"/>
         </a:solidFill>
-        <a:effectLst/>
       </p:bgPr>
     </p:bg>
     <p:spTree>
@@ -10791,7 +11066,7 @@
           <a:bodyPr wrap="square" rtlCol="0" anchor="ctr"/>
           <a:lstStyle/>
           <a:p>
-            <a:pPr marL="0" indent="0">
+            <a:pPr indent="0" marL="0">
               <a:buNone/>
             </a:pPr>
             <a:r>
@@ -10830,7 +11105,7 @@
           <a:bodyPr wrap="square" rtlCol="0" anchor="ctr"/>
           <a:lstStyle/>
           <a:p>
-            <a:pPr marL="0" indent="0">
+            <a:pPr indent="0" marL="0">
               <a:buNone/>
             </a:pPr>
             <a:r>
@@ -10864,48 +11139,18 @@
         </p:nvGraphicFramePr>
         <p:xfrm>
           <a:off x="640080" y="1783080"/>
-          <a:ext cx="5577840" cy="2316480"/>
+          <a:ext cx="5577840" cy="914400"/>
         </p:xfrm>
         <a:graphic>
           <a:graphicData uri="http://schemas.openxmlformats.org/drawingml/2006/table">
             <a:tbl>
               <a:tblPr/>
               <a:tblGrid>
-                <a:gridCol w="1371600">
-                  <a:extLst>
-                    <a:ext uri="{9D8B030D-6E8A-4147-A177-3AD203B41FA5}">
-                      <a16:colId xmlns:a16="http://schemas.microsoft.com/office/drawing/2014/main" val="20000"/>
-                    </a:ext>
-                  </a:extLst>
-                </a:gridCol>
-                <a:gridCol w="1188720">
-                  <a:extLst>
-                    <a:ext uri="{9D8B030D-6E8A-4147-A177-3AD203B41FA5}">
-                      <a16:colId xmlns:a16="http://schemas.microsoft.com/office/drawing/2014/main" val="20001"/>
-                    </a:ext>
-                  </a:extLst>
-                </a:gridCol>
-                <a:gridCol w="1005840">
-                  <a:extLst>
-                    <a:ext uri="{9D8B030D-6E8A-4147-A177-3AD203B41FA5}">
-                      <a16:colId xmlns:a16="http://schemas.microsoft.com/office/drawing/2014/main" val="20002"/>
-                    </a:ext>
-                  </a:extLst>
-                </a:gridCol>
-                <a:gridCol w="914400">
-                  <a:extLst>
-                    <a:ext uri="{9D8B030D-6E8A-4147-A177-3AD203B41FA5}">
-                      <a16:colId xmlns:a16="http://schemas.microsoft.com/office/drawing/2014/main" val="20003"/>
-                    </a:ext>
-                  </a:extLst>
-                </a:gridCol>
-                <a:gridCol w="1097280">
-                  <a:extLst>
-                    <a:ext uri="{9D8B030D-6E8A-4147-A177-3AD203B41FA5}">
-                      <a16:colId xmlns:a16="http://schemas.microsoft.com/office/drawing/2014/main" val="20004"/>
-                    </a:ext>
-                  </a:extLst>
-                </a:gridCol>
+                <a:gridCol w="1371600"/>
+                <a:gridCol w="1188720"/>
+                <a:gridCol w="1005840"/>
+                <a:gridCol w="914400"/>
+                <a:gridCol w="1097280"/>
               </a:tblGrid>
               <a:tr h="457200">
                 <a:tc>
@@ -10913,7 +11158,7 @@
                     <a:bodyPr/>
                     <a:lstStyle/>
                     <a:p>
-                      <a:pPr marL="0" indent="0" algn="ctr">
+                      <a:pPr algn="ctr" indent="0" marL="0">
                         <a:buNone/>
                       </a:pPr>
                       <a:r>
@@ -10934,7 +11179,7 @@
                       </a:endParaRPr>
                     </a:p>
                   </a:txBody>
-                  <a:tcPr anchor="ctr">
+                  <a:tcPr marL="91440" marR="91440" marT="45720" marB="45720" anchor="ctr">
                     <a:lnL w="12700" cap="flat" cmpd="sng" algn="ctr">
                       <a:solidFill>
                         <a:srgbClr val="DDDDDD"/>
@@ -10981,7 +11226,7 @@
                     <a:bodyPr/>
                     <a:lstStyle/>
                     <a:p>
-                      <a:pPr marL="0" indent="0" algn="ctr">
+                      <a:pPr algn="ctr" indent="0" marL="0">
                         <a:buNone/>
                       </a:pPr>
                       <a:r>
@@ -11002,7 +11247,7 @@
                       </a:endParaRPr>
                     </a:p>
                   </a:txBody>
-                  <a:tcPr anchor="ctr">
+                  <a:tcPr marL="91440" marR="91440" marT="45720" marB="45720" anchor="ctr">
                     <a:lnL w="12700" cap="flat" cmpd="sng" algn="ctr">
                       <a:solidFill>
                         <a:srgbClr val="DDDDDD"/>
@@ -11049,7 +11294,7 @@
                     <a:bodyPr/>
                     <a:lstStyle/>
                     <a:p>
-                      <a:pPr marL="0" indent="0" algn="ctr">
+                      <a:pPr algn="ctr" indent="0" marL="0">
                         <a:buNone/>
                       </a:pPr>
                       <a:r>
@@ -11070,7 +11315,7 @@
                       </a:endParaRPr>
                     </a:p>
                   </a:txBody>
-                  <a:tcPr anchor="ctr">
+                  <a:tcPr marL="91440" marR="91440" marT="45720" marB="45720" anchor="ctr">
                     <a:lnL w="12700" cap="flat" cmpd="sng" algn="ctr">
                       <a:solidFill>
                         <a:srgbClr val="DDDDDD"/>
@@ -11117,7 +11362,7 @@
                     <a:bodyPr/>
                     <a:lstStyle/>
                     <a:p>
-                      <a:pPr marL="0" indent="0" algn="ctr">
+                      <a:pPr algn="ctr" indent="0" marL="0">
                         <a:buNone/>
                       </a:pPr>
                       <a:r>
@@ -11138,7 +11383,7 @@
                       </a:endParaRPr>
                     </a:p>
                   </a:txBody>
-                  <a:tcPr anchor="ctr">
+                  <a:tcPr marL="91440" marR="91440" marT="45720" marB="45720" anchor="ctr">
                     <a:lnL w="12700" cap="flat" cmpd="sng" algn="ctr">
                       <a:solidFill>
                         <a:srgbClr val="DDDDDD"/>
@@ -11185,7 +11430,7 @@
                     <a:bodyPr/>
                     <a:lstStyle/>
                     <a:p>
-                      <a:pPr marL="0" indent="0" algn="ctr">
+                      <a:pPr algn="ctr" indent="0" marL="0">
                         <a:buNone/>
                       </a:pPr>
                       <a:r>
@@ -11206,7 +11451,7 @@
                       </a:endParaRPr>
                     </a:p>
                   </a:txBody>
-                  <a:tcPr anchor="ctr">
+                  <a:tcPr marL="91440" marR="91440" marT="45720" marB="45720" anchor="ctr">
                     <a:lnL w="12700" cap="flat" cmpd="sng" algn="ctr">
                       <a:solidFill>
                         <a:srgbClr val="DDDDDD"/>
@@ -11248,11 +11493,6 @@
                     </a:solidFill>
                   </a:tcPr>
                 </a:tc>
-                <a:extLst>
-                  <a:ext uri="{0D108BD9-81ED-4DB2-BD59-A6C34878D82A}">
-                    <a16:rowId xmlns:a16="http://schemas.microsoft.com/office/drawing/2014/main" val="10000"/>
-                  </a:ext>
-                </a:extLst>
               </a:tr>
               <a:tr h="457200">
                 <a:tc>
@@ -11260,7 +11500,7 @@
                     <a:bodyPr/>
                     <a:lstStyle/>
                     <a:p>
-                      <a:pPr marL="0" indent="0" algn="l">
+                      <a:pPr algn="l" indent="0" marL="0">
                         <a:buNone/>
                       </a:pPr>
                       <a:r>
@@ -11281,7 +11521,7 @@
                       </a:endParaRPr>
                     </a:p>
                   </a:txBody>
-                  <a:tcPr anchor="ctr">
+                  <a:tcPr marL="91440" marR="91440" marT="45720" marB="45720" anchor="ctr">
                     <a:lnL w="12700" cap="flat" cmpd="sng" algn="ctr">
                       <a:solidFill>
                         <a:srgbClr val="DDDDDD"/>
@@ -11328,7 +11568,7 @@
                     <a:bodyPr/>
                     <a:lstStyle/>
                     <a:p>
-                      <a:pPr marL="0" indent="0" algn="ctr">
+                      <a:pPr algn="ctr" indent="0" marL="0">
                         <a:buNone/>
                       </a:pPr>
                       <a:r>
@@ -11349,7 +11589,7 @@
                       </a:endParaRPr>
                     </a:p>
                   </a:txBody>
-                  <a:tcPr anchor="ctr">
+                  <a:tcPr marL="91440" marR="91440" marT="45720" marB="45720" anchor="ctr">
                     <a:lnL w="12700" cap="flat" cmpd="sng" algn="ctr">
                       <a:solidFill>
                         <a:srgbClr val="DDDDDD"/>
@@ -11396,7 +11636,7 @@
                     <a:bodyPr/>
                     <a:lstStyle/>
                     <a:p>
-                      <a:pPr marL="0" indent="0" algn="ctr">
+                      <a:pPr algn="ctr" indent="0" marL="0">
                         <a:buNone/>
                       </a:pPr>
                       <a:r>
@@ -11417,7 +11657,7 @@
                       </a:endParaRPr>
                     </a:p>
                   </a:txBody>
-                  <a:tcPr anchor="ctr">
+                  <a:tcPr marL="91440" marR="91440" marT="45720" marB="45720" anchor="ctr">
                     <a:lnL w="12700" cap="flat" cmpd="sng" algn="ctr">
                       <a:solidFill>
                         <a:srgbClr val="DDDDDD"/>
@@ -11464,7 +11704,7 @@
                     <a:bodyPr/>
                     <a:lstStyle/>
                     <a:p>
-                      <a:pPr marL="0" indent="0" algn="ctr">
+                      <a:pPr algn="ctr" indent="0" marL="0">
                         <a:buNone/>
                       </a:pPr>
                       <a:r>
@@ -11485,7 +11725,7 @@
                       </a:endParaRPr>
                     </a:p>
                   </a:txBody>
-                  <a:tcPr anchor="ctr">
+                  <a:tcPr marL="91440" marR="91440" marT="45720" marB="45720" anchor="ctr">
                     <a:lnL w="12700" cap="flat" cmpd="sng" algn="ctr">
                       <a:solidFill>
                         <a:srgbClr val="DDDDDD"/>
@@ -11532,7 +11772,7 @@
                     <a:bodyPr/>
                     <a:lstStyle/>
                     <a:p>
-                      <a:pPr marL="0" indent="0" algn="ctr">
+                      <a:pPr algn="ctr" indent="0" marL="0">
                         <a:buNone/>
                       </a:pPr>
                       <a:r>
@@ -11553,7 +11793,7 @@
                       </a:endParaRPr>
                     </a:p>
                   </a:txBody>
-                  <a:tcPr anchor="ctr">
+                  <a:tcPr marL="91440" marR="91440" marT="45720" marB="45720" anchor="ctr">
                     <a:lnL w="12700" cap="flat" cmpd="sng" algn="ctr">
                       <a:solidFill>
                         <a:srgbClr val="DDDDDD"/>
@@ -11595,11 +11835,6 @@
                     </a:solidFill>
                   </a:tcPr>
                 </a:tc>
-                <a:extLst>
-                  <a:ext uri="{0D108BD9-81ED-4DB2-BD59-A6C34878D82A}">
-                    <a16:rowId xmlns:a16="http://schemas.microsoft.com/office/drawing/2014/main" val="10001"/>
-                  </a:ext>
-                </a:extLst>
               </a:tr>
               <a:tr h="457200">
                 <a:tc>
@@ -11607,7 +11842,7 @@
                     <a:bodyPr/>
                     <a:lstStyle/>
                     <a:p>
-                      <a:pPr marL="0" indent="0" algn="l">
+                      <a:pPr algn="l" indent="0" marL="0">
                         <a:buNone/>
                       </a:pPr>
                       <a:r>
@@ -11628,7 +11863,7 @@
                       </a:endParaRPr>
                     </a:p>
                   </a:txBody>
-                  <a:tcPr anchor="ctr">
+                  <a:tcPr marL="91440" marR="91440" marT="45720" marB="45720" anchor="ctr">
                     <a:lnL w="12700" cap="flat" cmpd="sng" algn="ctr">
                       <a:solidFill>
                         <a:srgbClr val="DDDDDD"/>
@@ -11675,7 +11910,7 @@
                     <a:bodyPr/>
                     <a:lstStyle/>
                     <a:p>
-                      <a:pPr marL="0" indent="0" algn="ctr">
+                      <a:pPr algn="ctr" indent="0" marL="0">
                         <a:buNone/>
                       </a:pPr>
                       <a:r>
@@ -11696,7 +11931,7 @@
                       </a:endParaRPr>
                     </a:p>
                   </a:txBody>
-                  <a:tcPr anchor="ctr">
+                  <a:tcPr marL="91440" marR="91440" marT="45720" marB="45720" anchor="ctr">
                     <a:lnL w="12700" cap="flat" cmpd="sng" algn="ctr">
                       <a:solidFill>
                         <a:srgbClr val="DDDDDD"/>
@@ -11743,7 +11978,7 @@
                     <a:bodyPr/>
                     <a:lstStyle/>
                     <a:p>
-                      <a:pPr marL="0" indent="0" algn="ctr">
+                      <a:pPr algn="ctr" indent="0" marL="0">
                         <a:buNone/>
                       </a:pPr>
                       <a:r>
@@ -11764,7 +11999,7 @@
                       </a:endParaRPr>
                     </a:p>
                   </a:txBody>
-                  <a:tcPr anchor="ctr">
+                  <a:tcPr marL="91440" marR="91440" marT="45720" marB="45720" anchor="ctr">
                     <a:lnL w="12700" cap="flat" cmpd="sng" algn="ctr">
                       <a:solidFill>
                         <a:srgbClr val="DDDDDD"/>
@@ -11811,7 +12046,7 @@
                     <a:bodyPr/>
                     <a:lstStyle/>
                     <a:p>
-                      <a:pPr marL="0" indent="0" algn="ctr">
+                      <a:pPr algn="ctr" indent="0" marL="0">
                         <a:buNone/>
                       </a:pPr>
                       <a:r>
@@ -11832,7 +12067,7 @@
                       </a:endParaRPr>
                     </a:p>
                   </a:txBody>
-                  <a:tcPr anchor="ctr">
+                  <a:tcPr marL="91440" marR="91440" marT="45720" marB="45720" anchor="ctr">
                     <a:lnL w="12700" cap="flat" cmpd="sng" algn="ctr">
                       <a:solidFill>
                         <a:srgbClr val="DDDDDD"/>
@@ -11879,7 +12114,7 @@
                     <a:bodyPr/>
                     <a:lstStyle/>
                     <a:p>
-                      <a:pPr marL="0" indent="0" algn="ctr">
+                      <a:pPr algn="ctr" indent="0" marL="0">
                         <a:buNone/>
                       </a:pPr>
                       <a:r>
@@ -11900,7 +12135,7 @@
                       </a:endParaRPr>
                     </a:p>
                   </a:txBody>
-                  <a:tcPr anchor="ctr">
+                  <a:tcPr marL="91440" marR="91440" marT="45720" marB="45720" anchor="ctr">
                     <a:lnL w="12700" cap="flat" cmpd="sng" algn="ctr">
                       <a:solidFill>
                         <a:srgbClr val="DDDDDD"/>
@@ -11942,11 +12177,6 @@
                     </a:solidFill>
                   </a:tcPr>
                 </a:tc>
-                <a:extLst>
-                  <a:ext uri="{0D108BD9-81ED-4DB2-BD59-A6C34878D82A}">
-                    <a16:rowId xmlns:a16="http://schemas.microsoft.com/office/drawing/2014/main" val="10002"/>
-                  </a:ext>
-                </a:extLst>
               </a:tr>
               <a:tr h="457200">
                 <a:tc>
@@ -11954,7 +12184,7 @@
                     <a:bodyPr/>
                     <a:lstStyle/>
                     <a:p>
-                      <a:pPr marL="0" indent="0" algn="l">
+                      <a:pPr algn="l" indent="0" marL="0">
                         <a:buNone/>
                       </a:pPr>
                       <a:r>
@@ -11975,7 +12205,7 @@
                       </a:endParaRPr>
                     </a:p>
                   </a:txBody>
-                  <a:tcPr anchor="ctr">
+                  <a:tcPr marL="91440" marR="91440" marT="45720" marB="45720" anchor="ctr">
                     <a:lnL w="12700" cap="flat" cmpd="sng" algn="ctr">
                       <a:solidFill>
                         <a:srgbClr val="DDDDDD"/>
@@ -12022,7 +12252,7 @@
                     <a:bodyPr/>
                     <a:lstStyle/>
                     <a:p>
-                      <a:pPr marL="0" indent="0" algn="ctr">
+                      <a:pPr algn="ctr" indent="0" marL="0">
                         <a:buNone/>
                       </a:pPr>
                       <a:r>
@@ -12043,7 +12273,7 @@
                       </a:endParaRPr>
                     </a:p>
                   </a:txBody>
-                  <a:tcPr anchor="ctr">
+                  <a:tcPr marL="91440" marR="91440" marT="45720" marB="45720" anchor="ctr">
                     <a:lnL w="12700" cap="flat" cmpd="sng" algn="ctr">
                       <a:solidFill>
                         <a:srgbClr val="DDDDDD"/>
@@ -12090,7 +12320,7 @@
                     <a:bodyPr/>
                     <a:lstStyle/>
                     <a:p>
-                      <a:pPr marL="0" indent="0" algn="ctr">
+                      <a:pPr algn="ctr" indent="0" marL="0">
                         <a:buNone/>
                       </a:pPr>
                       <a:r>
@@ -12111,7 +12341,7 @@
                       </a:endParaRPr>
                     </a:p>
                   </a:txBody>
-                  <a:tcPr anchor="ctr">
+                  <a:tcPr marL="91440" marR="91440" marT="45720" marB="45720" anchor="ctr">
                     <a:lnL w="12700" cap="flat" cmpd="sng" algn="ctr">
                       <a:solidFill>
                         <a:srgbClr val="DDDDDD"/>
@@ -12158,7 +12388,7 @@
                     <a:bodyPr/>
                     <a:lstStyle/>
                     <a:p>
-                      <a:pPr marL="0" indent="0" algn="ctr">
+                      <a:pPr algn="ctr" indent="0" marL="0">
                         <a:buNone/>
                       </a:pPr>
                       <a:r>
@@ -12179,7 +12409,7 @@
                       </a:endParaRPr>
                     </a:p>
                   </a:txBody>
-                  <a:tcPr anchor="ctr">
+                  <a:tcPr marL="91440" marR="91440" marT="45720" marB="45720" anchor="ctr">
                     <a:lnL w="12700" cap="flat" cmpd="sng" algn="ctr">
                       <a:solidFill>
                         <a:srgbClr val="DDDDDD"/>
@@ -12226,7 +12456,7 @@
                     <a:bodyPr/>
                     <a:lstStyle/>
                     <a:p>
-                      <a:pPr marL="0" indent="0" algn="ctr">
+                      <a:pPr algn="ctr" indent="0" marL="0">
                         <a:buNone/>
                       </a:pPr>
                       <a:r>
@@ -12247,7 +12477,7 @@
                       </a:endParaRPr>
                     </a:p>
                   </a:txBody>
-                  <a:tcPr anchor="ctr">
+                  <a:tcPr marL="91440" marR="91440" marT="45720" marB="45720" anchor="ctr">
                     <a:lnL w="12700" cap="flat" cmpd="sng" algn="ctr">
                       <a:solidFill>
                         <a:srgbClr val="DDDDDD"/>
@@ -12289,11 +12519,6 @@
                     </a:solidFill>
                   </a:tcPr>
                 </a:tc>
-                <a:extLst>
-                  <a:ext uri="{0D108BD9-81ED-4DB2-BD59-A6C34878D82A}">
-                    <a16:rowId xmlns:a16="http://schemas.microsoft.com/office/drawing/2014/main" val="10003"/>
-                  </a:ext>
-                </a:extLst>
               </a:tr>
               <a:tr h="457200">
                 <a:tc>
@@ -12301,7 +12526,7 @@
                     <a:bodyPr/>
                     <a:lstStyle/>
                     <a:p>
-                      <a:pPr marL="0" indent="0" algn="l">
+                      <a:pPr algn="l" indent="0" marL="0">
                         <a:buNone/>
                       </a:pPr>
                       <a:r>
@@ -12322,7 +12547,7 @@
                       </a:endParaRPr>
                     </a:p>
                   </a:txBody>
-                  <a:tcPr anchor="ctr">
+                  <a:tcPr marL="91440" marR="91440" marT="45720" marB="45720" anchor="ctr">
                     <a:lnL w="12700" cap="flat" cmpd="sng" algn="ctr">
                       <a:solidFill>
                         <a:srgbClr val="DDDDDD"/>
@@ -12369,7 +12594,7 @@
                     <a:bodyPr/>
                     <a:lstStyle/>
                     <a:p>
-                      <a:pPr marL="0" indent="0" algn="ctr">
+                      <a:pPr algn="ctr" indent="0" marL="0">
                         <a:buNone/>
                       </a:pPr>
                       <a:r>
@@ -12390,7 +12615,7 @@
                       </a:endParaRPr>
                     </a:p>
                   </a:txBody>
-                  <a:tcPr anchor="ctr">
+                  <a:tcPr marL="91440" marR="91440" marT="45720" marB="45720" anchor="ctr">
                     <a:lnL w="12700" cap="flat" cmpd="sng" algn="ctr">
                       <a:solidFill>
                         <a:srgbClr val="DDDDDD"/>
@@ -12437,7 +12662,7 @@
                     <a:bodyPr/>
                     <a:lstStyle/>
                     <a:p>
-                      <a:pPr marL="0" indent="0" algn="ctr">
+                      <a:pPr algn="ctr" indent="0" marL="0">
                         <a:buNone/>
                       </a:pPr>
                       <a:r>
@@ -12458,7 +12683,7 @@
                       </a:endParaRPr>
                     </a:p>
                   </a:txBody>
-                  <a:tcPr anchor="ctr">
+                  <a:tcPr marL="91440" marR="91440" marT="45720" marB="45720" anchor="ctr">
                     <a:lnL w="12700" cap="flat" cmpd="sng" algn="ctr">
                       <a:solidFill>
                         <a:srgbClr val="DDDDDD"/>
@@ -12505,7 +12730,7 @@
                     <a:bodyPr/>
                     <a:lstStyle/>
                     <a:p>
-                      <a:pPr marL="0" indent="0" algn="ctr">
+                      <a:pPr algn="ctr" indent="0" marL="0">
                         <a:buNone/>
                       </a:pPr>
                       <a:r>
@@ -12526,7 +12751,7 @@
                       </a:endParaRPr>
                     </a:p>
                   </a:txBody>
-                  <a:tcPr anchor="ctr">
+                  <a:tcPr marL="91440" marR="91440" marT="45720" marB="45720" anchor="ctr">
                     <a:lnL w="12700" cap="flat" cmpd="sng" algn="ctr">
                       <a:solidFill>
                         <a:srgbClr val="DDDDDD"/>
@@ -12573,7 +12798,7 @@
                     <a:bodyPr/>
                     <a:lstStyle/>
                     <a:p>
-                      <a:pPr marL="0" indent="0" algn="ctr">
+                      <a:pPr algn="ctr" indent="0" marL="0">
                         <a:buNone/>
                       </a:pPr>
                       <a:r>
@@ -12594,7 +12819,7 @@
                       </a:endParaRPr>
                     </a:p>
                   </a:txBody>
-                  <a:tcPr anchor="ctr">
+                  <a:tcPr marL="91440" marR="91440" marT="45720" marB="45720" anchor="ctr">
                     <a:lnL w="12700" cap="flat" cmpd="sng" algn="ctr">
                       <a:solidFill>
                         <a:srgbClr val="DDDDDD"/>
@@ -12636,11 +12861,6 @@
                     </a:solidFill>
                   </a:tcPr>
                 </a:tc>
-                <a:extLst>
-                  <a:ext uri="{0D108BD9-81ED-4DB2-BD59-A6C34878D82A}">
-                    <a16:rowId xmlns:a16="http://schemas.microsoft.com/office/drawing/2014/main" val="10004"/>
-                  </a:ext>
-                </a:extLst>
               </a:tr>
             </a:tbl>
           </a:graphicData>
@@ -12667,7 +12887,7 @@
           <a:bodyPr wrap="square" rtlCol="0" anchor="t"/>
           <a:lstStyle/>
           <a:p>
-            <a:pPr marL="0" indent="0">
+            <a:pPr indent="0" marL="0">
               <a:lnSpc>
                 <a:spcPct val="125000"/>
               </a:lnSpc>
@@ -12690,14 +12910,14 @@
       </p:sp>
       <p:pic>
         <p:nvPicPr>
-          <p:cNvPr id="6" name="Image 0" descr="/sessions/eager-charming-feynman/mnt/MiniProject/docs/figures/method_comparison.png"/>
+          <p:cNvPr id="6" name="Image 0" descr="/sessions/eager-charming-feynman/mnt/MiniProject/docs/figures/method_comparison.png">    </p:cNvPr>
           <p:cNvPicPr>
             <a:picLocks noChangeAspect="1"/>
           </p:cNvPicPr>
           <p:nvPr/>
         </p:nvPicPr>
         <p:blipFill>
-          <a:blip r:embed="rId3"/>
+          <a:blip r:embed="rId1"/>
           <a:stretch>
             <a:fillRect/>
           </a:stretch>
@@ -12733,7 +12953,7 @@
           <a:bodyPr wrap="square" rtlCol="0" anchor="ctr"/>
           <a:lstStyle/>
           <a:p>
-            <a:pPr marL="0" indent="0" algn="ctr">
+            <a:pPr algn="ctr" indent="0" marL="0">
               <a:buNone/>
             </a:pPr>
             <a:r>
@@ -13052,319 +13272,4 @@
     </a:ext>
   </a:extLst>
 </a:theme>
-</file>
-
-<file path=ppt/theme/theme2.xml><?xml version="1.0" encoding="utf-8"?>
-<a:theme xmlns:a="http://schemas.openxmlformats.org/drawingml/2006/main" name="Office Theme">
-  <a:themeElements>
-    <a:clrScheme name="Office">
-      <a:dk1>
-        <a:sysClr val="windowText" lastClr="000000"/>
-      </a:dk1>
-      <a:lt1>
-        <a:sysClr val="window" lastClr="FFFFFF"/>
-      </a:lt1>
-      <a:dk2>
-        <a:srgbClr val="0E2841"/>
-      </a:dk2>
-      <a:lt2>
-        <a:srgbClr val="E8E8E8"/>
-      </a:lt2>
-      <a:accent1>
-        <a:srgbClr val="156082"/>
-      </a:accent1>
-      <a:accent2>
-        <a:srgbClr val="E97132"/>
-      </a:accent2>
-      <a:accent3>
-        <a:srgbClr val="196B24"/>
-      </a:accent3>
-      <a:accent4>
-        <a:srgbClr val="0F9ED5"/>
-      </a:accent4>
-      <a:accent5>
-        <a:srgbClr val="A02B93"/>
-      </a:accent5>
-      <a:accent6>
-        <a:srgbClr val="4EA72E"/>
-      </a:accent6>
-      <a:hlink>
-        <a:srgbClr val="467886"/>
-      </a:hlink>
-      <a:folHlink>
-        <a:srgbClr val="96607D"/>
-      </a:folHlink>
-    </a:clrScheme>
-    <a:fontScheme name="Office">
-      <a:majorFont>
-        <a:latin typeface="Aptos Display" panose="02110004020202020204"/>
-        <a:ea typeface=""/>
-        <a:cs typeface=""/>
-        <a:font script="Jpan" typeface="游ゴシック Light"/>
-        <a:font script="Hang" typeface="맑은 고딕"/>
-        <a:font script="Hans" typeface="等线 Light"/>
-        <a:font script="Hant" typeface="新細明體"/>
-        <a:font script="Arab" typeface="Times New Roman"/>
-        <a:font script="Hebr" typeface="Times New Roman"/>
-        <a:font script="Thai" typeface="Angsana New"/>
-        <a:font script="Ethi" typeface="Nyala"/>
-        <a:font script="Beng" typeface="Vrinda"/>
-        <a:font script="Gujr" typeface="Shruti"/>
-        <a:font script="Khmr" typeface="MoolBoran"/>
-        <a:font script="Knda" typeface="Tunga"/>
-        <a:font script="Guru" typeface="Raavi"/>
-        <a:font script="Cans" typeface="Euphemia"/>
-        <a:font script="Cher" typeface="Plantagenet Cherokee"/>
-        <a:font script="Yiii" typeface="Microsoft Yi Baiti"/>
-        <a:font script="Tibt" typeface="Microsoft Himalaya"/>
-        <a:font script="Thaa" typeface="MV Boli"/>
-        <a:font script="Deva" typeface="Mangal"/>
-        <a:font script="Telu" typeface="Gautami"/>
-        <a:font script="Taml" typeface="Latha"/>
-        <a:font script="Syrc" typeface="Estrangelo Edessa"/>
-        <a:font script="Orya" typeface="Kalinga"/>
-        <a:font script="Mlym" typeface="Kartika"/>
-        <a:font script="Laoo" typeface="DokChampa"/>
-        <a:font script="Sinh" typeface="Iskoola Pota"/>
-        <a:font script="Mong" typeface="Mongolian Baiti"/>
-        <a:font script="Viet" typeface="Times New Roman"/>
-        <a:font script="Uigh" typeface="Microsoft Uighur"/>
-        <a:font script="Geor" typeface="Sylfaen"/>
-        <a:font script="Armn" typeface="Arial"/>
-        <a:font script="Bugi" typeface="Leelawadee UI"/>
-        <a:font script="Bopo" typeface="Microsoft JhengHei"/>
-        <a:font script="Java" typeface="Javanese Text"/>
-        <a:font script="Lisu" typeface="Segoe UI"/>
-        <a:font script="Mymr" typeface="Myanmar Text"/>
-        <a:font script="Nkoo" typeface="Ebrima"/>
-        <a:font script="Olck" typeface="Nirmala UI"/>
-        <a:font script="Osma" typeface="Ebrima"/>
-        <a:font script="Phag" typeface="Phagspa"/>
-        <a:font script="Syrn" typeface="Estrangelo Edessa"/>
-        <a:font script="Syrj" typeface="Estrangelo Edessa"/>
-        <a:font script="Syre" typeface="Estrangelo Edessa"/>
-        <a:font script="Sora" typeface="Nirmala UI"/>
-        <a:font script="Tale" typeface="Microsoft Tai Le"/>
-        <a:font script="Talu" typeface="Microsoft New Tai Lue"/>
-        <a:font script="Tfng" typeface="Ebrima"/>
-      </a:majorFont>
-      <a:minorFont>
-        <a:latin typeface="Aptos" panose="02110004020202020204"/>
-        <a:ea typeface=""/>
-        <a:cs typeface=""/>
-        <a:font script="Jpan" typeface="游ゴシック"/>
-        <a:font script="Hang" typeface="맑은 고딕"/>
-        <a:font script="Hans" typeface="等线"/>
-        <a:font script="Hant" typeface="新細明體"/>
-        <a:font script="Arab" typeface="Arial"/>
-        <a:font script="Hebr" typeface="Arial"/>
-        <a:font script="Thai" typeface="Cordia New"/>
-        <a:font script="Ethi" typeface="Nyala"/>
-        <a:font script="Beng" typeface="Vrinda"/>
-        <a:font script="Gujr" typeface="Shruti"/>
-        <a:font script="Khmr" typeface="DaunPenh"/>
-        <a:font script="Knda" typeface="Tunga"/>
-        <a:font script="Guru" typeface="Raavi"/>
-        <a:font script="Cans" typeface="Euphemia"/>
-        <a:font script="Cher" typeface="Plantagenet Cherokee"/>
-        <a:font script="Yiii" typeface="Microsoft Yi Baiti"/>
-        <a:font script="Tibt" typeface="Microsoft Himalaya"/>
-        <a:font script="Thaa" typeface="MV Boli"/>
-        <a:font script="Deva" typeface="Mangal"/>
-        <a:font script="Telu" typeface="Gautami"/>
-        <a:font script="Taml" typeface="Latha"/>
-        <a:font script="Syrc" typeface="Estrangelo Edessa"/>
-        <a:font script="Orya" typeface="Kalinga"/>
-        <a:font script="Mlym" typeface="Kartika"/>
-        <a:font script="Laoo" typeface="DokChampa"/>
-        <a:font script="Sinh" typeface="Iskoola Pota"/>
-        <a:font script="Mong" typeface="Mongolian Baiti"/>
-        <a:font script="Viet" typeface="Arial"/>
-        <a:font script="Uigh" typeface="Microsoft Uighur"/>
-        <a:font script="Geor" typeface="Sylfaen"/>
-        <a:font script="Armn" typeface="Arial"/>
-        <a:font script="Bugi" typeface="Leelawadee UI"/>
-        <a:font script="Bopo" typeface="Microsoft JhengHei"/>
-        <a:font script="Java" typeface="Javanese Text"/>
-        <a:font script="Lisu" typeface="Segoe UI"/>
-        <a:font script="Mymr" typeface="Myanmar Text"/>
-        <a:font script="Nkoo" typeface="Ebrima"/>
-        <a:font script="Olck" typeface="Nirmala UI"/>
-        <a:font script="Osma" typeface="Ebrima"/>
-        <a:font script="Phag" typeface="Phagspa"/>
-        <a:font script="Syrn" typeface="Estrangelo Edessa"/>
-        <a:font script="Syrj" typeface="Estrangelo Edessa"/>
-        <a:font script="Syre" typeface="Estrangelo Edessa"/>
-        <a:font script="Sora" typeface="Nirmala UI"/>
-        <a:font script="Tale" typeface="Microsoft Tai Le"/>
-        <a:font script="Talu" typeface="Microsoft New Tai Lue"/>
-        <a:font script="Tfng" typeface="Ebrima"/>
-      </a:minorFont>
-    </a:fontScheme>
-    <a:fmtScheme name="Office">
-      <a:fillStyleLst>
-        <a:solidFill>
-          <a:schemeClr val="phClr"/>
-        </a:solidFill>
-        <a:gradFill rotWithShape="1">
-          <a:gsLst>
-            <a:gs pos="0">
-              <a:schemeClr val="phClr">
-                <a:lumMod val="110000"/>
-                <a:satMod val="105000"/>
-                <a:tint val="67000"/>
-              </a:schemeClr>
-            </a:gs>
-            <a:gs pos="50000">
-              <a:schemeClr val="phClr">
-                <a:lumMod val="105000"/>
-                <a:satMod val="103000"/>
-                <a:tint val="73000"/>
-              </a:schemeClr>
-            </a:gs>
-            <a:gs pos="100000">
-              <a:schemeClr val="phClr">
-                <a:lumMod val="105000"/>
-                <a:satMod val="109000"/>
-                <a:tint val="81000"/>
-              </a:schemeClr>
-            </a:gs>
-          </a:gsLst>
-          <a:lin ang="5400000" scaled="0"/>
-        </a:gradFill>
-        <a:gradFill rotWithShape="1">
-          <a:gsLst>
-            <a:gs pos="0">
-              <a:schemeClr val="phClr">
-                <a:satMod val="103000"/>
-                <a:lumMod val="102000"/>
-                <a:tint val="94000"/>
-              </a:schemeClr>
-            </a:gs>
-            <a:gs pos="50000">
-              <a:schemeClr val="phClr">
-                <a:satMod val="110000"/>
-                <a:lumMod val="100000"/>
-                <a:shade val="100000"/>
-              </a:schemeClr>
-            </a:gs>
-            <a:gs pos="100000">
-              <a:schemeClr val="phClr">
-                <a:lumMod val="99000"/>
-                <a:satMod val="120000"/>
-                <a:shade val="78000"/>
-              </a:schemeClr>
-            </a:gs>
-          </a:gsLst>
-          <a:lin ang="5400000" scaled="0"/>
-        </a:gradFill>
-      </a:fillStyleLst>
-      <a:lnStyleLst>
-        <a:ln w="12700" cap="flat" cmpd="sng" algn="ctr">
-          <a:solidFill>
-            <a:schemeClr val="phClr"/>
-          </a:solidFill>
-          <a:prstDash val="solid"/>
-          <a:miter lim="800000"/>
-        </a:ln>
-        <a:ln w="19050" cap="flat" cmpd="sng" algn="ctr">
-          <a:solidFill>
-            <a:schemeClr val="phClr"/>
-          </a:solidFill>
-          <a:prstDash val="solid"/>
-          <a:miter lim="800000"/>
-        </a:ln>
-        <a:ln w="25400" cap="flat" cmpd="sng" algn="ctr">
-          <a:solidFill>
-            <a:schemeClr val="phClr"/>
-          </a:solidFill>
-          <a:prstDash val="solid"/>
-          <a:miter lim="800000"/>
-        </a:ln>
-      </a:lnStyleLst>
-      <a:effectStyleLst>
-        <a:effectStyle>
-          <a:effectLst/>
-        </a:effectStyle>
-        <a:effectStyle>
-          <a:effectLst/>
-        </a:effectStyle>
-        <a:effectStyle>
-          <a:effectLst>
-            <a:outerShdw blurRad="57150" dist="19050" dir="5400000" algn="ctr" rotWithShape="0">
-              <a:srgbClr val="000000">
-                <a:alpha val="63000"/>
-              </a:srgbClr>
-            </a:outerShdw>
-          </a:effectLst>
-        </a:effectStyle>
-      </a:effectStyleLst>
-      <a:bgFillStyleLst>
-        <a:solidFill>
-          <a:schemeClr val="phClr"/>
-        </a:solidFill>
-        <a:solidFill>
-          <a:schemeClr val="phClr">
-            <a:tint val="95000"/>
-            <a:satMod val="170000"/>
-          </a:schemeClr>
-        </a:solidFill>
-        <a:gradFill rotWithShape="1">
-          <a:gsLst>
-            <a:gs pos="0">
-              <a:schemeClr val="phClr">
-                <a:tint val="93000"/>
-                <a:satMod val="150000"/>
-                <a:shade val="98000"/>
-                <a:lumMod val="102000"/>
-              </a:schemeClr>
-            </a:gs>
-            <a:gs pos="50000">
-              <a:schemeClr val="phClr">
-                <a:tint val="98000"/>
-                <a:satMod val="130000"/>
-                <a:shade val="90000"/>
-                <a:lumMod val="103000"/>
-              </a:schemeClr>
-            </a:gs>
-            <a:gs pos="100000">
-              <a:schemeClr val="phClr">
-                <a:shade val="63000"/>
-                <a:satMod val="120000"/>
-              </a:schemeClr>
-            </a:gs>
-          </a:gsLst>
-          <a:lin ang="5400000" scaled="0"/>
-        </a:gradFill>
-      </a:bgFillStyleLst>
-    </a:fmtScheme>
-  </a:themeElements>
-  <a:objectDefaults>
-    <a:lnDef>
-      <a:spPr/>
-      <a:bodyPr/>
-      <a:lstStyle/>
-      <a:style>
-        <a:lnRef idx="2">
-          <a:schemeClr val="accent1"/>
-        </a:lnRef>
-        <a:fillRef idx="0">
-          <a:schemeClr val="accent1"/>
-        </a:fillRef>
-        <a:effectRef idx="1">
-          <a:schemeClr val="accent1"/>
-        </a:effectRef>
-        <a:fontRef idx="minor">
-          <a:schemeClr val="tx1"/>
-        </a:fontRef>
-      </a:style>
-    </a:lnDef>
-  </a:objectDefaults>
-  <a:extraClrSchemeLst/>
-  <a:extLst>
-    <a:ext uri="{05A4C25C-085E-4340-85A3-A5531E510DB2}">
-      <thm15:themeFamily xmlns:thm15="http://schemas.microsoft.com/office/thememl/2012/main" name="Office Theme" id="{2E142A2C-CD16-42D6-873A-C26D2A0506FA}" vid="{1BDDFF52-6CD6-40A5-AB3C-68EB2F1E4D0A}"/>
-    </a:ext>
-  </a:extLst>
-</a:theme>
 </file>